--- a/content/05-teaching-resources/slides/core/15-hardware-and-software.pptx
+++ b/content/05-teaching-resources/slides/core/15-hardware-and-software.pptx
@@ -10,10 +10,14 @@
     <p:sldId id="258" r:id="rId9"/>
     <p:sldId id="259" r:id="rId10"/>
     <p:sldId id="260" r:id="rId11"/>
-    <p:sldId id="261" r:id="rId12"/>
+    <p:sldId id="261" r:id="rId13"/>
     <p:sldId id="262" r:id="rId14"/>
     <p:sldId id="263" r:id="rId15"/>
     <p:sldId id="264" r:id="rId16"/>
+    <p:sldId id="265" r:id="rId17"/>
+    <p:sldId id="266" r:id="rId18"/>
+    <p:sldId id="267" r:id="rId19"/>
+    <p:sldId id="268" r:id="rId20"/>
   </p:sldIdLst>
   <p:sldSz cx="12191695" cy="6858000" type="screen4x3"/>
   <p:notesSz cx="6858000" cy="9144000"/>
@@ -510,7 +514,22 @@
           <a:lstStyle/>
           <a:p>
             <a:r>
-              <a:t>Give students a few minutes to answer on mini whiteboards or paper, then reveal the answers on the next slide.</a:t>
+              <a:t>Answers:</a:t>
+            </a:r>
+          </a:p>
+          <a:p>
+            <a:r>
+              <a:t>1. RAM.</a:t>
+            </a:r>
+          </a:p>
+          <a:p>
+            <a:r>
+              <a:t>2. Graphics and parallel processing.</a:t>
+            </a:r>
+          </a:p>
+          <a:p>
+            <a:r>
+              <a:t>3. To run IDEs, emulators and VMs together.</a:t>
             </a:r>
           </a:p>
         </p:txBody>
@@ -580,7 +599,22 @@
           <a:lstStyle/>
           <a:p>
             <a:r>
-              <a:t>Talk through any answers the class found difficult.</a:t>
+              <a:t>Answers:</a:t>
+            </a:r>
+          </a:p>
+          <a:p>
+            <a:r>
+              <a:t>1. A compiler translates the whole program first; an interpreter translates line by line.</a:t>
+            </a:r>
+          </a:p>
+          <a:p>
+            <a:r>
+              <a:t>2. E.g. editor, debugger, breakpoints, syntax highlighting.</a:t>
+            </a:r>
+          </a:p>
+          <a:p>
+            <a:r>
+              <a:t>3. Interpreted.</a:t>
             </a:r>
           </a:p>
         </p:txBody>
@@ -606,6 +640,146 @@
 </file>
 
 <file path=ppt/notesSlides/notesSlide3.xml><?xml version="1.0" encoding="utf-8"?>
+<p:notes xmlns:a="http://schemas.openxmlformats.org/drawingml/2006/main" xmlns:p="http://schemas.openxmlformats.org/presentationml/2006/main" xmlns:r="http://schemas.openxmlformats.org/officeDocument/2006/relationships">
+  <p:cSld>
+    <p:spTree>
+      <p:nvGrpSpPr>
+        <p:cNvPr id="1" name=""/>
+        <p:cNvGrpSpPr/>
+        <p:nvPr/>
+      </p:nvGrpSpPr>
+      <p:grpSpPr>
+        <a:xfrm>
+          <a:off x="0" y="0"/>
+          <a:ext cx="0" cy="0"/>
+          <a:chOff x="0" y="0"/>
+          <a:chExt cx="0" cy="0"/>
+        </a:xfrm>
+      </p:grpSpPr>
+      <p:sp>
+        <p:nvSpPr>
+          <p:cNvPr id="2" name="Slide Image Placeholder 1"/>
+          <p:cNvSpPr>
+            <a:spLocks noGrp="1"/>
+          </p:cNvSpPr>
+          <p:nvPr>
+            <p:ph type="sldImg" idx="2"/>
+          </p:nvPr>
+        </p:nvSpPr>
+        <p:spPr/>
+      </p:sp>
+      <p:sp>
+        <p:nvSpPr>
+          <p:cNvPr id="3" name="Notes Placeholder 2"/>
+          <p:cNvSpPr>
+            <a:spLocks noGrp="1"/>
+          </p:cNvSpPr>
+          <p:nvPr>
+            <p:ph type="body" idx="3" sz="quarter"/>
+          </p:nvPr>
+        </p:nvSpPr>
+        <p:spPr/>
+        <p:txBody>
+          <a:bodyPr/>
+          <a:lstStyle/>
+          <a:p>
+            <a:r>
+              <a:t>Give students a few minutes to answer on mini whiteboards or paper, then reveal the answers on the next slide.</a:t>
+            </a:r>
+          </a:p>
+        </p:txBody>
+      </p:sp>
+      <p:sp>
+        <p:nvSpPr>
+          <p:cNvPr id="4" name="Slide Number Placeholder 3"/>
+          <p:cNvSpPr>
+            <a:spLocks noGrp="1"/>
+          </p:cNvSpPr>
+          <p:nvPr>
+            <p:ph type="sldNum" idx="5" sz="quarter"/>
+          </p:nvPr>
+        </p:nvSpPr>
+        <p:spPr/>
+      </p:sp>
+    </p:spTree>
+  </p:cSld>
+  <p:clrMapOvr>
+    <a:masterClrMapping/>
+  </p:clrMapOvr>
+</p:notes>
+</file>
+
+<file path=ppt/notesSlides/notesSlide4.xml><?xml version="1.0" encoding="utf-8"?>
+<p:notes xmlns:a="http://schemas.openxmlformats.org/drawingml/2006/main" xmlns:p="http://schemas.openxmlformats.org/presentationml/2006/main" xmlns:r="http://schemas.openxmlformats.org/officeDocument/2006/relationships">
+  <p:cSld>
+    <p:spTree>
+      <p:nvGrpSpPr>
+        <p:cNvPr id="1" name=""/>
+        <p:cNvGrpSpPr/>
+        <p:nvPr/>
+      </p:nvGrpSpPr>
+      <p:grpSpPr>
+        <a:xfrm>
+          <a:off x="0" y="0"/>
+          <a:ext cx="0" cy="0"/>
+          <a:chOff x="0" y="0"/>
+          <a:chExt cx="0" cy="0"/>
+        </a:xfrm>
+      </p:grpSpPr>
+      <p:sp>
+        <p:nvSpPr>
+          <p:cNvPr id="2" name="Slide Image Placeholder 1"/>
+          <p:cNvSpPr>
+            <a:spLocks noGrp="1"/>
+          </p:cNvSpPr>
+          <p:nvPr>
+            <p:ph type="sldImg" idx="2"/>
+          </p:nvPr>
+        </p:nvSpPr>
+        <p:spPr/>
+      </p:sp>
+      <p:sp>
+        <p:nvSpPr>
+          <p:cNvPr id="3" name="Notes Placeholder 2"/>
+          <p:cNvSpPr>
+            <a:spLocks noGrp="1"/>
+          </p:cNvSpPr>
+          <p:nvPr>
+            <p:ph type="body" idx="3" sz="quarter"/>
+          </p:nvPr>
+        </p:nvSpPr>
+        <p:spPr/>
+        <p:txBody>
+          <a:bodyPr/>
+          <a:lstStyle/>
+          <a:p>
+            <a:r>
+              <a:t>Talk through any answers the class found difficult.</a:t>
+            </a:r>
+          </a:p>
+        </p:txBody>
+      </p:sp>
+      <p:sp>
+        <p:nvSpPr>
+          <p:cNvPr id="4" name="Slide Number Placeholder 3"/>
+          <p:cNvSpPr>
+            <a:spLocks noGrp="1"/>
+          </p:cNvSpPr>
+          <p:nvPr>
+            <p:ph type="sldNum" idx="5" sz="quarter"/>
+          </p:nvPr>
+        </p:nvSpPr>
+        <p:spPr/>
+      </p:sp>
+    </p:spTree>
+  </p:cSld>
+  <p:clrMapOvr>
+    <a:masterClrMapping/>
+  </p:clrMapOvr>
+</p:notes>
+</file>
+
+<file path=ppt/notesSlides/notesSlide5.xml><?xml version="1.0" encoding="utf-8"?>
 <p:notes xmlns:a="http://schemas.openxmlformats.org/drawingml/2006/main" xmlns:p="http://schemas.openxmlformats.org/presentationml/2006/main" xmlns:r="http://schemas.openxmlformats.org/officeDocument/2006/relationships">
   <p:cSld>
     <p:spTree>
@@ -3975,6 +4149,2355 @@
 </p:sld>
 </file>
 
+<file path=ppt/slides/slide10.xml><?xml version="1.0" encoding="utf-8"?>
+<p:sld xmlns:a="http://schemas.openxmlformats.org/drawingml/2006/main" xmlns:p="http://schemas.openxmlformats.org/presentationml/2006/main" xmlns:r="http://schemas.openxmlformats.org/officeDocument/2006/relationships">
+  <p:cSld>
+    <p:bg>
+      <p:bgPr>
+        <a:solidFill>
+          <a:srgbClr val="FFFFFF"/>
+        </a:solidFill>
+        <a:effectLst/>
+      </p:bgPr>
+    </p:bg>
+    <p:spTree>
+      <p:nvGrpSpPr>
+        <p:cNvPr id="1" name=""/>
+        <p:cNvGrpSpPr/>
+        <p:nvPr/>
+      </p:nvGrpSpPr>
+      <p:grpSpPr/>
+      <p:sp>
+        <p:nvSpPr>
+          <p:cNvPr id="2" name="TextBox 1"/>
+          <p:cNvSpPr txBox="1"/>
+          <p:nvPr/>
+        </p:nvSpPr>
+        <p:spPr>
+          <a:xfrm>
+            <a:off x="548640" y="320040"/>
+            <a:ext cx="11094415" cy="274320"/>
+          </a:xfrm>
+          <a:prstGeom prst="rect">
+            <a:avLst/>
+          </a:prstGeom>
+          <a:noFill/>
+        </p:spPr>
+        <p:txBody>
+          <a:bodyPr wrap="square" anchor="t" lIns="0" rIns="0" tIns="0" bIns="0"/>
+          <a:lstStyle/>
+          <a:p>
+            <a:pPr algn="l"/>
+            <a:r>
+              <a:rPr sz="1100" b="1" i="0">
+                <a:solidFill>
+                  <a:srgbClr val="54595D"/>
+                </a:solidFill>
+                <a:latin typeface="Calibri"/>
+              </a:rPr>
+              <a:t>CORE COMPONENT  ·  Core Paper 2</a:t>
+            </a:r>
+          </a:p>
+        </p:txBody>
+      </p:sp>
+      <p:sp>
+        <p:nvSpPr>
+          <p:cNvPr id="3" name="TextBox 2"/>
+          <p:cNvSpPr txBox="1"/>
+          <p:nvPr/>
+        </p:nvSpPr>
+        <p:spPr>
+          <a:xfrm>
+            <a:off x="548640" y="566928"/>
+            <a:ext cx="11094415" cy="822960"/>
+          </a:xfrm>
+          <a:prstGeom prst="rect">
+            <a:avLst/>
+          </a:prstGeom>
+          <a:noFill/>
+        </p:spPr>
+        <p:txBody>
+          <a:bodyPr wrap="square" anchor="ctr" lIns="0" rIns="0" tIns="0" bIns="0"/>
+          <a:lstStyle/>
+          <a:p>
+            <a:pPr algn="l"/>
+            <a:r>
+              <a:rPr sz="3200" b="1" i="0">
+                <a:solidFill>
+                  <a:srgbClr val="03306E"/>
+                </a:solidFill>
+                <a:latin typeface="Cambria"/>
+              </a:rPr>
+              <a:t>Check your understanding</a:t>
+            </a:r>
+          </a:p>
+        </p:txBody>
+      </p:sp>
+      <p:sp>
+        <p:nvSpPr>
+          <p:cNvPr id="4" name="TextBox 3"/>
+          <p:cNvSpPr txBox="1"/>
+          <p:nvPr/>
+        </p:nvSpPr>
+        <p:spPr>
+          <a:xfrm>
+            <a:off x="548640" y="6446520"/>
+            <a:ext cx="8229600" cy="274320"/>
+          </a:xfrm>
+          <a:prstGeom prst="rect">
+            <a:avLst/>
+          </a:prstGeom>
+          <a:noFill/>
+        </p:spPr>
+        <p:txBody>
+          <a:bodyPr wrap="square" anchor="t" lIns="0" rIns="0" tIns="0" bIns="0"/>
+          <a:lstStyle/>
+          <a:p>
+            <a:pPr algn="l"/>
+            <a:r>
+              <a:rPr sz="1000" b="0" i="0">
+                <a:solidFill>
+                  <a:srgbClr val="54595D"/>
+                </a:solidFill>
+                <a:latin typeface="Calibri"/>
+              </a:rPr>
+              <a:t>Digital Software Development T Level  ·  Hardware and Software</a:t>
+            </a:r>
+          </a:p>
+        </p:txBody>
+      </p:sp>
+      <p:sp>
+        <p:nvSpPr>
+          <p:cNvPr id="5" name="TextBox 4"/>
+          <p:cNvSpPr txBox="1"/>
+          <p:nvPr/>
+        </p:nvSpPr>
+        <p:spPr>
+          <a:xfrm>
+            <a:off x="10728655" y="6446520"/>
+            <a:ext cx="914400" cy="274320"/>
+          </a:xfrm>
+          <a:prstGeom prst="rect">
+            <a:avLst/>
+          </a:prstGeom>
+          <a:noFill/>
+        </p:spPr>
+        <p:txBody>
+          <a:bodyPr wrap="square" anchor="t" lIns="0" rIns="0" tIns="0" bIns="0"/>
+          <a:lstStyle/>
+          <a:p>
+            <a:pPr algn="r"/>
+            <a:r>
+              <a:rPr sz="1000" b="0" i="0">
+                <a:solidFill>
+                  <a:srgbClr val="54595D"/>
+                </a:solidFill>
+                <a:latin typeface="Calibri"/>
+              </a:rPr>
+              <a:t>10</a:t>
+            </a:r>
+          </a:p>
+        </p:txBody>
+      </p:sp>
+      <p:sp>
+        <p:nvSpPr>
+          <p:cNvPr id="6" name="Oval 5"/>
+          <p:cNvSpPr/>
+          <p:nvPr/>
+        </p:nvSpPr>
+        <p:spPr>
+          <a:xfrm>
+            <a:off x="548640" y="1618488"/>
+            <a:ext cx="411480" cy="411480"/>
+          </a:xfrm>
+          <a:prstGeom prst="ellipse">
+            <a:avLst/>
+          </a:prstGeom>
+          <a:solidFill>
+            <a:srgbClr val="F2B705"/>
+          </a:solidFill>
+          <a:ln>
+            <a:noFill/>
+          </a:ln>
+          <a:effectLst/>
+        </p:spPr>
+        <p:style>
+          <a:lnRef idx="1">
+            <a:schemeClr val="accent1"/>
+          </a:lnRef>
+          <a:fillRef idx="3">
+            <a:schemeClr val="accent1"/>
+          </a:fillRef>
+          <a:effectRef idx="2">
+            <a:schemeClr val="accent1"/>
+          </a:effectRef>
+          <a:fontRef idx="minor">
+            <a:schemeClr val="lt1"/>
+          </a:fontRef>
+        </p:style>
+        <p:txBody>
+          <a:bodyPr rtlCol="0" anchor="ctr" lIns="0" rIns="0" tIns="0" bIns="0"/>
+          <a:lstStyle/>
+          <a:p>
+            <a:pPr algn="ctr"/>
+            <a:r>
+              <a:rPr sz="1400" b="1">
+                <a:solidFill>
+                  <a:srgbClr val="202122"/>
+                </a:solidFill>
+                <a:latin typeface="Calibri"/>
+              </a:rPr>
+              <a:t>1</a:t>
+            </a:r>
+          </a:p>
+        </p:txBody>
+      </p:sp>
+      <p:sp>
+        <p:nvSpPr>
+          <p:cNvPr id="7" name="TextBox 6"/>
+          <p:cNvSpPr txBox="1"/>
+          <p:nvPr/>
+        </p:nvSpPr>
+        <p:spPr>
+          <a:xfrm>
+            <a:off x="1234440" y="1600200"/>
+            <a:ext cx="10408615" cy="1030986"/>
+          </a:xfrm>
+          <a:prstGeom prst="rect">
+            <a:avLst/>
+          </a:prstGeom>
+          <a:noFill/>
+        </p:spPr>
+        <p:txBody>
+          <a:bodyPr wrap="square" anchor="t" lIns="0" rIns="0" tIns="0" bIns="0"/>
+          <a:lstStyle/>
+          <a:p>
+            <a:pPr algn="l"/>
+            <a:r>
+              <a:rPr sz="2200" b="0" i="0">
+                <a:solidFill>
+                  <a:srgbClr val="202122"/>
+                </a:solidFill>
+                <a:latin typeface="Calibri"/>
+              </a:rPr>
+              <a:t>Which memory is volatile?</a:t>
+            </a:r>
+          </a:p>
+        </p:txBody>
+      </p:sp>
+      <p:sp>
+        <p:nvSpPr>
+          <p:cNvPr id="8" name="Oval 7"/>
+          <p:cNvSpPr/>
+          <p:nvPr/>
+        </p:nvSpPr>
+        <p:spPr>
+          <a:xfrm>
+            <a:off x="548640" y="2814066"/>
+            <a:ext cx="411480" cy="411480"/>
+          </a:xfrm>
+          <a:prstGeom prst="ellipse">
+            <a:avLst/>
+          </a:prstGeom>
+          <a:solidFill>
+            <a:srgbClr val="F2B705"/>
+          </a:solidFill>
+          <a:ln>
+            <a:noFill/>
+          </a:ln>
+          <a:effectLst/>
+        </p:spPr>
+        <p:style>
+          <a:lnRef idx="1">
+            <a:schemeClr val="accent1"/>
+          </a:lnRef>
+          <a:fillRef idx="3">
+            <a:schemeClr val="accent1"/>
+          </a:fillRef>
+          <a:effectRef idx="2">
+            <a:schemeClr val="accent1"/>
+          </a:effectRef>
+          <a:fontRef idx="minor">
+            <a:schemeClr val="lt1"/>
+          </a:fontRef>
+        </p:style>
+        <p:txBody>
+          <a:bodyPr rtlCol="0" anchor="ctr" lIns="0" rIns="0" tIns="0" bIns="0"/>
+          <a:lstStyle/>
+          <a:p>
+            <a:pPr algn="ctr"/>
+            <a:r>
+              <a:rPr sz="1400" b="1">
+                <a:solidFill>
+                  <a:srgbClr val="202122"/>
+                </a:solidFill>
+                <a:latin typeface="Calibri"/>
+              </a:rPr>
+              <a:t>2</a:t>
+            </a:r>
+          </a:p>
+        </p:txBody>
+      </p:sp>
+      <p:sp>
+        <p:nvSpPr>
+          <p:cNvPr id="9" name="TextBox 8"/>
+          <p:cNvSpPr txBox="1"/>
+          <p:nvPr/>
+        </p:nvSpPr>
+        <p:spPr>
+          <a:xfrm>
+            <a:off x="1234440" y="2795778"/>
+            <a:ext cx="10408615" cy="1030986"/>
+          </a:xfrm>
+          <a:prstGeom prst="rect">
+            <a:avLst/>
+          </a:prstGeom>
+          <a:noFill/>
+        </p:spPr>
+        <p:txBody>
+          <a:bodyPr wrap="square" anchor="t" lIns="0" rIns="0" tIns="0" bIns="0"/>
+          <a:lstStyle/>
+          <a:p>
+            <a:pPr algn="l"/>
+            <a:r>
+              <a:rPr sz="2200" b="0" i="0">
+                <a:solidFill>
+                  <a:srgbClr val="202122"/>
+                </a:solidFill>
+                <a:latin typeface="Calibri"/>
+              </a:rPr>
+              <a:t>Which OS type would control a pacemaker?</a:t>
+            </a:r>
+          </a:p>
+        </p:txBody>
+      </p:sp>
+      <p:sp>
+        <p:nvSpPr>
+          <p:cNvPr id="10" name="Oval 9"/>
+          <p:cNvSpPr/>
+          <p:nvPr/>
+        </p:nvSpPr>
+        <p:spPr>
+          <a:xfrm>
+            <a:off x="548640" y="4009644"/>
+            <a:ext cx="411480" cy="411480"/>
+          </a:xfrm>
+          <a:prstGeom prst="ellipse">
+            <a:avLst/>
+          </a:prstGeom>
+          <a:solidFill>
+            <a:srgbClr val="F2B705"/>
+          </a:solidFill>
+          <a:ln>
+            <a:noFill/>
+          </a:ln>
+          <a:effectLst/>
+        </p:spPr>
+        <p:style>
+          <a:lnRef idx="1">
+            <a:schemeClr val="accent1"/>
+          </a:lnRef>
+          <a:fillRef idx="3">
+            <a:schemeClr val="accent1"/>
+          </a:fillRef>
+          <a:effectRef idx="2">
+            <a:schemeClr val="accent1"/>
+          </a:effectRef>
+          <a:fontRef idx="minor">
+            <a:schemeClr val="lt1"/>
+          </a:fontRef>
+        </p:style>
+        <p:txBody>
+          <a:bodyPr rtlCol="0" anchor="ctr" lIns="0" rIns="0" tIns="0" bIns="0"/>
+          <a:lstStyle/>
+          <a:p>
+            <a:pPr algn="ctr"/>
+            <a:r>
+              <a:rPr sz="1400" b="1">
+                <a:solidFill>
+                  <a:srgbClr val="202122"/>
+                </a:solidFill>
+                <a:latin typeface="Calibri"/>
+              </a:rPr>
+              <a:t>3</a:t>
+            </a:r>
+          </a:p>
+        </p:txBody>
+      </p:sp>
+      <p:sp>
+        <p:nvSpPr>
+          <p:cNvPr id="11" name="TextBox 10"/>
+          <p:cNvSpPr txBox="1"/>
+          <p:nvPr/>
+        </p:nvSpPr>
+        <p:spPr>
+          <a:xfrm>
+            <a:off x="1234440" y="3991356"/>
+            <a:ext cx="10408615" cy="1030986"/>
+          </a:xfrm>
+          <a:prstGeom prst="rect">
+            <a:avLst/>
+          </a:prstGeom>
+          <a:noFill/>
+        </p:spPr>
+        <p:txBody>
+          <a:bodyPr wrap="square" anchor="t" lIns="0" rIns="0" tIns="0" bIns="0"/>
+          <a:lstStyle/>
+          <a:p>
+            <a:pPr algn="l"/>
+            <a:r>
+              <a:rPr sz="2200" b="0" i="0">
+                <a:solidFill>
+                  <a:srgbClr val="202122"/>
+                </a:solidFill>
+                <a:latin typeface="Calibri"/>
+              </a:rPr>
+              <a:t>What is the difference between a compiler and an interpreter?</a:t>
+            </a:r>
+          </a:p>
+        </p:txBody>
+      </p:sp>
+      <p:sp>
+        <p:nvSpPr>
+          <p:cNvPr id="12" name="Oval 11"/>
+          <p:cNvSpPr/>
+          <p:nvPr/>
+        </p:nvSpPr>
+        <p:spPr>
+          <a:xfrm>
+            <a:off x="548640" y="5205221"/>
+            <a:ext cx="411480" cy="411480"/>
+          </a:xfrm>
+          <a:prstGeom prst="ellipse">
+            <a:avLst/>
+          </a:prstGeom>
+          <a:solidFill>
+            <a:srgbClr val="F2B705"/>
+          </a:solidFill>
+          <a:ln>
+            <a:noFill/>
+          </a:ln>
+          <a:effectLst/>
+        </p:spPr>
+        <p:style>
+          <a:lnRef idx="1">
+            <a:schemeClr val="accent1"/>
+          </a:lnRef>
+          <a:fillRef idx="3">
+            <a:schemeClr val="accent1"/>
+          </a:fillRef>
+          <a:effectRef idx="2">
+            <a:schemeClr val="accent1"/>
+          </a:effectRef>
+          <a:fontRef idx="minor">
+            <a:schemeClr val="lt1"/>
+          </a:fontRef>
+        </p:style>
+        <p:txBody>
+          <a:bodyPr rtlCol="0" anchor="ctr" lIns="0" rIns="0" tIns="0" bIns="0"/>
+          <a:lstStyle/>
+          <a:p>
+            <a:pPr algn="ctr"/>
+            <a:r>
+              <a:rPr sz="1400" b="1">
+                <a:solidFill>
+                  <a:srgbClr val="202122"/>
+                </a:solidFill>
+                <a:latin typeface="Calibri"/>
+              </a:rPr>
+              <a:t>4</a:t>
+            </a:r>
+          </a:p>
+        </p:txBody>
+      </p:sp>
+      <p:sp>
+        <p:nvSpPr>
+          <p:cNvPr id="13" name="TextBox 12"/>
+          <p:cNvSpPr txBox="1"/>
+          <p:nvPr/>
+        </p:nvSpPr>
+        <p:spPr>
+          <a:xfrm>
+            <a:off x="1234440" y="5186933"/>
+            <a:ext cx="10408615" cy="1030986"/>
+          </a:xfrm>
+          <a:prstGeom prst="rect">
+            <a:avLst/>
+          </a:prstGeom>
+          <a:noFill/>
+        </p:spPr>
+        <p:txBody>
+          <a:bodyPr wrap="square" anchor="t" lIns="0" rIns="0" tIns="0" bIns="0"/>
+          <a:lstStyle/>
+          <a:p>
+            <a:pPr algn="l"/>
+            <a:r>
+              <a:rPr sz="2200" b="0" i="0">
+                <a:solidFill>
+                  <a:srgbClr val="202122"/>
+                </a:solidFill>
+                <a:latin typeface="Calibri"/>
+              </a:rPr>
+              <a:t>Name two features of an IDE.</a:t>
+            </a:r>
+          </a:p>
+        </p:txBody>
+      </p:sp>
+    </p:spTree>
+  </p:cSld>
+  <p:clrMapOvr>
+    <a:masterClrMapping/>
+  </p:clrMapOvr>
+</p:sld>
+</file>
+
+<file path=ppt/slides/slide11.xml><?xml version="1.0" encoding="utf-8"?>
+<p:sld xmlns:a="http://schemas.openxmlformats.org/drawingml/2006/main" xmlns:p="http://schemas.openxmlformats.org/presentationml/2006/main" xmlns:r="http://schemas.openxmlformats.org/officeDocument/2006/relationships">
+  <p:cSld>
+    <p:bg>
+      <p:bgPr>
+        <a:solidFill>
+          <a:srgbClr val="FFFFFF"/>
+        </a:solidFill>
+        <a:effectLst/>
+      </p:bgPr>
+    </p:bg>
+    <p:spTree>
+      <p:nvGrpSpPr>
+        <p:cNvPr id="1" name=""/>
+        <p:cNvGrpSpPr/>
+        <p:nvPr/>
+      </p:nvGrpSpPr>
+      <p:grpSpPr/>
+      <p:sp>
+        <p:nvSpPr>
+          <p:cNvPr id="2" name="TextBox 1"/>
+          <p:cNvSpPr txBox="1"/>
+          <p:nvPr/>
+        </p:nvSpPr>
+        <p:spPr>
+          <a:xfrm>
+            <a:off x="548640" y="320040"/>
+            <a:ext cx="11094415" cy="274320"/>
+          </a:xfrm>
+          <a:prstGeom prst="rect">
+            <a:avLst/>
+          </a:prstGeom>
+          <a:noFill/>
+        </p:spPr>
+        <p:txBody>
+          <a:bodyPr wrap="square" anchor="t" lIns="0" rIns="0" tIns="0" bIns="0"/>
+          <a:lstStyle/>
+          <a:p>
+            <a:pPr algn="l"/>
+            <a:r>
+              <a:rPr sz="1100" b="1" i="0">
+                <a:solidFill>
+                  <a:srgbClr val="54595D"/>
+                </a:solidFill>
+                <a:latin typeface="Calibri"/>
+              </a:rPr>
+              <a:t>CORE COMPONENT  ·  Core Paper 2</a:t>
+            </a:r>
+          </a:p>
+        </p:txBody>
+      </p:sp>
+      <p:sp>
+        <p:nvSpPr>
+          <p:cNvPr id="3" name="TextBox 2"/>
+          <p:cNvSpPr txBox="1"/>
+          <p:nvPr/>
+        </p:nvSpPr>
+        <p:spPr>
+          <a:xfrm>
+            <a:off x="548640" y="566928"/>
+            <a:ext cx="11094415" cy="822960"/>
+          </a:xfrm>
+          <a:prstGeom prst="rect">
+            <a:avLst/>
+          </a:prstGeom>
+          <a:noFill/>
+        </p:spPr>
+        <p:txBody>
+          <a:bodyPr wrap="square" anchor="ctr" lIns="0" rIns="0" tIns="0" bIns="0"/>
+          <a:lstStyle/>
+          <a:p>
+            <a:pPr algn="l"/>
+            <a:r>
+              <a:rPr sz="3200" b="1" i="0">
+                <a:solidFill>
+                  <a:srgbClr val="03306E"/>
+                </a:solidFill>
+                <a:latin typeface="Cambria"/>
+              </a:rPr>
+              <a:t>Answers</a:t>
+            </a:r>
+          </a:p>
+        </p:txBody>
+      </p:sp>
+      <p:sp>
+        <p:nvSpPr>
+          <p:cNvPr id="4" name="TextBox 3"/>
+          <p:cNvSpPr txBox="1"/>
+          <p:nvPr/>
+        </p:nvSpPr>
+        <p:spPr>
+          <a:xfrm>
+            <a:off x="548640" y="6446520"/>
+            <a:ext cx="8229600" cy="274320"/>
+          </a:xfrm>
+          <a:prstGeom prst="rect">
+            <a:avLst/>
+          </a:prstGeom>
+          <a:noFill/>
+        </p:spPr>
+        <p:txBody>
+          <a:bodyPr wrap="square" anchor="t" lIns="0" rIns="0" tIns="0" bIns="0"/>
+          <a:lstStyle/>
+          <a:p>
+            <a:pPr algn="l"/>
+            <a:r>
+              <a:rPr sz="1000" b="0" i="0">
+                <a:solidFill>
+                  <a:srgbClr val="54595D"/>
+                </a:solidFill>
+                <a:latin typeface="Calibri"/>
+              </a:rPr>
+              <a:t>Digital Software Development T Level  ·  Hardware and Software</a:t>
+            </a:r>
+          </a:p>
+        </p:txBody>
+      </p:sp>
+      <p:sp>
+        <p:nvSpPr>
+          <p:cNvPr id="5" name="TextBox 4"/>
+          <p:cNvSpPr txBox="1"/>
+          <p:nvPr/>
+        </p:nvSpPr>
+        <p:spPr>
+          <a:xfrm>
+            <a:off x="10728655" y="6446520"/>
+            <a:ext cx="914400" cy="274320"/>
+          </a:xfrm>
+          <a:prstGeom prst="rect">
+            <a:avLst/>
+          </a:prstGeom>
+          <a:noFill/>
+        </p:spPr>
+        <p:txBody>
+          <a:bodyPr wrap="square" anchor="t" lIns="0" rIns="0" tIns="0" bIns="0"/>
+          <a:lstStyle/>
+          <a:p>
+            <a:pPr algn="r"/>
+            <a:r>
+              <a:rPr sz="1000" b="0" i="0">
+                <a:solidFill>
+                  <a:srgbClr val="54595D"/>
+                </a:solidFill>
+                <a:latin typeface="Calibri"/>
+              </a:rPr>
+              <a:t>11</a:t>
+            </a:r>
+          </a:p>
+        </p:txBody>
+      </p:sp>
+      <p:sp>
+        <p:nvSpPr>
+          <p:cNvPr id="6" name="Oval 5"/>
+          <p:cNvSpPr/>
+          <p:nvPr/>
+        </p:nvSpPr>
+        <p:spPr>
+          <a:xfrm>
+            <a:off x="548640" y="1618488"/>
+            <a:ext cx="411480" cy="411480"/>
+          </a:xfrm>
+          <a:prstGeom prst="ellipse">
+            <a:avLst/>
+          </a:prstGeom>
+          <a:solidFill>
+            <a:srgbClr val="F2B705"/>
+          </a:solidFill>
+          <a:ln>
+            <a:noFill/>
+          </a:ln>
+          <a:effectLst/>
+        </p:spPr>
+        <p:style>
+          <a:lnRef idx="1">
+            <a:schemeClr val="accent1"/>
+          </a:lnRef>
+          <a:fillRef idx="3">
+            <a:schemeClr val="accent1"/>
+          </a:fillRef>
+          <a:effectRef idx="2">
+            <a:schemeClr val="accent1"/>
+          </a:effectRef>
+          <a:fontRef idx="minor">
+            <a:schemeClr val="lt1"/>
+          </a:fontRef>
+        </p:style>
+        <p:txBody>
+          <a:bodyPr rtlCol="0" anchor="ctr" lIns="0" rIns="0" tIns="0" bIns="0"/>
+          <a:lstStyle/>
+          <a:p>
+            <a:pPr algn="ctr"/>
+            <a:r>
+              <a:rPr sz="1400" b="1">
+                <a:solidFill>
+                  <a:srgbClr val="202122"/>
+                </a:solidFill>
+                <a:latin typeface="Calibri"/>
+              </a:rPr>
+              <a:t>1</a:t>
+            </a:r>
+          </a:p>
+        </p:txBody>
+      </p:sp>
+      <p:sp>
+        <p:nvSpPr>
+          <p:cNvPr id="7" name="TextBox 6"/>
+          <p:cNvSpPr txBox="1"/>
+          <p:nvPr/>
+        </p:nvSpPr>
+        <p:spPr>
+          <a:xfrm>
+            <a:off x="1234440" y="1600200"/>
+            <a:ext cx="10408615" cy="1030986"/>
+          </a:xfrm>
+          <a:prstGeom prst="rect">
+            <a:avLst/>
+          </a:prstGeom>
+          <a:noFill/>
+        </p:spPr>
+        <p:txBody>
+          <a:bodyPr wrap="square" anchor="t" lIns="0" rIns="0" tIns="0" bIns="0"/>
+          <a:lstStyle/>
+          <a:p>
+            <a:pPr algn="l"/>
+            <a:r>
+              <a:rPr sz="1800" b="0" i="0">
+                <a:solidFill>
+                  <a:srgbClr val="54595D"/>
+                </a:solidFill>
+                <a:latin typeface="Calibri"/>
+              </a:rPr>
+              <a:t>Which memory is volatile?</a:t>
+            </a:r>
+          </a:p>
+          <a:p>
+            <a:r>
+              <a:rPr sz="1800" b="1">
+                <a:solidFill>
+                  <a:srgbClr val="03306E"/>
+                </a:solidFill>
+                <a:latin typeface="Calibri"/>
+              </a:rPr>
+              <a:t>RAM.</a:t>
+            </a:r>
+          </a:p>
+        </p:txBody>
+      </p:sp>
+      <p:sp>
+        <p:nvSpPr>
+          <p:cNvPr id="8" name="Oval 7"/>
+          <p:cNvSpPr/>
+          <p:nvPr/>
+        </p:nvSpPr>
+        <p:spPr>
+          <a:xfrm>
+            <a:off x="548640" y="2814066"/>
+            <a:ext cx="411480" cy="411480"/>
+          </a:xfrm>
+          <a:prstGeom prst="ellipse">
+            <a:avLst/>
+          </a:prstGeom>
+          <a:solidFill>
+            <a:srgbClr val="F2B705"/>
+          </a:solidFill>
+          <a:ln>
+            <a:noFill/>
+          </a:ln>
+          <a:effectLst/>
+        </p:spPr>
+        <p:style>
+          <a:lnRef idx="1">
+            <a:schemeClr val="accent1"/>
+          </a:lnRef>
+          <a:fillRef idx="3">
+            <a:schemeClr val="accent1"/>
+          </a:fillRef>
+          <a:effectRef idx="2">
+            <a:schemeClr val="accent1"/>
+          </a:effectRef>
+          <a:fontRef idx="minor">
+            <a:schemeClr val="lt1"/>
+          </a:fontRef>
+        </p:style>
+        <p:txBody>
+          <a:bodyPr rtlCol="0" anchor="ctr" lIns="0" rIns="0" tIns="0" bIns="0"/>
+          <a:lstStyle/>
+          <a:p>
+            <a:pPr algn="ctr"/>
+            <a:r>
+              <a:rPr sz="1400" b="1">
+                <a:solidFill>
+                  <a:srgbClr val="202122"/>
+                </a:solidFill>
+                <a:latin typeface="Calibri"/>
+              </a:rPr>
+              <a:t>2</a:t>
+            </a:r>
+          </a:p>
+        </p:txBody>
+      </p:sp>
+      <p:sp>
+        <p:nvSpPr>
+          <p:cNvPr id="9" name="TextBox 8"/>
+          <p:cNvSpPr txBox="1"/>
+          <p:nvPr/>
+        </p:nvSpPr>
+        <p:spPr>
+          <a:xfrm>
+            <a:off x="1234440" y="2795778"/>
+            <a:ext cx="10408615" cy="1030986"/>
+          </a:xfrm>
+          <a:prstGeom prst="rect">
+            <a:avLst/>
+          </a:prstGeom>
+          <a:noFill/>
+        </p:spPr>
+        <p:txBody>
+          <a:bodyPr wrap="square" anchor="t" lIns="0" rIns="0" tIns="0" bIns="0"/>
+          <a:lstStyle/>
+          <a:p>
+            <a:pPr algn="l"/>
+            <a:r>
+              <a:rPr sz="1800" b="0" i="0">
+                <a:solidFill>
+                  <a:srgbClr val="54595D"/>
+                </a:solidFill>
+                <a:latin typeface="Calibri"/>
+              </a:rPr>
+              <a:t>Which OS type would control a pacemaker?</a:t>
+            </a:r>
+          </a:p>
+          <a:p>
+            <a:r>
+              <a:rPr sz="1800" b="1">
+                <a:solidFill>
+                  <a:srgbClr val="03306E"/>
+                </a:solidFill>
+                <a:latin typeface="Calibri"/>
+              </a:rPr>
+              <a:t>Real-time.</a:t>
+            </a:r>
+          </a:p>
+        </p:txBody>
+      </p:sp>
+      <p:sp>
+        <p:nvSpPr>
+          <p:cNvPr id="10" name="Oval 9"/>
+          <p:cNvSpPr/>
+          <p:nvPr/>
+        </p:nvSpPr>
+        <p:spPr>
+          <a:xfrm>
+            <a:off x="548640" y="4009644"/>
+            <a:ext cx="411480" cy="411480"/>
+          </a:xfrm>
+          <a:prstGeom prst="ellipse">
+            <a:avLst/>
+          </a:prstGeom>
+          <a:solidFill>
+            <a:srgbClr val="F2B705"/>
+          </a:solidFill>
+          <a:ln>
+            <a:noFill/>
+          </a:ln>
+          <a:effectLst/>
+        </p:spPr>
+        <p:style>
+          <a:lnRef idx="1">
+            <a:schemeClr val="accent1"/>
+          </a:lnRef>
+          <a:fillRef idx="3">
+            <a:schemeClr val="accent1"/>
+          </a:fillRef>
+          <a:effectRef idx="2">
+            <a:schemeClr val="accent1"/>
+          </a:effectRef>
+          <a:fontRef idx="minor">
+            <a:schemeClr val="lt1"/>
+          </a:fontRef>
+        </p:style>
+        <p:txBody>
+          <a:bodyPr rtlCol="0" anchor="ctr" lIns="0" rIns="0" tIns="0" bIns="0"/>
+          <a:lstStyle/>
+          <a:p>
+            <a:pPr algn="ctr"/>
+            <a:r>
+              <a:rPr sz="1400" b="1">
+                <a:solidFill>
+                  <a:srgbClr val="202122"/>
+                </a:solidFill>
+                <a:latin typeface="Calibri"/>
+              </a:rPr>
+              <a:t>3</a:t>
+            </a:r>
+          </a:p>
+        </p:txBody>
+      </p:sp>
+      <p:sp>
+        <p:nvSpPr>
+          <p:cNvPr id="11" name="TextBox 10"/>
+          <p:cNvSpPr txBox="1"/>
+          <p:nvPr/>
+        </p:nvSpPr>
+        <p:spPr>
+          <a:xfrm>
+            <a:off x="1234440" y="3991356"/>
+            <a:ext cx="10408615" cy="1030986"/>
+          </a:xfrm>
+          <a:prstGeom prst="rect">
+            <a:avLst/>
+          </a:prstGeom>
+          <a:noFill/>
+        </p:spPr>
+        <p:txBody>
+          <a:bodyPr wrap="square" anchor="t" lIns="0" rIns="0" tIns="0" bIns="0"/>
+          <a:lstStyle/>
+          <a:p>
+            <a:pPr algn="l"/>
+            <a:r>
+              <a:rPr sz="1800" b="0" i="0">
+                <a:solidFill>
+                  <a:srgbClr val="54595D"/>
+                </a:solidFill>
+                <a:latin typeface="Calibri"/>
+              </a:rPr>
+              <a:t>What is the difference between a compiler and an interpreter?</a:t>
+            </a:r>
+          </a:p>
+          <a:p>
+            <a:r>
+              <a:rPr sz="1800" b="1">
+                <a:solidFill>
+                  <a:srgbClr val="03306E"/>
+                </a:solidFill>
+                <a:latin typeface="Calibri"/>
+              </a:rPr>
+              <a:t>A compiler translates the whole program first; an interpreter translates and runs line by line.</a:t>
+            </a:r>
+          </a:p>
+        </p:txBody>
+      </p:sp>
+      <p:sp>
+        <p:nvSpPr>
+          <p:cNvPr id="12" name="Oval 11"/>
+          <p:cNvSpPr/>
+          <p:nvPr/>
+        </p:nvSpPr>
+        <p:spPr>
+          <a:xfrm>
+            <a:off x="548640" y="5205221"/>
+            <a:ext cx="411480" cy="411480"/>
+          </a:xfrm>
+          <a:prstGeom prst="ellipse">
+            <a:avLst/>
+          </a:prstGeom>
+          <a:solidFill>
+            <a:srgbClr val="F2B705"/>
+          </a:solidFill>
+          <a:ln>
+            <a:noFill/>
+          </a:ln>
+          <a:effectLst/>
+        </p:spPr>
+        <p:style>
+          <a:lnRef idx="1">
+            <a:schemeClr val="accent1"/>
+          </a:lnRef>
+          <a:fillRef idx="3">
+            <a:schemeClr val="accent1"/>
+          </a:fillRef>
+          <a:effectRef idx="2">
+            <a:schemeClr val="accent1"/>
+          </a:effectRef>
+          <a:fontRef idx="minor">
+            <a:schemeClr val="lt1"/>
+          </a:fontRef>
+        </p:style>
+        <p:txBody>
+          <a:bodyPr rtlCol="0" anchor="ctr" lIns="0" rIns="0" tIns="0" bIns="0"/>
+          <a:lstStyle/>
+          <a:p>
+            <a:pPr algn="ctr"/>
+            <a:r>
+              <a:rPr sz="1400" b="1">
+                <a:solidFill>
+                  <a:srgbClr val="202122"/>
+                </a:solidFill>
+                <a:latin typeface="Calibri"/>
+              </a:rPr>
+              <a:t>4</a:t>
+            </a:r>
+          </a:p>
+        </p:txBody>
+      </p:sp>
+      <p:sp>
+        <p:nvSpPr>
+          <p:cNvPr id="13" name="TextBox 12"/>
+          <p:cNvSpPr txBox="1"/>
+          <p:nvPr/>
+        </p:nvSpPr>
+        <p:spPr>
+          <a:xfrm>
+            <a:off x="1234440" y="5186933"/>
+            <a:ext cx="10408615" cy="1030986"/>
+          </a:xfrm>
+          <a:prstGeom prst="rect">
+            <a:avLst/>
+          </a:prstGeom>
+          <a:noFill/>
+        </p:spPr>
+        <p:txBody>
+          <a:bodyPr wrap="square" anchor="t" lIns="0" rIns="0" tIns="0" bIns="0"/>
+          <a:lstStyle/>
+          <a:p>
+            <a:pPr algn="l"/>
+            <a:r>
+              <a:rPr sz="1800" b="0" i="0">
+                <a:solidFill>
+                  <a:srgbClr val="54595D"/>
+                </a:solidFill>
+                <a:latin typeface="Calibri"/>
+              </a:rPr>
+              <a:t>Name two features of an IDE.</a:t>
+            </a:r>
+          </a:p>
+          <a:p>
+            <a:r>
+              <a:rPr sz="1800" b="1">
+                <a:solidFill>
+                  <a:srgbClr val="03306E"/>
+                </a:solidFill>
+                <a:latin typeface="Calibri"/>
+              </a:rPr>
+              <a:t>Any two of: editor, debugger, screen design, syntax highlighting.</a:t>
+            </a:r>
+          </a:p>
+        </p:txBody>
+      </p:sp>
+    </p:spTree>
+  </p:cSld>
+  <p:clrMapOvr>
+    <a:masterClrMapping/>
+  </p:clrMapOvr>
+</p:sld>
+</file>
+
+<file path=ppt/slides/slide12.xml><?xml version="1.0" encoding="utf-8"?>
+<p:sld xmlns:a="http://schemas.openxmlformats.org/drawingml/2006/main" xmlns:p="http://schemas.openxmlformats.org/presentationml/2006/main" xmlns:r="http://schemas.openxmlformats.org/officeDocument/2006/relationships">
+  <p:cSld>
+    <p:bg>
+      <p:bgPr>
+        <a:solidFill>
+          <a:srgbClr val="FFFFFF"/>
+        </a:solidFill>
+        <a:effectLst/>
+      </p:bgPr>
+    </p:bg>
+    <p:spTree>
+      <p:nvGrpSpPr>
+        <p:cNvPr id="1" name=""/>
+        <p:cNvGrpSpPr/>
+        <p:nvPr/>
+      </p:nvGrpSpPr>
+      <p:grpSpPr/>
+      <p:sp>
+        <p:nvSpPr>
+          <p:cNvPr id="2" name="TextBox 1"/>
+          <p:cNvSpPr txBox="1"/>
+          <p:nvPr/>
+        </p:nvSpPr>
+        <p:spPr>
+          <a:xfrm>
+            <a:off x="548640" y="320040"/>
+            <a:ext cx="11094415" cy="274320"/>
+          </a:xfrm>
+          <a:prstGeom prst="rect">
+            <a:avLst/>
+          </a:prstGeom>
+          <a:noFill/>
+        </p:spPr>
+        <p:txBody>
+          <a:bodyPr wrap="square" anchor="t" lIns="0" rIns="0" tIns="0" bIns="0"/>
+          <a:lstStyle/>
+          <a:p>
+            <a:pPr algn="l"/>
+            <a:r>
+              <a:rPr sz="1100" b="1" i="0">
+                <a:solidFill>
+                  <a:srgbClr val="54595D"/>
+                </a:solidFill>
+                <a:latin typeface="Calibri"/>
+              </a:rPr>
+              <a:t>CORE COMPONENT  ·  Core Paper 2</a:t>
+            </a:r>
+          </a:p>
+        </p:txBody>
+      </p:sp>
+      <p:sp>
+        <p:nvSpPr>
+          <p:cNvPr id="3" name="TextBox 2"/>
+          <p:cNvSpPr txBox="1"/>
+          <p:nvPr/>
+        </p:nvSpPr>
+        <p:spPr>
+          <a:xfrm>
+            <a:off x="548640" y="566928"/>
+            <a:ext cx="11094415" cy="822960"/>
+          </a:xfrm>
+          <a:prstGeom prst="rect">
+            <a:avLst/>
+          </a:prstGeom>
+          <a:noFill/>
+        </p:spPr>
+        <p:txBody>
+          <a:bodyPr wrap="square" anchor="ctr" lIns="0" rIns="0" tIns="0" bIns="0"/>
+          <a:lstStyle/>
+          <a:p>
+            <a:pPr algn="l"/>
+            <a:r>
+              <a:rPr sz="3200" b="1" i="0">
+                <a:solidFill>
+                  <a:srgbClr val="03306E"/>
+                </a:solidFill>
+                <a:latin typeface="Cambria"/>
+              </a:rPr>
+              <a:t>Activity: Choose a development setup</a:t>
+            </a:r>
+          </a:p>
+        </p:txBody>
+      </p:sp>
+      <p:sp>
+        <p:nvSpPr>
+          <p:cNvPr id="4" name="TextBox 3"/>
+          <p:cNvSpPr txBox="1"/>
+          <p:nvPr/>
+        </p:nvSpPr>
+        <p:spPr>
+          <a:xfrm>
+            <a:off x="548640" y="6446520"/>
+            <a:ext cx="8229600" cy="274320"/>
+          </a:xfrm>
+          <a:prstGeom prst="rect">
+            <a:avLst/>
+          </a:prstGeom>
+          <a:noFill/>
+        </p:spPr>
+        <p:txBody>
+          <a:bodyPr wrap="square" anchor="t" lIns="0" rIns="0" tIns="0" bIns="0"/>
+          <a:lstStyle/>
+          <a:p>
+            <a:pPr algn="l"/>
+            <a:r>
+              <a:rPr sz="1000" b="0" i="0">
+                <a:solidFill>
+                  <a:srgbClr val="54595D"/>
+                </a:solidFill>
+                <a:latin typeface="Calibri"/>
+              </a:rPr>
+              <a:t>Digital Software Development T Level  ·  Hardware and Software</a:t>
+            </a:r>
+          </a:p>
+        </p:txBody>
+      </p:sp>
+      <p:sp>
+        <p:nvSpPr>
+          <p:cNvPr id="5" name="TextBox 4"/>
+          <p:cNvSpPr txBox="1"/>
+          <p:nvPr/>
+        </p:nvSpPr>
+        <p:spPr>
+          <a:xfrm>
+            <a:off x="10728655" y="6446520"/>
+            <a:ext cx="914400" cy="274320"/>
+          </a:xfrm>
+          <a:prstGeom prst="rect">
+            <a:avLst/>
+          </a:prstGeom>
+          <a:noFill/>
+        </p:spPr>
+        <p:txBody>
+          <a:bodyPr wrap="square" anchor="t" lIns="0" rIns="0" tIns="0" bIns="0"/>
+          <a:lstStyle/>
+          <a:p>
+            <a:pPr algn="r"/>
+            <a:r>
+              <a:rPr sz="1000" b="0" i="0">
+                <a:solidFill>
+                  <a:srgbClr val="54595D"/>
+                </a:solidFill>
+                <a:latin typeface="Calibri"/>
+              </a:rPr>
+              <a:t>12</a:t>
+            </a:r>
+          </a:p>
+        </p:txBody>
+      </p:sp>
+      <p:sp>
+        <p:nvSpPr>
+          <p:cNvPr id="6" name="Rounded Rectangle 5"/>
+          <p:cNvSpPr/>
+          <p:nvPr/>
+        </p:nvSpPr>
+        <p:spPr>
+          <a:xfrm>
+            <a:off x="548640" y="1508760"/>
+            <a:ext cx="2011680" cy="457200"/>
+          </a:xfrm>
+          <a:prstGeom prst="roundRect">
+            <a:avLst>
+              <a:gd name="adj" fmla="val 50000"/>
+            </a:avLst>
+          </a:prstGeom>
+          <a:solidFill>
+            <a:srgbClr val="F2B705"/>
+          </a:solidFill>
+          <a:ln>
+            <a:noFill/>
+          </a:ln>
+          <a:effectLst/>
+        </p:spPr>
+        <p:style>
+          <a:lnRef idx="1">
+            <a:schemeClr val="accent1"/>
+          </a:lnRef>
+          <a:fillRef idx="3">
+            <a:schemeClr val="accent1"/>
+          </a:fillRef>
+          <a:effectRef idx="2">
+            <a:schemeClr val="accent1"/>
+          </a:effectRef>
+          <a:fontRef idx="minor">
+            <a:schemeClr val="lt1"/>
+          </a:fontRef>
+        </p:style>
+        <p:txBody>
+          <a:bodyPr rtlCol="0" anchor="ctr"/>
+          <a:lstStyle/>
+          <a:p/>
+        </p:txBody>
+      </p:sp>
+      <p:sp>
+        <p:nvSpPr>
+          <p:cNvPr id="7" name="TextBox 6"/>
+          <p:cNvSpPr txBox="1"/>
+          <p:nvPr/>
+        </p:nvSpPr>
+        <p:spPr>
+          <a:xfrm>
+            <a:off x="548640" y="1508760"/>
+            <a:ext cx="2011680" cy="457200"/>
+          </a:xfrm>
+          <a:prstGeom prst="rect">
+            <a:avLst/>
+          </a:prstGeom>
+          <a:noFill/>
+        </p:spPr>
+        <p:txBody>
+          <a:bodyPr wrap="square" anchor="ctr" lIns="0" rIns="0" tIns="0" bIns="0"/>
+          <a:lstStyle/>
+          <a:p>
+            <a:pPr algn="ctr"/>
+            <a:r>
+              <a:rPr sz="1400" b="1" i="0">
+                <a:solidFill>
+                  <a:srgbClr val="202122"/>
+                </a:solidFill>
+                <a:latin typeface="Calibri"/>
+              </a:rPr>
+              <a:t>20 minutes</a:t>
+            </a:r>
+          </a:p>
+        </p:txBody>
+      </p:sp>
+      <p:sp>
+        <p:nvSpPr>
+          <p:cNvPr id="8" name="TextBox 7"/>
+          <p:cNvSpPr txBox="1"/>
+          <p:nvPr/>
+        </p:nvSpPr>
+        <p:spPr>
+          <a:xfrm>
+            <a:off x="2743200" y="1508760"/>
+            <a:ext cx="4754880" cy="457200"/>
+          </a:xfrm>
+          <a:prstGeom prst="rect">
+            <a:avLst/>
+          </a:prstGeom>
+          <a:noFill/>
+        </p:spPr>
+        <p:txBody>
+          <a:bodyPr wrap="square" anchor="ctr" lIns="0" rIns="0" tIns="0" bIns="0"/>
+          <a:lstStyle/>
+          <a:p>
+            <a:pPr algn="l"/>
+            <a:r>
+              <a:rPr sz="1400" b="0" i="1">
+                <a:solidFill>
+                  <a:srgbClr val="54595D"/>
+                </a:solidFill>
+                <a:latin typeface="Calibri"/>
+              </a:rPr>
+              <a:t>Pairs</a:t>
+            </a:r>
+          </a:p>
+        </p:txBody>
+      </p:sp>
+      <p:sp>
+        <p:nvSpPr>
+          <p:cNvPr id="9" name="Oval 8"/>
+          <p:cNvSpPr/>
+          <p:nvPr/>
+        </p:nvSpPr>
+        <p:spPr>
+          <a:xfrm>
+            <a:off x="548640" y="2482596"/>
+            <a:ext cx="384048" cy="384048"/>
+          </a:xfrm>
+          <a:prstGeom prst="ellipse">
+            <a:avLst/>
+          </a:prstGeom>
+          <a:solidFill>
+            <a:srgbClr val="0645AD"/>
+          </a:solidFill>
+          <a:ln>
+            <a:noFill/>
+          </a:ln>
+          <a:effectLst/>
+        </p:spPr>
+        <p:style>
+          <a:lnRef idx="1">
+            <a:schemeClr val="accent1"/>
+          </a:lnRef>
+          <a:fillRef idx="3">
+            <a:schemeClr val="accent1"/>
+          </a:fillRef>
+          <a:effectRef idx="2">
+            <a:schemeClr val="accent1"/>
+          </a:effectRef>
+          <a:fontRef idx="minor">
+            <a:schemeClr val="lt1"/>
+          </a:fontRef>
+        </p:style>
+        <p:txBody>
+          <a:bodyPr rtlCol="0" anchor="ctr" lIns="0" rIns="0" tIns="0" bIns="0"/>
+          <a:lstStyle/>
+          <a:p>
+            <a:pPr algn="ctr"/>
+            <a:r>
+              <a:rPr sz="1300" b="1">
+                <a:solidFill>
+                  <a:srgbClr val="FFFFFF"/>
+                </a:solidFill>
+                <a:latin typeface="Calibri"/>
+              </a:rPr>
+              <a:t>1</a:t>
+            </a:r>
+          </a:p>
+        </p:txBody>
+      </p:sp>
+      <p:sp>
+        <p:nvSpPr>
+          <p:cNvPr id="10" name="TextBox 9"/>
+          <p:cNvSpPr txBox="1"/>
+          <p:nvPr/>
+        </p:nvSpPr>
+        <p:spPr>
+          <a:xfrm>
+            <a:off x="1143000" y="2240280"/>
+            <a:ext cx="5943600" cy="868680"/>
+          </a:xfrm>
+          <a:prstGeom prst="rect">
+            <a:avLst/>
+          </a:prstGeom>
+          <a:noFill/>
+        </p:spPr>
+        <p:txBody>
+          <a:bodyPr wrap="square" anchor="ctr" lIns="0" rIns="0" tIns="0" bIns="0"/>
+          <a:lstStyle/>
+          <a:p>
+            <a:pPr algn="l"/>
+            <a:r>
+              <a:rPr sz="1700" b="0" i="0">
+                <a:solidFill>
+                  <a:srgbClr val="202122"/>
+                </a:solidFill>
+                <a:latin typeface="Calibri"/>
+              </a:rPr>
+              <a:t>Three projects: a mobile game, a data analysis script, and a system for a factory robot.</a:t>
+            </a:r>
+          </a:p>
+        </p:txBody>
+      </p:sp>
+      <p:sp>
+        <p:nvSpPr>
+          <p:cNvPr id="11" name="Oval 10"/>
+          <p:cNvSpPr/>
+          <p:nvPr/>
+        </p:nvSpPr>
+        <p:spPr>
+          <a:xfrm>
+            <a:off x="548640" y="3461004"/>
+            <a:ext cx="384048" cy="384048"/>
+          </a:xfrm>
+          <a:prstGeom prst="ellipse">
+            <a:avLst/>
+          </a:prstGeom>
+          <a:solidFill>
+            <a:srgbClr val="0645AD"/>
+          </a:solidFill>
+          <a:ln>
+            <a:noFill/>
+          </a:ln>
+          <a:effectLst/>
+        </p:spPr>
+        <p:style>
+          <a:lnRef idx="1">
+            <a:schemeClr val="accent1"/>
+          </a:lnRef>
+          <a:fillRef idx="3">
+            <a:schemeClr val="accent1"/>
+          </a:fillRef>
+          <a:effectRef idx="2">
+            <a:schemeClr val="accent1"/>
+          </a:effectRef>
+          <a:fontRef idx="minor">
+            <a:schemeClr val="lt1"/>
+          </a:fontRef>
+        </p:style>
+        <p:txBody>
+          <a:bodyPr rtlCol="0" anchor="ctr" lIns="0" rIns="0" tIns="0" bIns="0"/>
+          <a:lstStyle/>
+          <a:p>
+            <a:pPr algn="ctr"/>
+            <a:r>
+              <a:rPr sz="1300" b="1">
+                <a:solidFill>
+                  <a:srgbClr val="FFFFFF"/>
+                </a:solidFill>
+                <a:latin typeface="Calibri"/>
+              </a:rPr>
+              <a:t>2</a:t>
+            </a:r>
+          </a:p>
+        </p:txBody>
+      </p:sp>
+      <p:sp>
+        <p:nvSpPr>
+          <p:cNvPr id="12" name="TextBox 11"/>
+          <p:cNvSpPr txBox="1"/>
+          <p:nvPr/>
+        </p:nvSpPr>
+        <p:spPr>
+          <a:xfrm>
+            <a:off x="1143000" y="3218688"/>
+            <a:ext cx="5943600" cy="868680"/>
+          </a:xfrm>
+          <a:prstGeom prst="rect">
+            <a:avLst/>
+          </a:prstGeom>
+          <a:noFill/>
+        </p:spPr>
+        <p:txBody>
+          <a:bodyPr wrap="square" anchor="ctr" lIns="0" rIns="0" tIns="0" bIns="0"/>
+          <a:lstStyle/>
+          <a:p>
+            <a:pPr algn="l"/>
+            <a:r>
+              <a:rPr sz="1700" b="0" i="0">
+                <a:solidFill>
+                  <a:srgbClr val="202122"/>
+                </a:solidFill>
+                <a:latin typeface="Calibri"/>
+              </a:rPr>
+              <a:t>Choose hardware, an OS type and a language approach for each.</a:t>
+            </a:r>
+          </a:p>
+        </p:txBody>
+      </p:sp>
+      <p:sp>
+        <p:nvSpPr>
+          <p:cNvPr id="13" name="Oval 12"/>
+          <p:cNvSpPr/>
+          <p:nvPr/>
+        </p:nvSpPr>
+        <p:spPr>
+          <a:xfrm>
+            <a:off x="548640" y="4439412"/>
+            <a:ext cx="384048" cy="384048"/>
+          </a:xfrm>
+          <a:prstGeom prst="ellipse">
+            <a:avLst/>
+          </a:prstGeom>
+          <a:solidFill>
+            <a:srgbClr val="0645AD"/>
+          </a:solidFill>
+          <a:ln>
+            <a:noFill/>
+          </a:ln>
+          <a:effectLst/>
+        </p:spPr>
+        <p:style>
+          <a:lnRef idx="1">
+            <a:schemeClr val="accent1"/>
+          </a:lnRef>
+          <a:fillRef idx="3">
+            <a:schemeClr val="accent1"/>
+          </a:fillRef>
+          <a:effectRef idx="2">
+            <a:schemeClr val="accent1"/>
+          </a:effectRef>
+          <a:fontRef idx="minor">
+            <a:schemeClr val="lt1"/>
+          </a:fontRef>
+        </p:style>
+        <p:txBody>
+          <a:bodyPr rtlCol="0" anchor="ctr" lIns="0" rIns="0" tIns="0" bIns="0"/>
+          <a:lstStyle/>
+          <a:p>
+            <a:pPr algn="ctr"/>
+            <a:r>
+              <a:rPr sz="1300" b="1">
+                <a:solidFill>
+                  <a:srgbClr val="FFFFFF"/>
+                </a:solidFill>
+                <a:latin typeface="Calibri"/>
+              </a:rPr>
+              <a:t>3</a:t>
+            </a:r>
+          </a:p>
+        </p:txBody>
+      </p:sp>
+      <p:sp>
+        <p:nvSpPr>
+          <p:cNvPr id="14" name="TextBox 13"/>
+          <p:cNvSpPr txBox="1"/>
+          <p:nvPr/>
+        </p:nvSpPr>
+        <p:spPr>
+          <a:xfrm>
+            <a:off x="1143000" y="4197096"/>
+            <a:ext cx="5943600" cy="868680"/>
+          </a:xfrm>
+          <a:prstGeom prst="rect">
+            <a:avLst/>
+          </a:prstGeom>
+          <a:noFill/>
+        </p:spPr>
+        <p:txBody>
+          <a:bodyPr wrap="square" anchor="ctr" lIns="0" rIns="0" tIns="0" bIns="0"/>
+          <a:lstStyle/>
+          <a:p>
+            <a:pPr algn="l"/>
+            <a:r>
+              <a:rPr sz="1700" b="0" i="0">
+                <a:solidFill>
+                  <a:srgbClr val="202122"/>
+                </a:solidFill>
+                <a:latin typeface="Calibri"/>
+              </a:rPr>
+              <a:t>Choose development tools.</a:t>
+            </a:r>
+          </a:p>
+        </p:txBody>
+      </p:sp>
+      <p:sp>
+        <p:nvSpPr>
+          <p:cNvPr id="15" name="Oval 14"/>
+          <p:cNvSpPr/>
+          <p:nvPr/>
+        </p:nvSpPr>
+        <p:spPr>
+          <a:xfrm>
+            <a:off x="548640" y="5417820"/>
+            <a:ext cx="384048" cy="384048"/>
+          </a:xfrm>
+          <a:prstGeom prst="ellipse">
+            <a:avLst/>
+          </a:prstGeom>
+          <a:solidFill>
+            <a:srgbClr val="0645AD"/>
+          </a:solidFill>
+          <a:ln>
+            <a:noFill/>
+          </a:ln>
+          <a:effectLst/>
+        </p:spPr>
+        <p:style>
+          <a:lnRef idx="1">
+            <a:schemeClr val="accent1"/>
+          </a:lnRef>
+          <a:fillRef idx="3">
+            <a:schemeClr val="accent1"/>
+          </a:fillRef>
+          <a:effectRef idx="2">
+            <a:schemeClr val="accent1"/>
+          </a:effectRef>
+          <a:fontRef idx="minor">
+            <a:schemeClr val="lt1"/>
+          </a:fontRef>
+        </p:style>
+        <p:txBody>
+          <a:bodyPr rtlCol="0" anchor="ctr" lIns="0" rIns="0" tIns="0" bIns="0"/>
+          <a:lstStyle/>
+          <a:p>
+            <a:pPr algn="ctr"/>
+            <a:r>
+              <a:rPr sz="1300" b="1">
+                <a:solidFill>
+                  <a:srgbClr val="FFFFFF"/>
+                </a:solidFill>
+                <a:latin typeface="Calibri"/>
+              </a:rPr>
+              <a:t>4</a:t>
+            </a:r>
+          </a:p>
+        </p:txBody>
+      </p:sp>
+      <p:sp>
+        <p:nvSpPr>
+          <p:cNvPr id="16" name="TextBox 15"/>
+          <p:cNvSpPr txBox="1"/>
+          <p:nvPr/>
+        </p:nvSpPr>
+        <p:spPr>
+          <a:xfrm>
+            <a:off x="1143000" y="5175504"/>
+            <a:ext cx="5943600" cy="868680"/>
+          </a:xfrm>
+          <a:prstGeom prst="rect">
+            <a:avLst/>
+          </a:prstGeom>
+          <a:noFill/>
+        </p:spPr>
+        <p:txBody>
+          <a:bodyPr wrap="square" anchor="ctr" lIns="0" rIns="0" tIns="0" bIns="0"/>
+          <a:lstStyle/>
+          <a:p>
+            <a:pPr algn="l"/>
+            <a:r>
+              <a:rPr sz="1700" b="0" i="0">
+                <a:solidFill>
+                  <a:srgbClr val="202122"/>
+                </a:solidFill>
+                <a:latin typeface="Calibri"/>
+              </a:rPr>
+              <a:t>Justify each choice.</a:t>
+            </a:r>
+          </a:p>
+        </p:txBody>
+      </p:sp>
+      <p:sp>
+        <p:nvSpPr>
+          <p:cNvPr id="17" name="Rounded Rectangle 16"/>
+          <p:cNvSpPr/>
+          <p:nvPr/>
+        </p:nvSpPr>
+        <p:spPr>
+          <a:xfrm>
+            <a:off x="7772400" y="1508760"/>
+            <a:ext cx="3867912" cy="4572000"/>
+          </a:xfrm>
+          <a:prstGeom prst="roundRect">
+            <a:avLst>
+              <a:gd name="adj" fmla="val 8000"/>
+            </a:avLst>
+          </a:prstGeom>
+          <a:solidFill>
+            <a:srgbClr val="EAF3FF"/>
+          </a:solidFill>
+          <a:ln>
+            <a:noFill/>
+          </a:ln>
+          <a:effectLst/>
+        </p:spPr>
+        <p:style>
+          <a:lnRef idx="1">
+            <a:schemeClr val="accent1"/>
+          </a:lnRef>
+          <a:fillRef idx="3">
+            <a:schemeClr val="accent1"/>
+          </a:fillRef>
+          <a:effectRef idx="2">
+            <a:schemeClr val="accent1"/>
+          </a:effectRef>
+          <a:fontRef idx="minor">
+            <a:schemeClr val="lt1"/>
+          </a:fontRef>
+        </p:style>
+        <p:txBody>
+          <a:bodyPr rtlCol="0" anchor="ctr"/>
+          <a:lstStyle/>
+          <a:p/>
+        </p:txBody>
+      </p:sp>
+      <p:sp>
+        <p:nvSpPr>
+          <p:cNvPr id="18" name="TextBox 17"/>
+          <p:cNvSpPr txBox="1"/>
+          <p:nvPr/>
+        </p:nvSpPr>
+        <p:spPr>
+          <a:xfrm>
+            <a:off x="8046720" y="1737360"/>
+            <a:ext cx="3291840" cy="365760"/>
+          </a:xfrm>
+          <a:prstGeom prst="rect">
+            <a:avLst/>
+          </a:prstGeom>
+          <a:noFill/>
+        </p:spPr>
+        <p:txBody>
+          <a:bodyPr wrap="square" anchor="t" lIns="0" rIns="0" tIns="0" bIns="0"/>
+          <a:lstStyle/>
+          <a:p>
+            <a:pPr algn="l"/>
+            <a:r>
+              <a:rPr sz="1300" b="1" i="0">
+                <a:solidFill>
+                  <a:srgbClr val="0645AD"/>
+                </a:solidFill>
+                <a:latin typeface="Calibri"/>
+              </a:rPr>
+              <a:t>SUCCESS CRITERIA</a:t>
+            </a:r>
+          </a:p>
+        </p:txBody>
+      </p:sp>
+      <p:sp>
+        <p:nvSpPr>
+          <p:cNvPr id="19" name="TextBox 18"/>
+          <p:cNvSpPr txBox="1"/>
+          <p:nvPr/>
+        </p:nvSpPr>
+        <p:spPr>
+          <a:xfrm>
+            <a:off x="8046720" y="2240280"/>
+            <a:ext cx="3337560" cy="3657600"/>
+          </a:xfrm>
+          <a:prstGeom prst="rect">
+            <a:avLst/>
+          </a:prstGeom>
+          <a:noFill/>
+        </p:spPr>
+        <p:txBody>
+          <a:bodyPr wrap="square" lIns="0" rIns="0" tIns="0" bIns="0">
+            <a:spAutoFit/>
+          </a:bodyPr>
+          <a:lstStyle/>
+          <a:p>
+            <a:pPr marL="274320" indent="-274320">
+              <a:spcAft>
+                <a:spcPts val="810"/>
+              </a:spcAft>
+              <a:buClr>
+                <a:srgbClr val="0645AD"/>
+              </a:buClr>
+              <a:buFont typeface="Arial"/>
+              <a:buChar char="•"/>
+            </a:pPr>
+            <a:r>
+              <a:rPr sz="1800" b="0">
+                <a:solidFill>
+                  <a:srgbClr val="202122"/>
+                </a:solidFill>
+                <a:latin typeface="Calibri"/>
+              </a:rPr>
+              <a:t>OS type matches the use</a:t>
+            </a:r>
+          </a:p>
+          <a:p>
+            <a:pPr marL="274320" indent="-274320">
+              <a:spcAft>
+                <a:spcPts val="810"/>
+              </a:spcAft>
+              <a:buClr>
+                <a:srgbClr val="0645AD"/>
+              </a:buClr>
+              <a:buFont typeface="Arial"/>
+              <a:buChar char="•"/>
+            </a:pPr>
+            <a:r>
+              <a:rPr sz="1800" b="0">
+                <a:solidFill>
+                  <a:srgbClr val="202122"/>
+                </a:solidFill>
+                <a:latin typeface="Calibri"/>
+              </a:rPr>
+              <a:t>Compiled or interpreted choice justified</a:t>
+            </a:r>
+          </a:p>
+          <a:p>
+            <a:pPr marL="274320" indent="-274320">
+              <a:spcAft>
+                <a:spcPts val="810"/>
+              </a:spcAft>
+              <a:buClr>
+                <a:srgbClr val="0645AD"/>
+              </a:buClr>
+              <a:buFont typeface="Arial"/>
+              <a:buChar char="•"/>
+            </a:pPr>
+            <a:r>
+              <a:rPr sz="1800" b="0">
+                <a:solidFill>
+                  <a:srgbClr val="202122"/>
+                </a:solidFill>
+                <a:latin typeface="Calibri"/>
+              </a:rPr>
+              <a:t>Hardware realistic</a:t>
+            </a:r>
+          </a:p>
+        </p:txBody>
+      </p:sp>
+    </p:spTree>
+  </p:cSld>
+  <p:clrMapOvr>
+    <a:masterClrMapping/>
+  </p:clrMapOvr>
+</p:sld>
+</file>
+
+<file path=ppt/slides/slide13.xml><?xml version="1.0" encoding="utf-8"?>
+<p:sld xmlns:a="http://schemas.openxmlformats.org/drawingml/2006/main" xmlns:p="http://schemas.openxmlformats.org/presentationml/2006/main" xmlns:r="http://schemas.openxmlformats.org/officeDocument/2006/relationships">
+  <p:cSld>
+    <p:bg>
+      <p:bgPr>
+        <a:solidFill>
+          <a:srgbClr val="03306E"/>
+        </a:solidFill>
+        <a:effectLst/>
+      </p:bgPr>
+    </p:bg>
+    <p:spTree>
+      <p:nvGrpSpPr>
+        <p:cNvPr id="1" name=""/>
+        <p:cNvGrpSpPr/>
+        <p:nvPr/>
+      </p:nvGrpSpPr>
+      <p:grpSpPr/>
+      <p:sp>
+        <p:nvSpPr>
+          <p:cNvPr id="2" name="TextBox 1"/>
+          <p:cNvSpPr txBox="1"/>
+          <p:nvPr/>
+        </p:nvSpPr>
+        <p:spPr>
+          <a:xfrm>
+            <a:off x="548640" y="320040"/>
+            <a:ext cx="11094415" cy="274320"/>
+          </a:xfrm>
+          <a:prstGeom prst="rect">
+            <a:avLst/>
+          </a:prstGeom>
+          <a:noFill/>
+        </p:spPr>
+        <p:txBody>
+          <a:bodyPr wrap="square" anchor="t" lIns="0" rIns="0" tIns="0" bIns="0"/>
+          <a:lstStyle/>
+          <a:p>
+            <a:pPr algn="l"/>
+            <a:r>
+              <a:rPr sz="1100" b="1" i="0">
+                <a:solidFill>
+                  <a:srgbClr val="A9C8F0"/>
+                </a:solidFill>
+                <a:latin typeface="Calibri"/>
+              </a:rPr>
+              <a:t>CORE COMPONENT  ·  Core Paper 2</a:t>
+            </a:r>
+          </a:p>
+        </p:txBody>
+      </p:sp>
+      <p:sp>
+        <p:nvSpPr>
+          <p:cNvPr id="3" name="TextBox 2"/>
+          <p:cNvSpPr txBox="1"/>
+          <p:nvPr/>
+        </p:nvSpPr>
+        <p:spPr>
+          <a:xfrm>
+            <a:off x="548640" y="566928"/>
+            <a:ext cx="11094415" cy="822960"/>
+          </a:xfrm>
+          <a:prstGeom prst="rect">
+            <a:avLst/>
+          </a:prstGeom>
+          <a:noFill/>
+        </p:spPr>
+        <p:txBody>
+          <a:bodyPr wrap="square" anchor="ctr" lIns="0" rIns="0" tIns="0" bIns="0"/>
+          <a:lstStyle/>
+          <a:p>
+            <a:pPr algn="l"/>
+            <a:r>
+              <a:rPr sz="3200" b="1" i="0">
+                <a:solidFill>
+                  <a:srgbClr val="FFFFFF"/>
+                </a:solidFill>
+                <a:latin typeface="Cambria"/>
+              </a:rPr>
+              <a:t>Exit ticket</a:t>
+            </a:r>
+          </a:p>
+        </p:txBody>
+      </p:sp>
+      <p:sp>
+        <p:nvSpPr>
+          <p:cNvPr id="4" name="Oval 3"/>
+          <p:cNvSpPr/>
+          <p:nvPr/>
+        </p:nvSpPr>
+        <p:spPr>
+          <a:xfrm>
+            <a:off x="548640" y="1737360"/>
+            <a:ext cx="502920" cy="502920"/>
+          </a:xfrm>
+          <a:prstGeom prst="ellipse">
+            <a:avLst/>
+          </a:prstGeom>
+          <a:solidFill>
+            <a:srgbClr val="F2B705"/>
+          </a:solidFill>
+          <a:ln>
+            <a:noFill/>
+          </a:ln>
+          <a:effectLst/>
+        </p:spPr>
+        <p:style>
+          <a:lnRef idx="1">
+            <a:schemeClr val="accent1"/>
+          </a:lnRef>
+          <a:fillRef idx="3">
+            <a:schemeClr val="accent1"/>
+          </a:fillRef>
+          <a:effectRef idx="2">
+            <a:schemeClr val="accent1"/>
+          </a:effectRef>
+          <a:fontRef idx="minor">
+            <a:schemeClr val="lt1"/>
+          </a:fontRef>
+        </p:style>
+        <p:txBody>
+          <a:bodyPr rtlCol="0" anchor="ctr" lIns="0" rIns="0" tIns="0" bIns="0"/>
+          <a:lstStyle/>
+          <a:p>
+            <a:pPr algn="ctr"/>
+            <a:r>
+              <a:rPr sz="1700" b="1">
+                <a:solidFill>
+                  <a:srgbClr val="202122"/>
+                </a:solidFill>
+                <a:latin typeface="Calibri"/>
+              </a:rPr>
+              <a:t>1</a:t>
+            </a:r>
+          </a:p>
+        </p:txBody>
+      </p:sp>
+      <p:sp>
+        <p:nvSpPr>
+          <p:cNvPr id="5" name="TextBox 4"/>
+          <p:cNvSpPr txBox="1"/>
+          <p:nvPr/>
+        </p:nvSpPr>
+        <p:spPr>
+          <a:xfrm>
+            <a:off x="1325880" y="1645920"/>
+            <a:ext cx="6583680" cy="822960"/>
+          </a:xfrm>
+          <a:prstGeom prst="rect">
+            <a:avLst/>
+          </a:prstGeom>
+          <a:noFill/>
+        </p:spPr>
+        <p:txBody>
+          <a:bodyPr wrap="square" anchor="ctr" lIns="0" rIns="0" tIns="0" bIns="0"/>
+          <a:lstStyle/>
+          <a:p>
+            <a:pPr algn="l"/>
+            <a:r>
+              <a:rPr sz="2000" b="0" i="0">
+                <a:solidFill>
+                  <a:srgbClr val="FFFFFF"/>
+                </a:solidFill>
+                <a:latin typeface="Calibri"/>
+              </a:rPr>
+              <a:t>Why might a developer prefer an interpreter while testing?</a:t>
+            </a:r>
+          </a:p>
+        </p:txBody>
+      </p:sp>
+      <p:sp>
+        <p:nvSpPr>
+          <p:cNvPr id="6" name="Oval 5"/>
+          <p:cNvSpPr/>
+          <p:nvPr/>
+        </p:nvSpPr>
+        <p:spPr>
+          <a:xfrm>
+            <a:off x="548640" y="2697480"/>
+            <a:ext cx="502920" cy="502920"/>
+          </a:xfrm>
+          <a:prstGeom prst="ellipse">
+            <a:avLst/>
+          </a:prstGeom>
+          <a:solidFill>
+            <a:srgbClr val="F2B705"/>
+          </a:solidFill>
+          <a:ln>
+            <a:noFill/>
+          </a:ln>
+          <a:effectLst/>
+        </p:spPr>
+        <p:style>
+          <a:lnRef idx="1">
+            <a:schemeClr val="accent1"/>
+          </a:lnRef>
+          <a:fillRef idx="3">
+            <a:schemeClr val="accent1"/>
+          </a:fillRef>
+          <a:effectRef idx="2">
+            <a:schemeClr val="accent1"/>
+          </a:effectRef>
+          <a:fontRef idx="minor">
+            <a:schemeClr val="lt1"/>
+          </a:fontRef>
+        </p:style>
+        <p:txBody>
+          <a:bodyPr rtlCol="0" anchor="ctr" lIns="0" rIns="0" tIns="0" bIns="0"/>
+          <a:lstStyle/>
+          <a:p>
+            <a:pPr algn="ctr"/>
+            <a:r>
+              <a:rPr sz="1700" b="1">
+                <a:solidFill>
+                  <a:srgbClr val="202122"/>
+                </a:solidFill>
+                <a:latin typeface="Calibri"/>
+              </a:rPr>
+              <a:t>2</a:t>
+            </a:r>
+          </a:p>
+        </p:txBody>
+      </p:sp>
+      <p:sp>
+        <p:nvSpPr>
+          <p:cNvPr id="7" name="TextBox 6"/>
+          <p:cNvSpPr txBox="1"/>
+          <p:nvPr/>
+        </p:nvSpPr>
+        <p:spPr>
+          <a:xfrm>
+            <a:off x="1325880" y="2606040"/>
+            <a:ext cx="6583680" cy="822960"/>
+          </a:xfrm>
+          <a:prstGeom prst="rect">
+            <a:avLst/>
+          </a:prstGeom>
+          <a:noFill/>
+        </p:spPr>
+        <p:txBody>
+          <a:bodyPr wrap="square" anchor="ctr" lIns="0" rIns="0" tIns="0" bIns="0"/>
+          <a:lstStyle/>
+          <a:p>
+            <a:pPr algn="l"/>
+            <a:r>
+              <a:rPr sz="2000" b="0" i="0">
+                <a:solidFill>
+                  <a:srgbClr val="FFFFFF"/>
+                </a:solidFill>
+                <a:latin typeface="Calibri"/>
+              </a:rPr>
+              <a:t>What does a package manager do?</a:t>
+            </a:r>
+          </a:p>
+        </p:txBody>
+      </p:sp>
+      <p:sp>
+        <p:nvSpPr>
+          <p:cNvPr id="8" name="Oval 7"/>
+          <p:cNvSpPr/>
+          <p:nvPr/>
+        </p:nvSpPr>
+        <p:spPr>
+          <a:xfrm>
+            <a:off x="548640" y="3657600"/>
+            <a:ext cx="502920" cy="502920"/>
+          </a:xfrm>
+          <a:prstGeom prst="ellipse">
+            <a:avLst/>
+          </a:prstGeom>
+          <a:solidFill>
+            <a:srgbClr val="F2B705"/>
+          </a:solidFill>
+          <a:ln>
+            <a:noFill/>
+          </a:ln>
+          <a:effectLst/>
+        </p:spPr>
+        <p:style>
+          <a:lnRef idx="1">
+            <a:schemeClr val="accent1"/>
+          </a:lnRef>
+          <a:fillRef idx="3">
+            <a:schemeClr val="accent1"/>
+          </a:fillRef>
+          <a:effectRef idx="2">
+            <a:schemeClr val="accent1"/>
+          </a:effectRef>
+          <a:fontRef idx="minor">
+            <a:schemeClr val="lt1"/>
+          </a:fontRef>
+        </p:style>
+        <p:txBody>
+          <a:bodyPr rtlCol="0" anchor="ctr" lIns="0" rIns="0" tIns="0" bIns="0"/>
+          <a:lstStyle/>
+          <a:p>
+            <a:pPr algn="ctr"/>
+            <a:r>
+              <a:rPr sz="1700" b="1">
+                <a:solidFill>
+                  <a:srgbClr val="202122"/>
+                </a:solidFill>
+                <a:latin typeface="Calibri"/>
+              </a:rPr>
+              <a:t>3</a:t>
+            </a:r>
+          </a:p>
+        </p:txBody>
+      </p:sp>
+      <p:sp>
+        <p:nvSpPr>
+          <p:cNvPr id="9" name="TextBox 8"/>
+          <p:cNvSpPr txBox="1"/>
+          <p:nvPr/>
+        </p:nvSpPr>
+        <p:spPr>
+          <a:xfrm>
+            <a:off x="1325880" y="3566160"/>
+            <a:ext cx="6583680" cy="822960"/>
+          </a:xfrm>
+          <a:prstGeom prst="rect">
+            <a:avLst/>
+          </a:prstGeom>
+          <a:noFill/>
+        </p:spPr>
+        <p:txBody>
+          <a:bodyPr wrap="square" anchor="ctr" lIns="0" rIns="0" tIns="0" bIns="0"/>
+          <a:lstStyle/>
+          <a:p>
+            <a:pPr algn="l"/>
+            <a:r>
+              <a:rPr sz="2000" b="0" i="0">
+                <a:solidFill>
+                  <a:srgbClr val="FFFFFF"/>
+                </a:solidFill>
+                <a:latin typeface="Calibri"/>
+              </a:rPr>
+              <a:t>Name one embedded device you used today.</a:t>
+            </a:r>
+          </a:p>
+        </p:txBody>
+      </p:sp>
+      <p:sp>
+        <p:nvSpPr>
+          <p:cNvPr id="10" name="Rounded Rectangle 9"/>
+          <p:cNvSpPr/>
+          <p:nvPr/>
+        </p:nvSpPr>
+        <p:spPr>
+          <a:xfrm>
+            <a:off x="8229600" y="1645920"/>
+            <a:ext cx="3410712" cy="2926080"/>
+          </a:xfrm>
+          <a:prstGeom prst="roundRect">
+            <a:avLst>
+              <a:gd name="adj" fmla="val 8000"/>
+            </a:avLst>
+          </a:prstGeom>
+          <a:solidFill>
+            <a:srgbClr val="0645AD"/>
+          </a:solidFill>
+          <a:ln>
+            <a:noFill/>
+          </a:ln>
+          <a:effectLst/>
+        </p:spPr>
+        <p:style>
+          <a:lnRef idx="1">
+            <a:schemeClr val="accent1"/>
+          </a:lnRef>
+          <a:fillRef idx="3">
+            <a:schemeClr val="accent1"/>
+          </a:fillRef>
+          <a:effectRef idx="2">
+            <a:schemeClr val="accent1"/>
+          </a:effectRef>
+          <a:fontRef idx="minor">
+            <a:schemeClr val="lt1"/>
+          </a:fontRef>
+        </p:style>
+        <p:txBody>
+          <a:bodyPr rtlCol="0" anchor="ctr"/>
+          <a:lstStyle/>
+          <a:p/>
+        </p:txBody>
+      </p:sp>
+      <p:sp>
+        <p:nvSpPr>
+          <p:cNvPr id="11" name="TextBox 10"/>
+          <p:cNvSpPr txBox="1"/>
+          <p:nvPr/>
+        </p:nvSpPr>
+        <p:spPr>
+          <a:xfrm>
+            <a:off x="8503920" y="1874519"/>
+            <a:ext cx="2926080" cy="365760"/>
+          </a:xfrm>
+          <a:prstGeom prst="rect">
+            <a:avLst/>
+          </a:prstGeom>
+          <a:noFill/>
+        </p:spPr>
+        <p:txBody>
+          <a:bodyPr wrap="square" anchor="t" lIns="0" rIns="0" tIns="0" bIns="0"/>
+          <a:lstStyle/>
+          <a:p>
+            <a:pPr algn="l"/>
+            <a:r>
+              <a:rPr sz="1300" b="1" i="0">
+                <a:solidFill>
+                  <a:srgbClr val="A9C8F0"/>
+                </a:solidFill>
+                <a:latin typeface="Calibri"/>
+              </a:rPr>
+              <a:t>REVISE THIS TOPIC</a:t>
+            </a:r>
+          </a:p>
+        </p:txBody>
+      </p:sp>
+      <p:sp>
+        <p:nvSpPr>
+          <p:cNvPr id="12" name="TextBox 11"/>
+          <p:cNvSpPr txBox="1"/>
+          <p:nvPr/>
+        </p:nvSpPr>
+        <p:spPr>
+          <a:xfrm>
+            <a:off x="8503920" y="2286000"/>
+            <a:ext cx="2926080" cy="548640"/>
+          </a:xfrm>
+          <a:prstGeom prst="rect">
+            <a:avLst/>
+          </a:prstGeom>
+          <a:noFill/>
+        </p:spPr>
+        <p:txBody>
+          <a:bodyPr wrap="square" anchor="t" lIns="0" rIns="0" tIns="0" bIns="0"/>
+          <a:lstStyle/>
+          <a:p>
+            <a:pPr algn="l"/>
+            <a:r>
+              <a:rPr sz="1400" b="0" i="0">
+                <a:solidFill>
+                  <a:srgbClr val="FFFFFF"/>
+                </a:solidFill>
+                <a:latin typeface="Calibri"/>
+              </a:rPr>
+              <a:t>Revision notes for this lesson are on the study wiki:</a:t>
+            </a:r>
+          </a:p>
+        </p:txBody>
+      </p:sp>
+      <p:sp>
+        <p:nvSpPr>
+          <p:cNvPr id="13" name="TextBox 12"/>
+          <p:cNvSpPr txBox="1"/>
+          <p:nvPr/>
+        </p:nvSpPr>
+        <p:spPr>
+          <a:xfrm>
+            <a:off x="8503920" y="2926080"/>
+            <a:ext cx="2926080" cy="1463040"/>
+          </a:xfrm>
+          <a:prstGeom prst="rect">
+            <a:avLst/>
+          </a:prstGeom>
+          <a:noFill/>
+        </p:spPr>
+        <p:txBody>
+          <a:bodyPr wrap="square" anchor="t" lIns="0" rIns="0" tIns="0" bIns="0"/>
+          <a:lstStyle/>
+          <a:p>
+            <a:pPr algn="l"/>
+            <a:r>
+              <a:rPr sz="2000" b="1" i="0">
+                <a:solidFill>
+                  <a:srgbClr val="FFFFFF"/>
+                </a:solidFill>
+                <a:latin typeface="Cambria"/>
+              </a:rPr>
+              <a:t>Core Paper 2: Business Context, Data, Digital Environments and Security</a:t>
+            </a:r>
+          </a:p>
+        </p:txBody>
+      </p:sp>
+      <p:sp>
+        <p:nvSpPr>
+          <p:cNvPr id="14" name="TextBox 13"/>
+          <p:cNvSpPr txBox="1"/>
+          <p:nvPr/>
+        </p:nvSpPr>
+        <p:spPr>
+          <a:xfrm>
+            <a:off x="548640" y="5669280"/>
+            <a:ext cx="11094415" cy="548640"/>
+          </a:xfrm>
+          <a:prstGeom prst="rect">
+            <a:avLst/>
+          </a:prstGeom>
+          <a:noFill/>
+        </p:spPr>
+        <p:txBody>
+          <a:bodyPr wrap="square" anchor="t" lIns="0" rIns="0" tIns="0" bIns="0"/>
+          <a:lstStyle/>
+          <a:p>
+            <a:pPr algn="l"/>
+            <a:r>
+              <a:rPr sz="1200" b="0" i="0">
+                <a:solidFill>
+                  <a:srgbClr val="A9C8F0"/>
+                </a:solidFill>
+                <a:latin typeface="Calibri"/>
+              </a:rPr>
+              <a:t>https://lana6478.github.io/T-level-Digital-Software-Development/#/01-core-component/02-core-paper-2.md</a:t>
+            </a:r>
+          </a:p>
+        </p:txBody>
+      </p:sp>
+    </p:spTree>
+  </p:cSld>
+  <p:clrMapOvr>
+    <a:masterClrMapping/>
+  </p:clrMapOvr>
+</p:sld>
+</file>
+
 <file path=ppt/slides/slide2.xml><?xml version="1.0" encoding="utf-8"?>
 <p:sld xmlns:a="http://schemas.openxmlformats.org/drawingml/2006/main" xmlns:p="http://schemas.openxmlformats.org/presentationml/2006/main" xmlns:r="http://schemas.openxmlformats.org/officeDocument/2006/relationships">
   <p:cSld>
@@ -4680,6 +7203,407 @@
                 <a:latin typeface="Calibri"/>
               </a:rPr>
               <a:t>3</a:t>
+            </a:r>
+          </a:p>
+        </p:txBody>
+      </p:sp>
+      <p:sp>
+        <p:nvSpPr>
+          <p:cNvPr id="6" name="TextBox 5"/>
+          <p:cNvSpPr txBox="1"/>
+          <p:nvPr/>
+        </p:nvSpPr>
+        <p:spPr>
+          <a:xfrm>
+            <a:off x="548640" y="1554480"/>
+            <a:ext cx="6720840" cy="4617720"/>
+          </a:xfrm>
+          <a:prstGeom prst="rect">
+            <a:avLst/>
+          </a:prstGeom>
+          <a:noFill/>
+        </p:spPr>
+        <p:txBody>
+          <a:bodyPr wrap="square" lIns="0" rIns="0" tIns="0" bIns="0">
+            <a:spAutoFit/>
+          </a:bodyPr>
+          <a:lstStyle/>
+          <a:p>
+            <a:pPr>
+              <a:spcAft>
+                <a:spcPts val="1320"/>
+              </a:spcAft>
+            </a:pPr>
+            <a:r>
+              <a:rPr sz="2200" b="1">
+                <a:solidFill>
+                  <a:srgbClr val="202122"/>
+                </a:solidFill>
+                <a:latin typeface="Calibri"/>
+              </a:rPr>
+              <a:t>The processor runs instructions:</a:t>
+            </a:r>
+            <a:r>
+              <a:rPr sz="2200" b="0">
+                <a:solidFill>
+                  <a:srgbClr val="202122"/>
+                </a:solidFill>
+                <a:latin typeface="Calibri"/>
+              </a:rPr>
+              <a:t> more cores do more at once, a higher clock speed does each faster, and cache keeps data close. RAM holds running programs and data but is volatile. ROM holds start-up instructions. Storage can be magnetic, solid state or optical.</a:t>
+            </a:r>
+          </a:p>
+          <a:p>
+            <a:pPr>
+              <a:spcAft>
+                <a:spcPts val="1320"/>
+              </a:spcAft>
+            </a:pPr>
+            <a:r>
+              <a:rPr sz="2200" b="0">
+                <a:solidFill>
+                  <a:srgbClr val="202122"/>
+                </a:solidFill>
+                <a:latin typeface="Calibri"/>
+              </a:rPr>
+              <a:t>The motherboard connects everything, the GPU handles graphics and parallel work, network interfaces connect via PCI or USB, and cooling stops overheating.</a:t>
+            </a:r>
+          </a:p>
+          <a:p>
+            <a:pPr>
+              <a:spcAft>
+                <a:spcPts val="1320"/>
+              </a:spcAft>
+            </a:pPr>
+            <a:r>
+              <a:rPr sz="2200" b="0">
+                <a:solidFill>
+                  <a:srgbClr val="202122"/>
+                </a:solidFill>
+                <a:latin typeface="Calibri"/>
+              </a:rPr>
+              <a:t>Developers need enough RAM and CPU to run IDEs, emulators and virtual machines smoothly.</a:t>
+            </a:r>
+          </a:p>
+        </p:txBody>
+      </p:sp>
+      <p:sp>
+        <p:nvSpPr>
+          <p:cNvPr id="7" name="Rounded Rectangle 6"/>
+          <p:cNvSpPr/>
+          <p:nvPr/>
+        </p:nvSpPr>
+        <p:spPr>
+          <a:xfrm>
+            <a:off x="7772400" y="1554480"/>
+            <a:ext cx="3867912" cy="4526280"/>
+          </a:xfrm>
+          <a:prstGeom prst="roundRect">
+            <a:avLst>
+              <a:gd name="adj" fmla="val 8000"/>
+            </a:avLst>
+          </a:prstGeom>
+          <a:solidFill>
+            <a:srgbClr val="03306E"/>
+          </a:solidFill>
+          <a:ln>
+            <a:noFill/>
+          </a:ln>
+          <a:effectLst/>
+        </p:spPr>
+        <p:style>
+          <a:lnRef idx="1">
+            <a:schemeClr val="accent1"/>
+          </a:lnRef>
+          <a:fillRef idx="3">
+            <a:schemeClr val="accent1"/>
+          </a:fillRef>
+          <a:effectRef idx="2">
+            <a:schemeClr val="accent1"/>
+          </a:effectRef>
+          <a:fontRef idx="minor">
+            <a:schemeClr val="lt1"/>
+          </a:fontRef>
+        </p:style>
+        <p:txBody>
+          <a:bodyPr rtlCol="0" anchor="ctr"/>
+          <a:lstStyle/>
+          <a:p/>
+        </p:txBody>
+      </p:sp>
+      <p:sp>
+        <p:nvSpPr>
+          <p:cNvPr id="8" name="Oval 7"/>
+          <p:cNvSpPr/>
+          <p:nvPr/>
+        </p:nvSpPr>
+        <p:spPr>
+          <a:xfrm>
+            <a:off x="8046720" y="1828800"/>
+            <a:ext cx="548640" cy="548640"/>
+          </a:xfrm>
+          <a:prstGeom prst="ellipse">
+            <a:avLst/>
+          </a:prstGeom>
+          <a:solidFill>
+            <a:srgbClr val="F2B705"/>
+          </a:solidFill>
+          <a:ln>
+            <a:noFill/>
+          </a:ln>
+          <a:effectLst/>
+        </p:spPr>
+        <p:style>
+          <a:lnRef idx="1">
+            <a:schemeClr val="accent1"/>
+          </a:lnRef>
+          <a:fillRef idx="3">
+            <a:schemeClr val="accent1"/>
+          </a:fillRef>
+          <a:effectRef idx="2">
+            <a:schemeClr val="accent1"/>
+          </a:effectRef>
+          <a:fontRef idx="minor">
+            <a:schemeClr val="lt1"/>
+          </a:fontRef>
+        </p:style>
+        <p:txBody>
+          <a:bodyPr rtlCol="0" anchor="ctr" lIns="0" rIns="0" tIns="0" bIns="0"/>
+          <a:lstStyle/>
+          <a:p>
+            <a:pPr algn="ctr"/>
+            <a:r>
+              <a:rPr sz="1300" b="1">
+                <a:solidFill>
+                  <a:srgbClr val="202122"/>
+                </a:solidFill>
+                <a:latin typeface="Calibri"/>
+              </a:rPr>
+              <a:t>e.g.</a:t>
+            </a:r>
+          </a:p>
+        </p:txBody>
+      </p:sp>
+      <p:sp>
+        <p:nvSpPr>
+          <p:cNvPr id="9" name="TextBox 8"/>
+          <p:cNvSpPr txBox="1"/>
+          <p:nvPr/>
+        </p:nvSpPr>
+        <p:spPr>
+          <a:xfrm>
+            <a:off x="8046720" y="2560320"/>
+            <a:ext cx="3291840" cy="365760"/>
+          </a:xfrm>
+          <a:prstGeom prst="rect">
+            <a:avLst/>
+          </a:prstGeom>
+          <a:noFill/>
+        </p:spPr>
+        <p:txBody>
+          <a:bodyPr wrap="square" anchor="t" lIns="0" rIns="0" tIns="0" bIns="0"/>
+          <a:lstStyle/>
+          <a:p>
+            <a:pPr algn="l"/>
+            <a:r>
+              <a:rPr sz="1300" b="1" i="0">
+                <a:solidFill>
+                  <a:srgbClr val="A9C8F0"/>
+                </a:solidFill>
+                <a:latin typeface="Calibri"/>
+              </a:rPr>
+              <a:t>EXAMPLE</a:t>
+            </a:r>
+          </a:p>
+        </p:txBody>
+      </p:sp>
+      <p:sp>
+        <p:nvSpPr>
+          <p:cNvPr id="10" name="TextBox 9"/>
+          <p:cNvSpPr txBox="1"/>
+          <p:nvPr/>
+        </p:nvSpPr>
+        <p:spPr>
+          <a:xfrm>
+            <a:off x="8046720" y="2971800"/>
+            <a:ext cx="3291840" cy="2971800"/>
+          </a:xfrm>
+          <a:prstGeom prst="rect">
+            <a:avLst/>
+          </a:prstGeom>
+          <a:noFill/>
+        </p:spPr>
+        <p:txBody>
+          <a:bodyPr wrap="square" anchor="t" lIns="0" rIns="0" tIns="0" bIns="0"/>
+          <a:lstStyle/>
+          <a:p>
+            <a:pPr algn="l"/>
+            <a:r>
+              <a:rPr sz="1900" b="0" i="0">
+                <a:solidFill>
+                  <a:srgbClr val="FFFFFF"/>
+                </a:solidFill>
+                <a:latin typeface="Cambria"/>
+              </a:rPr>
+              <a:t>Running a phone emulator alongside an IDE needs 16 GB of RAM or more; with 8 GB, everything slows to a crawl.</a:t>
+            </a:r>
+          </a:p>
+        </p:txBody>
+      </p:sp>
+    </p:spTree>
+  </p:cSld>
+  <p:clrMapOvr>
+    <a:masterClrMapping/>
+  </p:clrMapOvr>
+</p:sld>
+</file>
+
+<file path=ppt/slides/slide4.xml><?xml version="1.0" encoding="utf-8"?>
+<p:sld xmlns:a="http://schemas.openxmlformats.org/drawingml/2006/main" xmlns:p="http://schemas.openxmlformats.org/presentationml/2006/main" xmlns:r="http://schemas.openxmlformats.org/officeDocument/2006/relationships">
+  <p:cSld>
+    <p:bg>
+      <p:bgPr>
+        <a:solidFill>
+          <a:srgbClr val="FFFFFF"/>
+        </a:solidFill>
+        <a:effectLst/>
+      </p:bgPr>
+    </p:bg>
+    <p:spTree>
+      <p:nvGrpSpPr>
+        <p:cNvPr id="1" name=""/>
+        <p:cNvGrpSpPr/>
+        <p:nvPr/>
+      </p:nvGrpSpPr>
+      <p:grpSpPr/>
+      <p:sp>
+        <p:nvSpPr>
+          <p:cNvPr id="2" name="TextBox 1"/>
+          <p:cNvSpPr txBox="1"/>
+          <p:nvPr/>
+        </p:nvSpPr>
+        <p:spPr>
+          <a:xfrm>
+            <a:off x="548640" y="320040"/>
+            <a:ext cx="11094415" cy="274320"/>
+          </a:xfrm>
+          <a:prstGeom prst="rect">
+            <a:avLst/>
+          </a:prstGeom>
+          <a:noFill/>
+        </p:spPr>
+        <p:txBody>
+          <a:bodyPr wrap="square" anchor="t" lIns="0" rIns="0" tIns="0" bIns="0"/>
+          <a:lstStyle/>
+          <a:p>
+            <a:pPr algn="l"/>
+            <a:r>
+              <a:rPr sz="1100" b="1" i="0">
+                <a:solidFill>
+                  <a:srgbClr val="54595D"/>
+                </a:solidFill>
+                <a:latin typeface="Calibri"/>
+              </a:rPr>
+              <a:t>CORE COMPONENT  ·  Core Paper 2</a:t>
+            </a:r>
+          </a:p>
+        </p:txBody>
+      </p:sp>
+      <p:sp>
+        <p:nvSpPr>
+          <p:cNvPr id="3" name="TextBox 2"/>
+          <p:cNvSpPr txBox="1"/>
+          <p:nvPr/>
+        </p:nvSpPr>
+        <p:spPr>
+          <a:xfrm>
+            <a:off x="548640" y="566928"/>
+            <a:ext cx="11094415" cy="822960"/>
+          </a:xfrm>
+          <a:prstGeom prst="rect">
+            <a:avLst/>
+          </a:prstGeom>
+          <a:noFill/>
+        </p:spPr>
+        <p:txBody>
+          <a:bodyPr wrap="square" anchor="ctr" lIns="0" rIns="0" tIns="0" bIns="0"/>
+          <a:lstStyle/>
+          <a:p>
+            <a:pPr algn="l"/>
+            <a:r>
+              <a:rPr sz="3200" b="1" i="0">
+                <a:solidFill>
+                  <a:srgbClr val="03306E"/>
+                </a:solidFill>
+                <a:latin typeface="Cambria"/>
+              </a:rPr>
+              <a:t>Hardware</a:t>
+            </a:r>
+          </a:p>
+        </p:txBody>
+      </p:sp>
+      <p:sp>
+        <p:nvSpPr>
+          <p:cNvPr id="4" name="TextBox 3"/>
+          <p:cNvSpPr txBox="1"/>
+          <p:nvPr/>
+        </p:nvSpPr>
+        <p:spPr>
+          <a:xfrm>
+            <a:off x="548640" y="6446520"/>
+            <a:ext cx="8229600" cy="274320"/>
+          </a:xfrm>
+          <a:prstGeom prst="rect">
+            <a:avLst/>
+          </a:prstGeom>
+          <a:noFill/>
+        </p:spPr>
+        <p:txBody>
+          <a:bodyPr wrap="square" anchor="t" lIns="0" rIns="0" tIns="0" bIns="0"/>
+          <a:lstStyle/>
+          <a:p>
+            <a:pPr algn="l"/>
+            <a:r>
+              <a:rPr sz="1000" b="0" i="0">
+                <a:solidFill>
+                  <a:srgbClr val="54595D"/>
+                </a:solidFill>
+                <a:latin typeface="Calibri"/>
+              </a:rPr>
+              <a:t>Digital Software Development T Level  ·  Hardware and Software</a:t>
+            </a:r>
+          </a:p>
+        </p:txBody>
+      </p:sp>
+      <p:sp>
+        <p:nvSpPr>
+          <p:cNvPr id="5" name="TextBox 4"/>
+          <p:cNvSpPr txBox="1"/>
+          <p:nvPr/>
+        </p:nvSpPr>
+        <p:spPr>
+          <a:xfrm>
+            <a:off x="10728655" y="6446520"/>
+            <a:ext cx="914400" cy="274320"/>
+          </a:xfrm>
+          <a:prstGeom prst="rect">
+            <a:avLst/>
+          </a:prstGeom>
+          <a:noFill/>
+        </p:spPr>
+        <p:txBody>
+          <a:bodyPr wrap="square" anchor="t" lIns="0" rIns="0" tIns="0" bIns="0"/>
+          <a:lstStyle/>
+          <a:p>
+            <a:pPr algn="r"/>
+            <a:r>
+              <a:rPr sz="1000" b="0" i="0">
+                <a:solidFill>
+                  <a:srgbClr val="54595D"/>
+                </a:solidFill>
+                <a:latin typeface="Calibri"/>
+              </a:rPr>
+              <a:t>4</a:t>
             </a:r>
           </a:p>
         </p:txBody>
@@ -4994,7 +7918,7 @@
 </p:sld>
 </file>
 
-<file path=ppt/slides/slide4.xml><?xml version="1.0" encoding="utf-8"?>
+<file path=ppt/slides/slide5.xml><?xml version="1.0" encoding="utf-8"?>
 <p:sld xmlns:a="http://schemas.openxmlformats.org/drawingml/2006/main" xmlns:p="http://schemas.openxmlformats.org/presentationml/2006/main" xmlns:r="http://schemas.openxmlformats.org/officeDocument/2006/relationships">
   <p:cSld>
     <p:bg>
@@ -5073,7 +7997,7 @@
                 </a:solidFill>
                 <a:latin typeface="Cambria"/>
               </a:rPr>
-              <a:t>Operating system types</a:t>
+              <a:t>Quick check: Hardware</a:t>
             </a:r>
           </a:p>
         </p:txBody>
@@ -5139,7 +8063,456 @@
                 </a:solidFill>
                 <a:latin typeface="Calibri"/>
               </a:rPr>
-              <a:t>4</a:t>
+              <a:t>5</a:t>
+            </a:r>
+          </a:p>
+        </p:txBody>
+      </p:sp>
+      <p:sp>
+        <p:nvSpPr>
+          <p:cNvPr id="6" name="Oval 5"/>
+          <p:cNvSpPr/>
+          <p:nvPr/>
+        </p:nvSpPr>
+        <p:spPr>
+          <a:xfrm>
+            <a:off x="548640" y="1691640"/>
+            <a:ext cx="502920" cy="502920"/>
+          </a:xfrm>
+          <a:prstGeom prst="ellipse">
+            <a:avLst/>
+          </a:prstGeom>
+          <a:solidFill>
+            <a:srgbClr val="F2B705"/>
+          </a:solidFill>
+          <a:ln>
+            <a:noFill/>
+          </a:ln>
+          <a:effectLst/>
+        </p:spPr>
+        <p:style>
+          <a:lnRef idx="1">
+            <a:schemeClr val="accent1"/>
+          </a:lnRef>
+          <a:fillRef idx="3">
+            <a:schemeClr val="accent1"/>
+          </a:fillRef>
+          <a:effectRef idx="2">
+            <a:schemeClr val="accent1"/>
+          </a:effectRef>
+          <a:fontRef idx="minor">
+            <a:schemeClr val="lt1"/>
+          </a:fontRef>
+        </p:style>
+        <p:txBody>
+          <a:bodyPr rtlCol="0" anchor="ctr" lIns="0" rIns="0" tIns="0" bIns="0"/>
+          <a:lstStyle/>
+          <a:p>
+            <a:pPr algn="ctr"/>
+            <a:r>
+              <a:rPr sz="1600" b="1">
+                <a:solidFill>
+                  <a:srgbClr val="202122"/>
+                </a:solidFill>
+                <a:latin typeface="Calibri"/>
+              </a:rPr>
+              <a:t>1</a:t>
+            </a:r>
+          </a:p>
+        </p:txBody>
+      </p:sp>
+      <p:sp>
+        <p:nvSpPr>
+          <p:cNvPr id="7" name="TextBox 6"/>
+          <p:cNvSpPr txBox="1"/>
+          <p:nvPr/>
+        </p:nvSpPr>
+        <p:spPr>
+          <a:xfrm>
+            <a:off x="1371600" y="1645920"/>
+            <a:ext cx="10271455" cy="1188720"/>
+          </a:xfrm>
+          <a:prstGeom prst="rect">
+            <a:avLst/>
+          </a:prstGeom>
+          <a:noFill/>
+        </p:spPr>
+        <p:txBody>
+          <a:bodyPr wrap="square" anchor="t" lIns="0" rIns="0" tIns="0" bIns="0"/>
+          <a:lstStyle/>
+          <a:p>
+            <a:pPr algn="l"/>
+            <a:r>
+              <a:rPr sz="2400" b="0" i="0">
+                <a:solidFill>
+                  <a:srgbClr val="202122"/>
+                </a:solidFill>
+                <a:latin typeface="Calibri"/>
+              </a:rPr>
+              <a:t>Which memory is volatile?</a:t>
+            </a:r>
+          </a:p>
+        </p:txBody>
+      </p:sp>
+      <p:sp>
+        <p:nvSpPr>
+          <p:cNvPr id="8" name="Oval 7"/>
+          <p:cNvSpPr/>
+          <p:nvPr/>
+        </p:nvSpPr>
+        <p:spPr>
+          <a:xfrm>
+            <a:off x="548640" y="3108960"/>
+            <a:ext cx="502920" cy="502920"/>
+          </a:xfrm>
+          <a:prstGeom prst="ellipse">
+            <a:avLst/>
+          </a:prstGeom>
+          <a:solidFill>
+            <a:srgbClr val="F2B705"/>
+          </a:solidFill>
+          <a:ln>
+            <a:noFill/>
+          </a:ln>
+          <a:effectLst/>
+        </p:spPr>
+        <p:style>
+          <a:lnRef idx="1">
+            <a:schemeClr val="accent1"/>
+          </a:lnRef>
+          <a:fillRef idx="3">
+            <a:schemeClr val="accent1"/>
+          </a:fillRef>
+          <a:effectRef idx="2">
+            <a:schemeClr val="accent1"/>
+          </a:effectRef>
+          <a:fontRef idx="minor">
+            <a:schemeClr val="lt1"/>
+          </a:fontRef>
+        </p:style>
+        <p:txBody>
+          <a:bodyPr rtlCol="0" anchor="ctr" lIns="0" rIns="0" tIns="0" bIns="0"/>
+          <a:lstStyle/>
+          <a:p>
+            <a:pPr algn="ctr"/>
+            <a:r>
+              <a:rPr sz="1600" b="1">
+                <a:solidFill>
+                  <a:srgbClr val="202122"/>
+                </a:solidFill>
+                <a:latin typeface="Calibri"/>
+              </a:rPr>
+              <a:t>2</a:t>
+            </a:r>
+          </a:p>
+        </p:txBody>
+      </p:sp>
+      <p:sp>
+        <p:nvSpPr>
+          <p:cNvPr id="9" name="TextBox 8"/>
+          <p:cNvSpPr txBox="1"/>
+          <p:nvPr/>
+        </p:nvSpPr>
+        <p:spPr>
+          <a:xfrm>
+            <a:off x="1371600" y="3063240"/>
+            <a:ext cx="10271455" cy="1188720"/>
+          </a:xfrm>
+          <a:prstGeom prst="rect">
+            <a:avLst/>
+          </a:prstGeom>
+          <a:noFill/>
+        </p:spPr>
+        <p:txBody>
+          <a:bodyPr wrap="square" anchor="t" lIns="0" rIns="0" tIns="0" bIns="0"/>
+          <a:lstStyle/>
+          <a:p>
+            <a:pPr algn="l"/>
+            <a:r>
+              <a:rPr sz="2400" b="0" i="0">
+                <a:solidFill>
+                  <a:srgbClr val="202122"/>
+                </a:solidFill>
+                <a:latin typeface="Calibri"/>
+              </a:rPr>
+              <a:t>What does a GPU do?</a:t>
+            </a:r>
+          </a:p>
+        </p:txBody>
+      </p:sp>
+      <p:sp>
+        <p:nvSpPr>
+          <p:cNvPr id="10" name="Oval 9"/>
+          <p:cNvSpPr/>
+          <p:nvPr/>
+        </p:nvSpPr>
+        <p:spPr>
+          <a:xfrm>
+            <a:off x="548640" y="4526280"/>
+            <a:ext cx="502920" cy="502920"/>
+          </a:xfrm>
+          <a:prstGeom prst="ellipse">
+            <a:avLst/>
+          </a:prstGeom>
+          <a:solidFill>
+            <a:srgbClr val="F2B705"/>
+          </a:solidFill>
+          <a:ln>
+            <a:noFill/>
+          </a:ln>
+          <a:effectLst/>
+        </p:spPr>
+        <p:style>
+          <a:lnRef idx="1">
+            <a:schemeClr val="accent1"/>
+          </a:lnRef>
+          <a:fillRef idx="3">
+            <a:schemeClr val="accent1"/>
+          </a:fillRef>
+          <a:effectRef idx="2">
+            <a:schemeClr val="accent1"/>
+          </a:effectRef>
+          <a:fontRef idx="minor">
+            <a:schemeClr val="lt1"/>
+          </a:fontRef>
+        </p:style>
+        <p:txBody>
+          <a:bodyPr rtlCol="0" anchor="ctr" lIns="0" rIns="0" tIns="0" bIns="0"/>
+          <a:lstStyle/>
+          <a:p>
+            <a:pPr algn="ctr"/>
+            <a:r>
+              <a:rPr sz="1600" b="1">
+                <a:solidFill>
+                  <a:srgbClr val="202122"/>
+                </a:solidFill>
+                <a:latin typeface="Calibri"/>
+              </a:rPr>
+              <a:t>3</a:t>
+            </a:r>
+          </a:p>
+        </p:txBody>
+      </p:sp>
+      <p:sp>
+        <p:nvSpPr>
+          <p:cNvPr id="11" name="TextBox 10"/>
+          <p:cNvSpPr txBox="1"/>
+          <p:nvPr/>
+        </p:nvSpPr>
+        <p:spPr>
+          <a:xfrm>
+            <a:off x="1371600" y="4480560"/>
+            <a:ext cx="10271455" cy="1188720"/>
+          </a:xfrm>
+          <a:prstGeom prst="rect">
+            <a:avLst/>
+          </a:prstGeom>
+          <a:noFill/>
+        </p:spPr>
+        <p:txBody>
+          <a:bodyPr wrap="square" anchor="t" lIns="0" rIns="0" tIns="0" bIns="0"/>
+          <a:lstStyle/>
+          <a:p>
+            <a:pPr algn="l"/>
+            <a:r>
+              <a:rPr sz="2400" b="0" i="0">
+                <a:solidFill>
+                  <a:srgbClr val="202122"/>
+                </a:solidFill>
+                <a:latin typeface="Calibri"/>
+              </a:rPr>
+              <a:t>Why do developers need plenty of RAM?</a:t>
+            </a:r>
+          </a:p>
+        </p:txBody>
+      </p:sp>
+      <p:sp>
+        <p:nvSpPr>
+          <p:cNvPr id="12" name="TextBox 11"/>
+          <p:cNvSpPr txBox="1"/>
+          <p:nvPr/>
+        </p:nvSpPr>
+        <p:spPr>
+          <a:xfrm>
+            <a:off x="548640" y="5852160"/>
+            <a:ext cx="11094415" cy="365760"/>
+          </a:xfrm>
+          <a:prstGeom prst="rect">
+            <a:avLst/>
+          </a:prstGeom>
+          <a:noFill/>
+        </p:spPr>
+        <p:txBody>
+          <a:bodyPr wrap="square" anchor="t" lIns="0" rIns="0" tIns="0" bIns="0"/>
+          <a:lstStyle/>
+          <a:p>
+            <a:pPr algn="l"/>
+            <a:r>
+              <a:rPr sz="1300" b="0" i="1">
+                <a:solidFill>
+                  <a:srgbClr val="54595D"/>
+                </a:solidFill>
+                <a:latin typeface="Calibri"/>
+              </a:rPr>
+              <a:t>Answer on mini whiteboards or in your book. Answers are in the speaker notes.</a:t>
+            </a:r>
+          </a:p>
+        </p:txBody>
+      </p:sp>
+    </p:spTree>
+  </p:cSld>
+  <p:clrMapOvr>
+    <a:masterClrMapping/>
+  </p:clrMapOvr>
+</p:sld>
+</file>
+
+<file path=ppt/slides/slide6.xml><?xml version="1.0" encoding="utf-8"?>
+<p:sld xmlns:a="http://schemas.openxmlformats.org/drawingml/2006/main" xmlns:p="http://schemas.openxmlformats.org/presentationml/2006/main" xmlns:r="http://schemas.openxmlformats.org/officeDocument/2006/relationships">
+  <p:cSld>
+    <p:bg>
+      <p:bgPr>
+        <a:solidFill>
+          <a:srgbClr val="FFFFFF"/>
+        </a:solidFill>
+        <a:effectLst/>
+      </p:bgPr>
+    </p:bg>
+    <p:spTree>
+      <p:nvGrpSpPr>
+        <p:cNvPr id="1" name=""/>
+        <p:cNvGrpSpPr/>
+        <p:nvPr/>
+      </p:nvGrpSpPr>
+      <p:grpSpPr/>
+      <p:sp>
+        <p:nvSpPr>
+          <p:cNvPr id="2" name="TextBox 1"/>
+          <p:cNvSpPr txBox="1"/>
+          <p:nvPr/>
+        </p:nvSpPr>
+        <p:spPr>
+          <a:xfrm>
+            <a:off x="548640" y="320040"/>
+            <a:ext cx="11094415" cy="274320"/>
+          </a:xfrm>
+          <a:prstGeom prst="rect">
+            <a:avLst/>
+          </a:prstGeom>
+          <a:noFill/>
+        </p:spPr>
+        <p:txBody>
+          <a:bodyPr wrap="square" anchor="t" lIns="0" rIns="0" tIns="0" bIns="0"/>
+          <a:lstStyle/>
+          <a:p>
+            <a:pPr algn="l"/>
+            <a:r>
+              <a:rPr sz="1100" b="1" i="0">
+                <a:solidFill>
+                  <a:srgbClr val="54595D"/>
+                </a:solidFill>
+                <a:latin typeface="Calibri"/>
+              </a:rPr>
+              <a:t>CORE COMPONENT  ·  Core Paper 2</a:t>
+            </a:r>
+          </a:p>
+        </p:txBody>
+      </p:sp>
+      <p:sp>
+        <p:nvSpPr>
+          <p:cNvPr id="3" name="TextBox 2"/>
+          <p:cNvSpPr txBox="1"/>
+          <p:nvPr/>
+        </p:nvSpPr>
+        <p:spPr>
+          <a:xfrm>
+            <a:off x="548640" y="566928"/>
+            <a:ext cx="11094415" cy="822960"/>
+          </a:xfrm>
+          <a:prstGeom prst="rect">
+            <a:avLst/>
+          </a:prstGeom>
+          <a:noFill/>
+        </p:spPr>
+        <p:txBody>
+          <a:bodyPr wrap="square" anchor="ctr" lIns="0" rIns="0" tIns="0" bIns="0"/>
+          <a:lstStyle/>
+          <a:p>
+            <a:pPr algn="l"/>
+            <a:r>
+              <a:rPr sz="3200" b="1" i="0">
+                <a:solidFill>
+                  <a:srgbClr val="03306E"/>
+                </a:solidFill>
+                <a:latin typeface="Cambria"/>
+              </a:rPr>
+              <a:t>Operating system types</a:t>
+            </a:r>
+          </a:p>
+        </p:txBody>
+      </p:sp>
+      <p:sp>
+        <p:nvSpPr>
+          <p:cNvPr id="4" name="TextBox 3"/>
+          <p:cNvSpPr txBox="1"/>
+          <p:nvPr/>
+        </p:nvSpPr>
+        <p:spPr>
+          <a:xfrm>
+            <a:off x="548640" y="6446520"/>
+            <a:ext cx="8229600" cy="274320"/>
+          </a:xfrm>
+          <a:prstGeom prst="rect">
+            <a:avLst/>
+          </a:prstGeom>
+          <a:noFill/>
+        </p:spPr>
+        <p:txBody>
+          <a:bodyPr wrap="square" anchor="t" lIns="0" rIns="0" tIns="0" bIns="0"/>
+          <a:lstStyle/>
+          <a:p>
+            <a:pPr algn="l"/>
+            <a:r>
+              <a:rPr sz="1000" b="0" i="0">
+                <a:solidFill>
+                  <a:srgbClr val="54595D"/>
+                </a:solidFill>
+                <a:latin typeface="Calibri"/>
+              </a:rPr>
+              <a:t>Digital Software Development T Level  ·  Hardware and Software</a:t>
+            </a:r>
+          </a:p>
+        </p:txBody>
+      </p:sp>
+      <p:sp>
+        <p:nvSpPr>
+          <p:cNvPr id="5" name="TextBox 4"/>
+          <p:cNvSpPr txBox="1"/>
+          <p:nvPr/>
+        </p:nvSpPr>
+        <p:spPr>
+          <a:xfrm>
+            <a:off x="10728655" y="6446520"/>
+            <a:ext cx="914400" cy="274320"/>
+          </a:xfrm>
+          <a:prstGeom prst="rect">
+            <a:avLst/>
+          </a:prstGeom>
+          <a:noFill/>
+        </p:spPr>
+        <p:txBody>
+          <a:bodyPr wrap="square" anchor="t" lIns="0" rIns="0" tIns="0" bIns="0"/>
+          <a:lstStyle/>
+          <a:p>
+            <a:pPr algn="r"/>
+            <a:r>
+              <a:rPr sz="1000" b="0" i="0">
+                <a:solidFill>
+                  <a:srgbClr val="54595D"/>
+                </a:solidFill>
+                <a:latin typeface="Calibri"/>
+              </a:rPr>
+              <a:t>6</a:t>
             </a:r>
           </a:p>
         </p:txBody>
@@ -5487,1119 +8860,6 @@
 </p:sld>
 </file>
 
-<file path=ppt/slides/slide5.xml><?xml version="1.0" encoding="utf-8"?>
-<p:sld xmlns:a="http://schemas.openxmlformats.org/drawingml/2006/main" xmlns:p="http://schemas.openxmlformats.org/presentationml/2006/main" xmlns:r="http://schemas.openxmlformats.org/officeDocument/2006/relationships">
-  <p:cSld>
-    <p:bg>
-      <p:bgPr>
-        <a:solidFill>
-          <a:srgbClr val="FFFFFF"/>
-        </a:solidFill>
-        <a:effectLst/>
-      </p:bgPr>
-    </p:bg>
-    <p:spTree>
-      <p:nvGrpSpPr>
-        <p:cNvPr id="1" name=""/>
-        <p:cNvGrpSpPr/>
-        <p:nvPr/>
-      </p:nvGrpSpPr>
-      <p:grpSpPr/>
-      <p:sp>
-        <p:nvSpPr>
-          <p:cNvPr id="2" name="TextBox 1"/>
-          <p:cNvSpPr txBox="1"/>
-          <p:nvPr/>
-        </p:nvSpPr>
-        <p:spPr>
-          <a:xfrm>
-            <a:off x="548640" y="320040"/>
-            <a:ext cx="11094415" cy="274320"/>
-          </a:xfrm>
-          <a:prstGeom prst="rect">
-            <a:avLst/>
-          </a:prstGeom>
-          <a:noFill/>
-        </p:spPr>
-        <p:txBody>
-          <a:bodyPr wrap="square" anchor="t" lIns="0" rIns="0" tIns="0" bIns="0"/>
-          <a:lstStyle/>
-          <a:p>
-            <a:pPr algn="l"/>
-            <a:r>
-              <a:rPr sz="1100" b="1" i="0">
-                <a:solidFill>
-                  <a:srgbClr val="54595D"/>
-                </a:solidFill>
-                <a:latin typeface="Calibri"/>
-              </a:rPr>
-              <a:t>CORE COMPONENT  ·  Core Paper 2</a:t>
-            </a:r>
-          </a:p>
-        </p:txBody>
-      </p:sp>
-      <p:sp>
-        <p:nvSpPr>
-          <p:cNvPr id="3" name="TextBox 2"/>
-          <p:cNvSpPr txBox="1"/>
-          <p:nvPr/>
-        </p:nvSpPr>
-        <p:spPr>
-          <a:xfrm>
-            <a:off x="548640" y="566928"/>
-            <a:ext cx="11094415" cy="822960"/>
-          </a:xfrm>
-          <a:prstGeom prst="rect">
-            <a:avLst/>
-          </a:prstGeom>
-          <a:noFill/>
-        </p:spPr>
-        <p:txBody>
-          <a:bodyPr wrap="square" anchor="ctr" lIns="0" rIns="0" tIns="0" bIns="0"/>
-          <a:lstStyle/>
-          <a:p>
-            <a:pPr algn="l"/>
-            <a:r>
-              <a:rPr sz="3200" b="1" i="0">
-                <a:solidFill>
-                  <a:srgbClr val="03306E"/>
-                </a:solidFill>
-                <a:latin typeface="Cambria"/>
-              </a:rPr>
-              <a:t>Code development tools</a:t>
-            </a:r>
-          </a:p>
-        </p:txBody>
-      </p:sp>
-      <p:sp>
-        <p:nvSpPr>
-          <p:cNvPr id="4" name="TextBox 3"/>
-          <p:cNvSpPr txBox="1"/>
-          <p:nvPr/>
-        </p:nvSpPr>
-        <p:spPr>
-          <a:xfrm>
-            <a:off x="548640" y="6446520"/>
-            <a:ext cx="8229600" cy="274320"/>
-          </a:xfrm>
-          <a:prstGeom prst="rect">
-            <a:avLst/>
-          </a:prstGeom>
-          <a:noFill/>
-        </p:spPr>
-        <p:txBody>
-          <a:bodyPr wrap="square" anchor="t" lIns="0" rIns="0" tIns="0" bIns="0"/>
-          <a:lstStyle/>
-          <a:p>
-            <a:pPr algn="l"/>
-            <a:r>
-              <a:rPr sz="1000" b="0" i="0">
-                <a:solidFill>
-                  <a:srgbClr val="54595D"/>
-                </a:solidFill>
-                <a:latin typeface="Calibri"/>
-              </a:rPr>
-              <a:t>Digital Software Development T Level  ·  Hardware and Software</a:t>
-            </a:r>
-          </a:p>
-        </p:txBody>
-      </p:sp>
-      <p:sp>
-        <p:nvSpPr>
-          <p:cNvPr id="5" name="TextBox 4"/>
-          <p:cNvSpPr txBox="1"/>
-          <p:nvPr/>
-        </p:nvSpPr>
-        <p:spPr>
-          <a:xfrm>
-            <a:off x="10728655" y="6446520"/>
-            <a:ext cx="914400" cy="274320"/>
-          </a:xfrm>
-          <a:prstGeom prst="rect">
-            <a:avLst/>
-          </a:prstGeom>
-          <a:noFill/>
-        </p:spPr>
-        <p:txBody>
-          <a:bodyPr wrap="square" anchor="t" lIns="0" rIns="0" tIns="0" bIns="0"/>
-          <a:lstStyle/>
-          <a:p>
-            <a:pPr algn="r"/>
-            <a:r>
-              <a:rPr sz="1000" b="0" i="0">
-                <a:solidFill>
-                  <a:srgbClr val="54595D"/>
-                </a:solidFill>
-                <a:latin typeface="Calibri"/>
-              </a:rPr>
-              <a:t>5</a:t>
-            </a:r>
-          </a:p>
-        </p:txBody>
-      </p:sp>
-      <p:sp>
-        <p:nvSpPr>
-          <p:cNvPr id="6" name="Rounded Rectangle 5"/>
-          <p:cNvSpPr/>
-          <p:nvPr/>
-        </p:nvSpPr>
-        <p:spPr>
-          <a:xfrm>
-            <a:off x="548640" y="1600200"/>
-            <a:ext cx="5364327" cy="640080"/>
-          </a:xfrm>
-          <a:prstGeom prst="roundRect">
-            <a:avLst>
-              <a:gd name="adj" fmla="val 15000"/>
-            </a:avLst>
-          </a:prstGeom>
-          <a:solidFill>
-            <a:srgbClr val="03306E"/>
-          </a:solidFill>
-          <a:ln>
-            <a:noFill/>
-          </a:ln>
-          <a:effectLst/>
-        </p:spPr>
-        <p:style>
-          <a:lnRef idx="1">
-            <a:schemeClr val="accent1"/>
-          </a:lnRef>
-          <a:fillRef idx="3">
-            <a:schemeClr val="accent1"/>
-          </a:fillRef>
-          <a:effectRef idx="2">
-            <a:schemeClr val="accent1"/>
-          </a:effectRef>
-          <a:fontRef idx="minor">
-            <a:schemeClr val="lt1"/>
-          </a:fontRef>
-        </p:style>
-        <p:txBody>
-          <a:bodyPr rtlCol="0" anchor="ctr"/>
-          <a:lstStyle/>
-          <a:p/>
-        </p:txBody>
-      </p:sp>
-      <p:sp>
-        <p:nvSpPr>
-          <p:cNvPr id="7" name="TextBox 6"/>
-          <p:cNvSpPr txBox="1"/>
-          <p:nvPr/>
-        </p:nvSpPr>
-        <p:spPr>
-          <a:xfrm>
-            <a:off x="777240" y="1600200"/>
-            <a:ext cx="4907127" cy="640080"/>
-          </a:xfrm>
-          <a:prstGeom prst="rect">
-            <a:avLst/>
-          </a:prstGeom>
-          <a:noFill/>
-        </p:spPr>
-        <p:txBody>
-          <a:bodyPr wrap="square" anchor="ctr" lIns="0" rIns="0" tIns="0" bIns="0"/>
-          <a:lstStyle/>
-          <a:p>
-            <a:pPr algn="l"/>
-            <a:r>
-              <a:rPr sz="2000" b="1" i="0">
-                <a:solidFill>
-                  <a:srgbClr val="FFFFFF"/>
-                </a:solidFill>
-                <a:latin typeface="Calibri"/>
-              </a:rPr>
-              <a:t>IDE</a:t>
-            </a:r>
-          </a:p>
-        </p:txBody>
-      </p:sp>
-      <p:sp>
-        <p:nvSpPr>
-          <p:cNvPr id="8" name="Rounded Rectangle 7"/>
-          <p:cNvSpPr/>
-          <p:nvPr/>
-        </p:nvSpPr>
-        <p:spPr>
-          <a:xfrm>
-            <a:off x="548640" y="2377440"/>
-            <a:ext cx="5364327" cy="3794760"/>
-          </a:xfrm>
-          <a:prstGeom prst="roundRect">
-            <a:avLst>
-              <a:gd name="adj" fmla="val 4000"/>
-            </a:avLst>
-          </a:prstGeom>
-          <a:solidFill>
-            <a:srgbClr val="EAF3FF"/>
-          </a:solidFill>
-          <a:ln>
-            <a:noFill/>
-          </a:ln>
-          <a:effectLst/>
-        </p:spPr>
-        <p:style>
-          <a:lnRef idx="1">
-            <a:schemeClr val="accent1"/>
-          </a:lnRef>
-          <a:fillRef idx="3">
-            <a:schemeClr val="accent1"/>
-          </a:fillRef>
-          <a:effectRef idx="2">
-            <a:schemeClr val="accent1"/>
-          </a:effectRef>
-          <a:fontRef idx="minor">
-            <a:schemeClr val="lt1"/>
-          </a:fontRef>
-        </p:style>
-        <p:txBody>
-          <a:bodyPr rtlCol="0" anchor="ctr"/>
-          <a:lstStyle/>
-          <a:p/>
-        </p:txBody>
-      </p:sp>
-      <p:sp>
-        <p:nvSpPr>
-          <p:cNvPr id="9" name="TextBox 8"/>
-          <p:cNvSpPr txBox="1"/>
-          <p:nvPr/>
-        </p:nvSpPr>
-        <p:spPr>
-          <a:xfrm>
-            <a:off x="822959" y="2606040"/>
-            <a:ext cx="4815687" cy="3337560"/>
-          </a:xfrm>
-          <a:prstGeom prst="rect">
-            <a:avLst/>
-          </a:prstGeom>
-          <a:noFill/>
-        </p:spPr>
-        <p:txBody>
-          <a:bodyPr wrap="square" lIns="0" rIns="0" tIns="0" bIns="0">
-            <a:spAutoFit/>
-          </a:bodyPr>
-          <a:lstStyle/>
-          <a:p>
-            <a:pPr marL="274320" indent="-274320">
-              <a:spcAft>
-                <a:spcPts val="990"/>
-              </a:spcAft>
-              <a:buClr>
-                <a:srgbClr val="0645AD"/>
-              </a:buClr>
-              <a:buFont typeface="Arial"/>
-              <a:buChar char="•"/>
-            </a:pPr>
-            <a:r>
-              <a:rPr sz="2200" b="0">
-                <a:solidFill>
-                  <a:srgbClr val="202122"/>
-                </a:solidFill>
-                <a:latin typeface="Calibri"/>
-              </a:rPr>
-              <a:t>Editor with syntax highlighting</a:t>
-            </a:r>
-          </a:p>
-          <a:p>
-            <a:pPr marL="274320" indent="-274320">
-              <a:spcAft>
-                <a:spcPts val="990"/>
-              </a:spcAft>
-              <a:buClr>
-                <a:srgbClr val="0645AD"/>
-              </a:buClr>
-              <a:buFont typeface="Arial"/>
-              <a:buChar char="•"/>
-            </a:pPr>
-            <a:r>
-              <a:rPr sz="2200" b="0">
-                <a:solidFill>
-                  <a:srgbClr val="202122"/>
-                </a:solidFill>
-                <a:latin typeface="Calibri"/>
-              </a:rPr>
-              <a:t>Debugging tools such as breakpoints</a:t>
-            </a:r>
-          </a:p>
-          <a:p>
-            <a:pPr marL="274320" indent="-274320">
-              <a:spcAft>
-                <a:spcPts val="990"/>
-              </a:spcAft>
-              <a:buClr>
-                <a:srgbClr val="0645AD"/>
-              </a:buClr>
-              <a:buFont typeface="Arial"/>
-              <a:buChar char="•"/>
-            </a:pPr>
-            <a:r>
-              <a:rPr sz="2200" b="0">
-                <a:solidFill>
-                  <a:srgbClr val="202122"/>
-                </a:solidFill>
-                <a:latin typeface="Calibri"/>
-              </a:rPr>
-              <a:t>Screen design tools</a:t>
-            </a:r>
-          </a:p>
-          <a:p>
-            <a:pPr marL="274320" indent="-274320">
-              <a:spcAft>
-                <a:spcPts val="990"/>
-              </a:spcAft>
-              <a:buClr>
-                <a:srgbClr val="0645AD"/>
-              </a:buClr>
-              <a:buFont typeface="Arial"/>
-              <a:buChar char="•"/>
-            </a:pPr>
-            <a:r>
-              <a:rPr sz="2200" b="0">
-                <a:solidFill>
-                  <a:srgbClr val="202122"/>
-                </a:solidFill>
-                <a:latin typeface="Calibri"/>
-              </a:rPr>
-              <a:t>Everything in one place</a:t>
-            </a:r>
-          </a:p>
-        </p:txBody>
-      </p:sp>
-      <p:sp>
-        <p:nvSpPr>
-          <p:cNvPr id="10" name="Rounded Rectangle 9"/>
-          <p:cNvSpPr/>
-          <p:nvPr/>
-        </p:nvSpPr>
-        <p:spPr>
-          <a:xfrm>
-            <a:off x="6278727" y="1600200"/>
-            <a:ext cx="5364327" cy="640080"/>
-          </a:xfrm>
-          <a:prstGeom prst="roundRect">
-            <a:avLst>
-              <a:gd name="adj" fmla="val 15000"/>
-            </a:avLst>
-          </a:prstGeom>
-          <a:solidFill>
-            <a:srgbClr val="0645AD"/>
-          </a:solidFill>
-          <a:ln>
-            <a:noFill/>
-          </a:ln>
-          <a:effectLst/>
-        </p:spPr>
-        <p:style>
-          <a:lnRef idx="1">
-            <a:schemeClr val="accent1"/>
-          </a:lnRef>
-          <a:fillRef idx="3">
-            <a:schemeClr val="accent1"/>
-          </a:fillRef>
-          <a:effectRef idx="2">
-            <a:schemeClr val="accent1"/>
-          </a:effectRef>
-          <a:fontRef idx="minor">
-            <a:schemeClr val="lt1"/>
-          </a:fontRef>
-        </p:style>
-        <p:txBody>
-          <a:bodyPr rtlCol="0" anchor="ctr"/>
-          <a:lstStyle/>
-          <a:p/>
-        </p:txBody>
-      </p:sp>
-      <p:sp>
-        <p:nvSpPr>
-          <p:cNvPr id="11" name="TextBox 10"/>
-          <p:cNvSpPr txBox="1"/>
-          <p:nvPr/>
-        </p:nvSpPr>
-        <p:spPr>
-          <a:xfrm>
-            <a:off x="6507327" y="1600200"/>
-            <a:ext cx="4907127" cy="640080"/>
-          </a:xfrm>
-          <a:prstGeom prst="rect">
-            <a:avLst/>
-          </a:prstGeom>
-          <a:noFill/>
-        </p:spPr>
-        <p:txBody>
-          <a:bodyPr wrap="square" anchor="ctr" lIns="0" rIns="0" tIns="0" bIns="0"/>
-          <a:lstStyle/>
-          <a:p>
-            <a:pPr algn="l"/>
-            <a:r>
-              <a:rPr sz="2000" b="1" i="0">
-                <a:solidFill>
-                  <a:srgbClr val="FFFFFF"/>
-                </a:solidFill>
-                <a:latin typeface="Calibri"/>
-              </a:rPr>
-              <a:t>Translators</a:t>
-            </a:r>
-          </a:p>
-        </p:txBody>
-      </p:sp>
-      <p:sp>
-        <p:nvSpPr>
-          <p:cNvPr id="12" name="Rounded Rectangle 11"/>
-          <p:cNvSpPr/>
-          <p:nvPr/>
-        </p:nvSpPr>
-        <p:spPr>
-          <a:xfrm>
-            <a:off x="6278727" y="2377440"/>
-            <a:ext cx="5364327" cy="3794760"/>
-          </a:xfrm>
-          <a:prstGeom prst="roundRect">
-            <a:avLst>
-              <a:gd name="adj" fmla="val 4000"/>
-            </a:avLst>
-          </a:prstGeom>
-          <a:solidFill>
-            <a:srgbClr val="EAF3FF"/>
-          </a:solidFill>
-          <a:ln>
-            <a:noFill/>
-          </a:ln>
-          <a:effectLst/>
-        </p:spPr>
-        <p:style>
-          <a:lnRef idx="1">
-            <a:schemeClr val="accent1"/>
-          </a:lnRef>
-          <a:fillRef idx="3">
-            <a:schemeClr val="accent1"/>
-          </a:fillRef>
-          <a:effectRef idx="2">
-            <a:schemeClr val="accent1"/>
-          </a:effectRef>
-          <a:fontRef idx="minor">
-            <a:schemeClr val="lt1"/>
-          </a:fontRef>
-        </p:style>
-        <p:txBody>
-          <a:bodyPr rtlCol="0" anchor="ctr"/>
-          <a:lstStyle/>
-          <a:p/>
-        </p:txBody>
-      </p:sp>
-      <p:sp>
-        <p:nvSpPr>
-          <p:cNvPr id="13" name="TextBox 12"/>
-          <p:cNvSpPr txBox="1"/>
-          <p:nvPr/>
-        </p:nvSpPr>
-        <p:spPr>
-          <a:xfrm>
-            <a:off x="6553047" y="2606040"/>
-            <a:ext cx="4815687" cy="3337560"/>
-          </a:xfrm>
-          <a:prstGeom prst="rect">
-            <a:avLst/>
-          </a:prstGeom>
-          <a:noFill/>
-        </p:spPr>
-        <p:txBody>
-          <a:bodyPr wrap="square" lIns="0" rIns="0" tIns="0" bIns="0">
-            <a:spAutoFit/>
-          </a:bodyPr>
-          <a:lstStyle/>
-          <a:p>
-            <a:pPr marL="274320" indent="-274320">
-              <a:spcAft>
-                <a:spcPts val="990"/>
-              </a:spcAft>
-              <a:buClr>
-                <a:srgbClr val="0645AD"/>
-              </a:buClr>
-              <a:buFont typeface="Arial"/>
-              <a:buChar char="•"/>
-            </a:pPr>
-            <a:r>
-              <a:rPr sz="2200" b="1">
-                <a:solidFill>
-                  <a:srgbClr val="202122"/>
-                </a:solidFill>
-                <a:latin typeface="Calibri"/>
-              </a:rPr>
-              <a:t>Compiler:</a:t>
-            </a:r>
-            <a:r>
-              <a:rPr sz="2200" b="0">
-                <a:solidFill>
-                  <a:srgbClr val="202122"/>
-                </a:solidFill>
-                <a:latin typeface="Calibri"/>
-              </a:rPr>
-              <a:t> translates the whole program before it runs; fast to run</a:t>
-            </a:r>
-          </a:p>
-          <a:p>
-            <a:pPr marL="274320" indent="-274320">
-              <a:spcAft>
-                <a:spcPts val="990"/>
-              </a:spcAft>
-              <a:buClr>
-                <a:srgbClr val="0645AD"/>
-              </a:buClr>
-              <a:buFont typeface="Arial"/>
-              <a:buChar char="•"/>
-            </a:pPr>
-            <a:r>
-              <a:rPr sz="2200" b="1">
-                <a:solidFill>
-                  <a:srgbClr val="202122"/>
-                </a:solidFill>
-                <a:latin typeface="Calibri"/>
-              </a:rPr>
-              <a:t>Interpreter:</a:t>
-            </a:r>
-            <a:r>
-              <a:rPr sz="2200" b="0">
-                <a:solidFill>
-                  <a:srgbClr val="202122"/>
-                </a:solidFill>
-                <a:latin typeface="Calibri"/>
-              </a:rPr>
-              <a:t> translates and runs line by line; easier to debug</a:t>
-            </a:r>
-          </a:p>
-          <a:p>
-            <a:pPr marL="274320" indent="-274320">
-              <a:spcAft>
-                <a:spcPts val="990"/>
-              </a:spcAft>
-              <a:buClr>
-                <a:srgbClr val="0645AD"/>
-              </a:buClr>
-              <a:buFont typeface="Arial"/>
-              <a:buChar char="•"/>
-            </a:pPr>
-            <a:r>
-              <a:rPr sz="2200" b="0">
-                <a:solidFill>
-                  <a:srgbClr val="202122"/>
-                </a:solidFill>
-                <a:latin typeface="Calibri"/>
-              </a:rPr>
-              <a:t>Python is usually interpreted</a:t>
-            </a:r>
-          </a:p>
-        </p:txBody>
-      </p:sp>
-    </p:spTree>
-  </p:cSld>
-  <p:clrMapOvr>
-    <a:masterClrMapping/>
-  </p:clrMapOvr>
-</p:sld>
-</file>
-
-<file path=ppt/slides/slide6.xml><?xml version="1.0" encoding="utf-8"?>
-<p:sld xmlns:a="http://schemas.openxmlformats.org/drawingml/2006/main" xmlns:p="http://schemas.openxmlformats.org/presentationml/2006/main" xmlns:r="http://schemas.openxmlformats.org/officeDocument/2006/relationships">
-  <p:cSld>
-    <p:bg>
-      <p:bgPr>
-        <a:solidFill>
-          <a:srgbClr val="FFFFFF"/>
-        </a:solidFill>
-        <a:effectLst/>
-      </p:bgPr>
-    </p:bg>
-    <p:spTree>
-      <p:nvGrpSpPr>
-        <p:cNvPr id="1" name=""/>
-        <p:cNvGrpSpPr/>
-        <p:nvPr/>
-      </p:nvGrpSpPr>
-      <p:grpSpPr/>
-      <p:sp>
-        <p:nvSpPr>
-          <p:cNvPr id="2" name="TextBox 1"/>
-          <p:cNvSpPr txBox="1"/>
-          <p:nvPr/>
-        </p:nvSpPr>
-        <p:spPr>
-          <a:xfrm>
-            <a:off x="548640" y="320040"/>
-            <a:ext cx="11094415" cy="274320"/>
-          </a:xfrm>
-          <a:prstGeom prst="rect">
-            <a:avLst/>
-          </a:prstGeom>
-          <a:noFill/>
-        </p:spPr>
-        <p:txBody>
-          <a:bodyPr wrap="square" anchor="t" lIns="0" rIns="0" tIns="0" bIns="0"/>
-          <a:lstStyle/>
-          <a:p>
-            <a:pPr algn="l"/>
-            <a:r>
-              <a:rPr sz="1100" b="1" i="0">
-                <a:solidFill>
-                  <a:srgbClr val="54595D"/>
-                </a:solidFill>
-                <a:latin typeface="Calibri"/>
-              </a:rPr>
-              <a:t>CORE COMPONENT  ·  Core Paper 2</a:t>
-            </a:r>
-          </a:p>
-        </p:txBody>
-      </p:sp>
-      <p:sp>
-        <p:nvSpPr>
-          <p:cNvPr id="3" name="TextBox 2"/>
-          <p:cNvSpPr txBox="1"/>
-          <p:nvPr/>
-        </p:nvSpPr>
-        <p:spPr>
-          <a:xfrm>
-            <a:off x="548640" y="566928"/>
-            <a:ext cx="11094415" cy="822960"/>
-          </a:xfrm>
-          <a:prstGeom prst="rect">
-            <a:avLst/>
-          </a:prstGeom>
-          <a:noFill/>
-        </p:spPr>
-        <p:txBody>
-          <a:bodyPr wrap="square" anchor="ctr" lIns="0" rIns="0" tIns="0" bIns="0"/>
-          <a:lstStyle/>
-          <a:p>
-            <a:pPr algn="l"/>
-            <a:r>
-              <a:rPr sz="3200" b="1" i="0">
-                <a:solidFill>
-                  <a:srgbClr val="03306E"/>
-                </a:solidFill>
-                <a:latin typeface="Cambria"/>
-              </a:rPr>
-              <a:t>Check your understanding</a:t>
-            </a:r>
-          </a:p>
-        </p:txBody>
-      </p:sp>
-      <p:sp>
-        <p:nvSpPr>
-          <p:cNvPr id="4" name="TextBox 3"/>
-          <p:cNvSpPr txBox="1"/>
-          <p:nvPr/>
-        </p:nvSpPr>
-        <p:spPr>
-          <a:xfrm>
-            <a:off x="548640" y="6446520"/>
-            <a:ext cx="8229600" cy="274320"/>
-          </a:xfrm>
-          <a:prstGeom prst="rect">
-            <a:avLst/>
-          </a:prstGeom>
-          <a:noFill/>
-        </p:spPr>
-        <p:txBody>
-          <a:bodyPr wrap="square" anchor="t" lIns="0" rIns="0" tIns="0" bIns="0"/>
-          <a:lstStyle/>
-          <a:p>
-            <a:pPr algn="l"/>
-            <a:r>
-              <a:rPr sz="1000" b="0" i="0">
-                <a:solidFill>
-                  <a:srgbClr val="54595D"/>
-                </a:solidFill>
-                <a:latin typeface="Calibri"/>
-              </a:rPr>
-              <a:t>Digital Software Development T Level  ·  Hardware and Software</a:t>
-            </a:r>
-          </a:p>
-        </p:txBody>
-      </p:sp>
-      <p:sp>
-        <p:nvSpPr>
-          <p:cNvPr id="5" name="TextBox 4"/>
-          <p:cNvSpPr txBox="1"/>
-          <p:nvPr/>
-        </p:nvSpPr>
-        <p:spPr>
-          <a:xfrm>
-            <a:off x="10728655" y="6446520"/>
-            <a:ext cx="914400" cy="274320"/>
-          </a:xfrm>
-          <a:prstGeom prst="rect">
-            <a:avLst/>
-          </a:prstGeom>
-          <a:noFill/>
-        </p:spPr>
-        <p:txBody>
-          <a:bodyPr wrap="square" anchor="t" lIns="0" rIns="0" tIns="0" bIns="0"/>
-          <a:lstStyle/>
-          <a:p>
-            <a:pPr algn="r"/>
-            <a:r>
-              <a:rPr sz="1000" b="0" i="0">
-                <a:solidFill>
-                  <a:srgbClr val="54595D"/>
-                </a:solidFill>
-                <a:latin typeface="Calibri"/>
-              </a:rPr>
-              <a:t>6</a:t>
-            </a:r>
-          </a:p>
-        </p:txBody>
-      </p:sp>
-      <p:sp>
-        <p:nvSpPr>
-          <p:cNvPr id="6" name="Oval 5"/>
-          <p:cNvSpPr/>
-          <p:nvPr/>
-        </p:nvSpPr>
-        <p:spPr>
-          <a:xfrm>
-            <a:off x="548640" y="1618488"/>
-            <a:ext cx="411480" cy="411480"/>
-          </a:xfrm>
-          <a:prstGeom prst="ellipse">
-            <a:avLst/>
-          </a:prstGeom>
-          <a:solidFill>
-            <a:srgbClr val="F2B705"/>
-          </a:solidFill>
-          <a:ln>
-            <a:noFill/>
-          </a:ln>
-          <a:effectLst/>
-        </p:spPr>
-        <p:style>
-          <a:lnRef idx="1">
-            <a:schemeClr val="accent1"/>
-          </a:lnRef>
-          <a:fillRef idx="3">
-            <a:schemeClr val="accent1"/>
-          </a:fillRef>
-          <a:effectRef idx="2">
-            <a:schemeClr val="accent1"/>
-          </a:effectRef>
-          <a:fontRef idx="minor">
-            <a:schemeClr val="lt1"/>
-          </a:fontRef>
-        </p:style>
-        <p:txBody>
-          <a:bodyPr rtlCol="0" anchor="ctr" lIns="0" rIns="0" tIns="0" bIns="0"/>
-          <a:lstStyle/>
-          <a:p>
-            <a:pPr algn="ctr"/>
-            <a:r>
-              <a:rPr sz="1400" b="1">
-                <a:solidFill>
-                  <a:srgbClr val="202122"/>
-                </a:solidFill>
-                <a:latin typeface="Calibri"/>
-              </a:rPr>
-              <a:t>1</a:t>
-            </a:r>
-          </a:p>
-        </p:txBody>
-      </p:sp>
-      <p:sp>
-        <p:nvSpPr>
-          <p:cNvPr id="7" name="TextBox 6"/>
-          <p:cNvSpPr txBox="1"/>
-          <p:nvPr/>
-        </p:nvSpPr>
-        <p:spPr>
-          <a:xfrm>
-            <a:off x="1234440" y="1600200"/>
-            <a:ext cx="10408615" cy="1030986"/>
-          </a:xfrm>
-          <a:prstGeom prst="rect">
-            <a:avLst/>
-          </a:prstGeom>
-          <a:noFill/>
-        </p:spPr>
-        <p:txBody>
-          <a:bodyPr wrap="square" anchor="t" lIns="0" rIns="0" tIns="0" bIns="0"/>
-          <a:lstStyle/>
-          <a:p>
-            <a:pPr algn="l"/>
-            <a:r>
-              <a:rPr sz="2200" b="0" i="0">
-                <a:solidFill>
-                  <a:srgbClr val="202122"/>
-                </a:solidFill>
-                <a:latin typeface="Calibri"/>
-              </a:rPr>
-              <a:t>Which memory is volatile?</a:t>
-            </a:r>
-          </a:p>
-        </p:txBody>
-      </p:sp>
-      <p:sp>
-        <p:nvSpPr>
-          <p:cNvPr id="8" name="Oval 7"/>
-          <p:cNvSpPr/>
-          <p:nvPr/>
-        </p:nvSpPr>
-        <p:spPr>
-          <a:xfrm>
-            <a:off x="548640" y="2814066"/>
-            <a:ext cx="411480" cy="411480"/>
-          </a:xfrm>
-          <a:prstGeom prst="ellipse">
-            <a:avLst/>
-          </a:prstGeom>
-          <a:solidFill>
-            <a:srgbClr val="F2B705"/>
-          </a:solidFill>
-          <a:ln>
-            <a:noFill/>
-          </a:ln>
-          <a:effectLst/>
-        </p:spPr>
-        <p:style>
-          <a:lnRef idx="1">
-            <a:schemeClr val="accent1"/>
-          </a:lnRef>
-          <a:fillRef idx="3">
-            <a:schemeClr val="accent1"/>
-          </a:fillRef>
-          <a:effectRef idx="2">
-            <a:schemeClr val="accent1"/>
-          </a:effectRef>
-          <a:fontRef idx="minor">
-            <a:schemeClr val="lt1"/>
-          </a:fontRef>
-        </p:style>
-        <p:txBody>
-          <a:bodyPr rtlCol="0" anchor="ctr" lIns="0" rIns="0" tIns="0" bIns="0"/>
-          <a:lstStyle/>
-          <a:p>
-            <a:pPr algn="ctr"/>
-            <a:r>
-              <a:rPr sz="1400" b="1">
-                <a:solidFill>
-                  <a:srgbClr val="202122"/>
-                </a:solidFill>
-                <a:latin typeface="Calibri"/>
-              </a:rPr>
-              <a:t>2</a:t>
-            </a:r>
-          </a:p>
-        </p:txBody>
-      </p:sp>
-      <p:sp>
-        <p:nvSpPr>
-          <p:cNvPr id="9" name="TextBox 8"/>
-          <p:cNvSpPr txBox="1"/>
-          <p:nvPr/>
-        </p:nvSpPr>
-        <p:spPr>
-          <a:xfrm>
-            <a:off x="1234440" y="2795778"/>
-            <a:ext cx="10408615" cy="1030986"/>
-          </a:xfrm>
-          <a:prstGeom prst="rect">
-            <a:avLst/>
-          </a:prstGeom>
-          <a:noFill/>
-        </p:spPr>
-        <p:txBody>
-          <a:bodyPr wrap="square" anchor="t" lIns="0" rIns="0" tIns="0" bIns="0"/>
-          <a:lstStyle/>
-          <a:p>
-            <a:pPr algn="l"/>
-            <a:r>
-              <a:rPr sz="2200" b="0" i="0">
-                <a:solidFill>
-                  <a:srgbClr val="202122"/>
-                </a:solidFill>
-                <a:latin typeface="Calibri"/>
-              </a:rPr>
-              <a:t>Which OS type would control a pacemaker?</a:t>
-            </a:r>
-          </a:p>
-        </p:txBody>
-      </p:sp>
-      <p:sp>
-        <p:nvSpPr>
-          <p:cNvPr id="10" name="Oval 9"/>
-          <p:cNvSpPr/>
-          <p:nvPr/>
-        </p:nvSpPr>
-        <p:spPr>
-          <a:xfrm>
-            <a:off x="548640" y="4009644"/>
-            <a:ext cx="411480" cy="411480"/>
-          </a:xfrm>
-          <a:prstGeom prst="ellipse">
-            <a:avLst/>
-          </a:prstGeom>
-          <a:solidFill>
-            <a:srgbClr val="F2B705"/>
-          </a:solidFill>
-          <a:ln>
-            <a:noFill/>
-          </a:ln>
-          <a:effectLst/>
-        </p:spPr>
-        <p:style>
-          <a:lnRef idx="1">
-            <a:schemeClr val="accent1"/>
-          </a:lnRef>
-          <a:fillRef idx="3">
-            <a:schemeClr val="accent1"/>
-          </a:fillRef>
-          <a:effectRef idx="2">
-            <a:schemeClr val="accent1"/>
-          </a:effectRef>
-          <a:fontRef idx="minor">
-            <a:schemeClr val="lt1"/>
-          </a:fontRef>
-        </p:style>
-        <p:txBody>
-          <a:bodyPr rtlCol="0" anchor="ctr" lIns="0" rIns="0" tIns="0" bIns="0"/>
-          <a:lstStyle/>
-          <a:p>
-            <a:pPr algn="ctr"/>
-            <a:r>
-              <a:rPr sz="1400" b="1">
-                <a:solidFill>
-                  <a:srgbClr val="202122"/>
-                </a:solidFill>
-                <a:latin typeface="Calibri"/>
-              </a:rPr>
-              <a:t>3</a:t>
-            </a:r>
-          </a:p>
-        </p:txBody>
-      </p:sp>
-      <p:sp>
-        <p:nvSpPr>
-          <p:cNvPr id="11" name="TextBox 10"/>
-          <p:cNvSpPr txBox="1"/>
-          <p:nvPr/>
-        </p:nvSpPr>
-        <p:spPr>
-          <a:xfrm>
-            <a:off x="1234440" y="3991356"/>
-            <a:ext cx="10408615" cy="1030986"/>
-          </a:xfrm>
-          <a:prstGeom prst="rect">
-            <a:avLst/>
-          </a:prstGeom>
-          <a:noFill/>
-        </p:spPr>
-        <p:txBody>
-          <a:bodyPr wrap="square" anchor="t" lIns="0" rIns="0" tIns="0" bIns="0"/>
-          <a:lstStyle/>
-          <a:p>
-            <a:pPr algn="l"/>
-            <a:r>
-              <a:rPr sz="2200" b="0" i="0">
-                <a:solidFill>
-                  <a:srgbClr val="202122"/>
-                </a:solidFill>
-                <a:latin typeface="Calibri"/>
-              </a:rPr>
-              <a:t>What is the difference between a compiler and an interpreter?</a:t>
-            </a:r>
-          </a:p>
-        </p:txBody>
-      </p:sp>
-      <p:sp>
-        <p:nvSpPr>
-          <p:cNvPr id="12" name="Oval 11"/>
-          <p:cNvSpPr/>
-          <p:nvPr/>
-        </p:nvSpPr>
-        <p:spPr>
-          <a:xfrm>
-            <a:off x="548640" y="5205221"/>
-            <a:ext cx="411480" cy="411480"/>
-          </a:xfrm>
-          <a:prstGeom prst="ellipse">
-            <a:avLst/>
-          </a:prstGeom>
-          <a:solidFill>
-            <a:srgbClr val="F2B705"/>
-          </a:solidFill>
-          <a:ln>
-            <a:noFill/>
-          </a:ln>
-          <a:effectLst/>
-        </p:spPr>
-        <p:style>
-          <a:lnRef idx="1">
-            <a:schemeClr val="accent1"/>
-          </a:lnRef>
-          <a:fillRef idx="3">
-            <a:schemeClr val="accent1"/>
-          </a:fillRef>
-          <a:effectRef idx="2">
-            <a:schemeClr val="accent1"/>
-          </a:effectRef>
-          <a:fontRef idx="minor">
-            <a:schemeClr val="lt1"/>
-          </a:fontRef>
-        </p:style>
-        <p:txBody>
-          <a:bodyPr rtlCol="0" anchor="ctr" lIns="0" rIns="0" tIns="0" bIns="0"/>
-          <a:lstStyle/>
-          <a:p>
-            <a:pPr algn="ctr"/>
-            <a:r>
-              <a:rPr sz="1400" b="1">
-                <a:solidFill>
-                  <a:srgbClr val="202122"/>
-                </a:solidFill>
-                <a:latin typeface="Calibri"/>
-              </a:rPr>
-              <a:t>4</a:t>
-            </a:r>
-          </a:p>
-        </p:txBody>
-      </p:sp>
-      <p:sp>
-        <p:nvSpPr>
-          <p:cNvPr id="13" name="TextBox 12"/>
-          <p:cNvSpPr txBox="1"/>
-          <p:nvPr/>
-        </p:nvSpPr>
-        <p:spPr>
-          <a:xfrm>
-            <a:off x="1234440" y="5186933"/>
-            <a:ext cx="10408615" cy="1030986"/>
-          </a:xfrm>
-          <a:prstGeom prst="rect">
-            <a:avLst/>
-          </a:prstGeom>
-          <a:noFill/>
-        </p:spPr>
-        <p:txBody>
-          <a:bodyPr wrap="square" anchor="t" lIns="0" rIns="0" tIns="0" bIns="0"/>
-          <a:lstStyle/>
-          <a:p>
-            <a:pPr algn="l"/>
-            <a:r>
-              <a:rPr sz="2200" b="0" i="0">
-                <a:solidFill>
-                  <a:srgbClr val="202122"/>
-                </a:solidFill>
-                <a:latin typeface="Calibri"/>
-              </a:rPr>
-              <a:t>Name two features of an IDE.</a:t>
-            </a:r>
-          </a:p>
-        </p:txBody>
-      </p:sp>
-    </p:spTree>
-  </p:cSld>
-  <p:clrMapOvr>
-    <a:masterClrMapping/>
-  </p:clrMapOvr>
-</p:sld>
-</file>
-
 <file path=ppt/slides/slide7.xml><?xml version="1.0" encoding="utf-8"?>
 <p:sld xmlns:a="http://schemas.openxmlformats.org/drawingml/2006/main" xmlns:p="http://schemas.openxmlformats.org/presentationml/2006/main" xmlns:r="http://schemas.openxmlformats.org/officeDocument/2006/relationships">
   <p:cSld>
@@ -6679,7 +8939,7 @@
                 </a:solidFill>
                 <a:latin typeface="Cambria"/>
               </a:rPr>
-              <a:t>Answers</a:t>
+              <a:t>Code development tools</a:t>
             </a:r>
           </a:p>
         </p:txBody>
@@ -6752,14 +9012,129 @@
       </p:sp>
       <p:sp>
         <p:nvSpPr>
-          <p:cNvPr id="6" name="Oval 5"/>
+          <p:cNvPr id="6" name="TextBox 5"/>
+          <p:cNvSpPr txBox="1"/>
+          <p:nvPr/>
+        </p:nvSpPr>
+        <p:spPr>
+          <a:xfrm>
+            <a:off x="548640" y="1554480"/>
+            <a:ext cx="6720840" cy="4617720"/>
+          </a:xfrm>
+          <a:prstGeom prst="rect">
+            <a:avLst/>
+          </a:prstGeom>
+          <a:noFill/>
+        </p:spPr>
+        <p:txBody>
+          <a:bodyPr wrap="square" lIns="0" rIns="0" tIns="0" bIns="0">
+            <a:spAutoFit/>
+          </a:bodyPr>
+          <a:lstStyle/>
+          <a:p>
+            <a:pPr>
+              <a:spcAft>
+                <a:spcPts val="1320"/>
+              </a:spcAft>
+            </a:pPr>
+            <a:r>
+              <a:rPr sz="2200" b="0">
+                <a:solidFill>
+                  <a:srgbClr val="202122"/>
+                </a:solidFill>
+                <a:latin typeface="Calibri"/>
+              </a:rPr>
+              <a:t>An IDE (integrated development environment) puts everything a developer needs in one place: an editor with syntax highlighting and auto-complete, debugging tools such as breakpoints and variable watches, and often screen design tools.</a:t>
+            </a:r>
+          </a:p>
+          <a:p>
+            <a:pPr>
+              <a:spcAft>
+                <a:spcPts val="1320"/>
+              </a:spcAft>
+            </a:pPr>
+            <a:r>
+              <a:rPr sz="2200" b="0">
+                <a:solidFill>
+                  <a:srgbClr val="202122"/>
+                </a:solidFill>
+                <a:latin typeface="Calibri"/>
+              </a:rPr>
+              <a:t>Code must be translated into machine code. A compiler translates the whole program in advance into an executable file, which then runs fast. An interpreter translates and runs code line by line, which is slower but makes testing and debugging easier.</a:t>
+            </a:r>
+          </a:p>
+          <a:p>
+            <a:pPr>
+              <a:spcAft>
+                <a:spcPts val="1320"/>
+              </a:spcAft>
+            </a:pPr>
+            <a:r>
+              <a:rPr sz="2200" b="0">
+                <a:solidFill>
+                  <a:srgbClr val="202122"/>
+                </a:solidFill>
+                <a:latin typeface="Calibri"/>
+              </a:rPr>
+              <a:t>Python is usually interpreted; C# is compiled.</a:t>
+            </a:r>
+          </a:p>
+        </p:txBody>
+      </p:sp>
+      <p:sp>
+        <p:nvSpPr>
+          <p:cNvPr id="7" name="Rounded Rectangle 6"/>
           <p:cNvSpPr/>
           <p:nvPr/>
         </p:nvSpPr>
         <p:spPr>
           <a:xfrm>
-            <a:off x="548640" y="1618488"/>
-            <a:ext cx="411480" cy="411480"/>
+            <a:off x="7772400" y="1554480"/>
+            <a:ext cx="3867912" cy="4526280"/>
+          </a:xfrm>
+          <a:prstGeom prst="roundRect">
+            <a:avLst>
+              <a:gd name="adj" fmla="val 8000"/>
+            </a:avLst>
+          </a:prstGeom>
+          <a:solidFill>
+            <a:srgbClr val="03306E"/>
+          </a:solidFill>
+          <a:ln>
+            <a:noFill/>
+          </a:ln>
+          <a:effectLst/>
+        </p:spPr>
+        <p:style>
+          <a:lnRef idx="1">
+            <a:schemeClr val="accent1"/>
+          </a:lnRef>
+          <a:fillRef idx="3">
+            <a:schemeClr val="accent1"/>
+          </a:fillRef>
+          <a:effectRef idx="2">
+            <a:schemeClr val="accent1"/>
+          </a:effectRef>
+          <a:fontRef idx="minor">
+            <a:schemeClr val="lt1"/>
+          </a:fontRef>
+        </p:style>
+        <p:txBody>
+          <a:bodyPr rtlCol="0" anchor="ctr"/>
+          <a:lstStyle/>
+          <a:p/>
+        </p:txBody>
+      </p:sp>
+      <p:sp>
+        <p:nvSpPr>
+          <p:cNvPr id="8" name="Oval 7"/>
+          <p:cNvSpPr/>
+          <p:nvPr/>
+        </p:nvSpPr>
+        <p:spPr>
+          <a:xfrm>
+            <a:off x="8046720" y="1828800"/>
+            <a:ext cx="548640" cy="548640"/>
           </a:xfrm>
           <a:prstGeom prst="ellipse">
             <a:avLst/>
@@ -6792,110 +9167,13 @@
           <a:p>
             <a:pPr algn="ctr"/>
             <a:r>
-              <a:rPr sz="1400" b="1">
+              <a:rPr sz="1300" b="1">
                 <a:solidFill>
                   <a:srgbClr val="202122"/>
                 </a:solidFill>
                 <a:latin typeface="Calibri"/>
               </a:rPr>
-              <a:t>1</a:t>
-            </a:r>
-          </a:p>
-        </p:txBody>
-      </p:sp>
-      <p:sp>
-        <p:nvSpPr>
-          <p:cNvPr id="7" name="TextBox 6"/>
-          <p:cNvSpPr txBox="1"/>
-          <p:nvPr/>
-        </p:nvSpPr>
-        <p:spPr>
-          <a:xfrm>
-            <a:off x="1234440" y="1600200"/>
-            <a:ext cx="10408615" cy="1030986"/>
-          </a:xfrm>
-          <a:prstGeom prst="rect">
-            <a:avLst/>
-          </a:prstGeom>
-          <a:noFill/>
-        </p:spPr>
-        <p:txBody>
-          <a:bodyPr wrap="square" anchor="t" lIns="0" rIns="0" tIns="0" bIns="0"/>
-          <a:lstStyle/>
-          <a:p>
-            <a:pPr algn="l"/>
-            <a:r>
-              <a:rPr sz="1800" b="0" i="0">
-                <a:solidFill>
-                  <a:srgbClr val="54595D"/>
-                </a:solidFill>
-                <a:latin typeface="Calibri"/>
-              </a:rPr>
-              <a:t>Which memory is volatile?</a:t>
-            </a:r>
-          </a:p>
-          <a:p>
-            <a:r>
-              <a:rPr sz="1800" b="1">
-                <a:solidFill>
-                  <a:srgbClr val="03306E"/>
-                </a:solidFill>
-                <a:latin typeface="Calibri"/>
-              </a:rPr>
-              <a:t>RAM.</a:t>
-            </a:r>
-          </a:p>
-        </p:txBody>
-      </p:sp>
-      <p:sp>
-        <p:nvSpPr>
-          <p:cNvPr id="8" name="Oval 7"/>
-          <p:cNvSpPr/>
-          <p:nvPr/>
-        </p:nvSpPr>
-        <p:spPr>
-          <a:xfrm>
-            <a:off x="548640" y="2814066"/>
-            <a:ext cx="411480" cy="411480"/>
-          </a:xfrm>
-          <a:prstGeom prst="ellipse">
-            <a:avLst/>
-          </a:prstGeom>
-          <a:solidFill>
-            <a:srgbClr val="F2B705"/>
-          </a:solidFill>
-          <a:ln>
-            <a:noFill/>
-          </a:ln>
-          <a:effectLst/>
-        </p:spPr>
-        <p:style>
-          <a:lnRef idx="1">
-            <a:schemeClr val="accent1"/>
-          </a:lnRef>
-          <a:fillRef idx="3">
-            <a:schemeClr val="accent1"/>
-          </a:fillRef>
-          <a:effectRef idx="2">
-            <a:schemeClr val="accent1"/>
-          </a:effectRef>
-          <a:fontRef idx="minor">
-            <a:schemeClr val="lt1"/>
-          </a:fontRef>
-        </p:style>
-        <p:txBody>
-          <a:bodyPr rtlCol="0" anchor="ctr" lIns="0" rIns="0" tIns="0" bIns="0"/>
-          <a:lstStyle/>
-          <a:p>
-            <a:pPr algn="ctr"/>
-            <a:r>
-              <a:rPr sz="1400" b="1">
-                <a:solidFill>
-                  <a:srgbClr val="202122"/>
-                </a:solidFill>
-                <a:latin typeface="Calibri"/>
-              </a:rPr>
-              <a:t>2</a:t>
+              <a:t>e.g.</a:t>
             </a:r>
           </a:p>
         </p:txBody>
@@ -6908,8 +9186,8 @@
         </p:nvSpPr>
         <p:spPr>
           <a:xfrm>
-            <a:off x="1234440" y="2795778"/>
-            <a:ext cx="10408615" cy="1030986"/>
+            <a:off x="8046720" y="2560320"/>
+            <a:ext cx="3291840" cy="365760"/>
           </a:xfrm>
           <a:prstGeom prst="rect">
             <a:avLst/>
@@ -6922,91 +9200,27 @@
           <a:p>
             <a:pPr algn="l"/>
             <a:r>
-              <a:rPr sz="1800" b="0" i="0">
-                <a:solidFill>
-                  <a:srgbClr val="54595D"/>
-                </a:solidFill>
-                <a:latin typeface="Calibri"/>
-              </a:rPr>
-              <a:t>Which OS type would control a pacemaker?</a:t>
-            </a:r>
-          </a:p>
-          <a:p>
-            <a:r>
-              <a:rPr sz="1800" b="1">
-                <a:solidFill>
-                  <a:srgbClr val="03306E"/>
-                </a:solidFill>
-                <a:latin typeface="Calibri"/>
-              </a:rPr>
-              <a:t>Real-time.</a:t>
-            </a:r>
-          </a:p>
-        </p:txBody>
-      </p:sp>
-      <p:sp>
-        <p:nvSpPr>
-          <p:cNvPr id="10" name="Oval 9"/>
-          <p:cNvSpPr/>
-          <p:nvPr/>
-        </p:nvSpPr>
-        <p:spPr>
-          <a:xfrm>
-            <a:off x="548640" y="4009644"/>
-            <a:ext cx="411480" cy="411480"/>
-          </a:xfrm>
-          <a:prstGeom prst="ellipse">
-            <a:avLst/>
-          </a:prstGeom>
-          <a:solidFill>
-            <a:srgbClr val="F2B705"/>
-          </a:solidFill>
-          <a:ln>
-            <a:noFill/>
-          </a:ln>
-          <a:effectLst/>
-        </p:spPr>
-        <p:style>
-          <a:lnRef idx="1">
-            <a:schemeClr val="accent1"/>
-          </a:lnRef>
-          <a:fillRef idx="3">
-            <a:schemeClr val="accent1"/>
-          </a:fillRef>
-          <a:effectRef idx="2">
-            <a:schemeClr val="accent1"/>
-          </a:effectRef>
-          <a:fontRef idx="minor">
-            <a:schemeClr val="lt1"/>
-          </a:fontRef>
-        </p:style>
-        <p:txBody>
-          <a:bodyPr rtlCol="0" anchor="ctr" lIns="0" rIns="0" tIns="0" bIns="0"/>
-          <a:lstStyle/>
-          <a:p>
-            <a:pPr algn="ctr"/>
-            <a:r>
-              <a:rPr sz="1400" b="1">
-                <a:solidFill>
-                  <a:srgbClr val="202122"/>
-                </a:solidFill>
-                <a:latin typeface="Calibri"/>
-              </a:rPr>
-              <a:t>3</a:t>
-            </a:r>
-          </a:p>
-        </p:txBody>
-      </p:sp>
-      <p:sp>
-        <p:nvSpPr>
-          <p:cNvPr id="11" name="TextBox 10"/>
+              <a:rPr sz="1300" b="1" i="0">
+                <a:solidFill>
+                  <a:srgbClr val="A9C8F0"/>
+                </a:solidFill>
+                <a:latin typeface="Calibri"/>
+              </a:rPr>
+              <a:t>EXAMPLE</a:t>
+            </a:r>
+          </a:p>
+        </p:txBody>
+      </p:sp>
+      <p:sp>
+        <p:nvSpPr>
+          <p:cNvPr id="10" name="TextBox 9"/>
           <p:cNvSpPr txBox="1"/>
           <p:nvPr/>
         </p:nvSpPr>
         <p:spPr>
           <a:xfrm>
-            <a:off x="1234440" y="3991356"/>
-            <a:ext cx="10408615" cy="1030986"/>
+            <a:off x="8046720" y="2971800"/>
+            <a:ext cx="3291840" cy="2971800"/>
           </a:xfrm>
           <a:prstGeom prst="rect">
             <a:avLst/>
@@ -7019,121 +9233,13 @@
           <a:p>
             <a:pPr algn="l"/>
             <a:r>
-              <a:rPr sz="1800" b="0" i="0">
-                <a:solidFill>
-                  <a:srgbClr val="54595D"/>
-                </a:solidFill>
-                <a:latin typeface="Calibri"/>
-              </a:rPr>
-              <a:t>What is the difference between a compiler and an interpreter?</a:t>
-            </a:r>
-          </a:p>
-          <a:p>
-            <a:r>
-              <a:rPr sz="1800" b="1">
-                <a:solidFill>
-                  <a:srgbClr val="03306E"/>
-                </a:solidFill>
-                <a:latin typeface="Calibri"/>
-              </a:rPr>
-              <a:t>A compiler translates the whole program first; an interpreter translates and runs line by line.</a:t>
-            </a:r>
-          </a:p>
-        </p:txBody>
-      </p:sp>
-      <p:sp>
-        <p:nvSpPr>
-          <p:cNvPr id="12" name="Oval 11"/>
-          <p:cNvSpPr/>
-          <p:nvPr/>
-        </p:nvSpPr>
-        <p:spPr>
-          <a:xfrm>
-            <a:off x="548640" y="5205221"/>
-            <a:ext cx="411480" cy="411480"/>
-          </a:xfrm>
-          <a:prstGeom prst="ellipse">
-            <a:avLst/>
-          </a:prstGeom>
-          <a:solidFill>
-            <a:srgbClr val="F2B705"/>
-          </a:solidFill>
-          <a:ln>
-            <a:noFill/>
-          </a:ln>
-          <a:effectLst/>
-        </p:spPr>
-        <p:style>
-          <a:lnRef idx="1">
-            <a:schemeClr val="accent1"/>
-          </a:lnRef>
-          <a:fillRef idx="3">
-            <a:schemeClr val="accent1"/>
-          </a:fillRef>
-          <a:effectRef idx="2">
-            <a:schemeClr val="accent1"/>
-          </a:effectRef>
-          <a:fontRef idx="minor">
-            <a:schemeClr val="lt1"/>
-          </a:fontRef>
-        </p:style>
-        <p:txBody>
-          <a:bodyPr rtlCol="0" anchor="ctr" lIns="0" rIns="0" tIns="0" bIns="0"/>
-          <a:lstStyle/>
-          <a:p>
-            <a:pPr algn="ctr"/>
-            <a:r>
-              <a:rPr sz="1400" b="1">
-                <a:solidFill>
-                  <a:srgbClr val="202122"/>
-                </a:solidFill>
-                <a:latin typeface="Calibri"/>
-              </a:rPr>
-              <a:t>4</a:t>
-            </a:r>
-          </a:p>
-        </p:txBody>
-      </p:sp>
-      <p:sp>
-        <p:nvSpPr>
-          <p:cNvPr id="13" name="TextBox 12"/>
-          <p:cNvSpPr txBox="1"/>
-          <p:nvPr/>
-        </p:nvSpPr>
-        <p:spPr>
-          <a:xfrm>
-            <a:off x="1234440" y="5186933"/>
-            <a:ext cx="10408615" cy="1030986"/>
-          </a:xfrm>
-          <a:prstGeom prst="rect">
-            <a:avLst/>
-          </a:prstGeom>
-          <a:noFill/>
-        </p:spPr>
-        <p:txBody>
-          <a:bodyPr wrap="square" anchor="t" lIns="0" rIns="0" tIns="0" bIns="0"/>
-          <a:lstStyle/>
-          <a:p>
-            <a:pPr algn="l"/>
-            <a:r>
-              <a:rPr sz="1800" b="0" i="0">
-                <a:solidFill>
-                  <a:srgbClr val="54595D"/>
-                </a:solidFill>
-                <a:latin typeface="Calibri"/>
-              </a:rPr>
-              <a:t>Name two features of an IDE.</a:t>
-            </a:r>
-          </a:p>
-          <a:p>
-            <a:r>
-              <a:rPr sz="1800" b="1">
-                <a:solidFill>
-                  <a:srgbClr val="03306E"/>
-                </a:solidFill>
-                <a:latin typeface="Calibri"/>
-              </a:rPr>
-              <a:t>Any two of: editor, debugger, screen design, syntax highlighting.</a:t>
+              <a:rPr sz="1900" b="0" i="0">
+                <a:solidFill>
+                  <a:srgbClr val="FFFFFF"/>
+                </a:solidFill>
+                <a:latin typeface="Cambria"/>
+              </a:rPr>
+              <a:t>Setting a breakpoint in an IDE pauses the program on a chosen line, so you can inspect every variable and step through the code.</a:t>
             </a:r>
           </a:p>
         </p:txBody>
@@ -7225,7 +9331,7 @@
                 </a:solidFill>
                 <a:latin typeface="Cambria"/>
               </a:rPr>
-              <a:t>Activity: Choose a development setup</a:t>
+              <a:t>Code development tools</a:t>
             </a:r>
           </a:p>
         </p:txBody>
@@ -7304,16 +9410,16 @@
         </p:nvSpPr>
         <p:spPr>
           <a:xfrm>
-            <a:off x="548640" y="1508760"/>
-            <a:ext cx="2011680" cy="457200"/>
+            <a:off x="548640" y="1600200"/>
+            <a:ext cx="5364327" cy="640080"/>
           </a:xfrm>
           <a:prstGeom prst="roundRect">
             <a:avLst>
-              <a:gd name="adj" fmla="val 50000"/>
+              <a:gd name="adj" fmla="val 15000"/>
             </a:avLst>
           </a:prstGeom>
           <a:solidFill>
-            <a:srgbClr val="F2B705"/>
+            <a:srgbClr val="03306E"/>
           </a:solidFill>
           <a:ln>
             <a:noFill/>
@@ -7348,8 +9454,8 @@
         </p:nvSpPr>
         <p:spPr>
           <a:xfrm>
-            <a:off x="548640" y="1508760"/>
-            <a:ext cx="2011680" cy="457200"/>
+            <a:off x="777240" y="1600200"/>
+            <a:ext cx="4907127" cy="640080"/>
           </a:xfrm>
           <a:prstGeom prst="rect">
             <a:avLst/>
@@ -7360,65 +9466,185 @@
           <a:bodyPr wrap="square" anchor="ctr" lIns="0" rIns="0" tIns="0" bIns="0"/>
           <a:lstStyle/>
           <a:p>
-            <a:pPr algn="ctr"/>
-            <a:r>
-              <a:rPr sz="1400" b="1" i="0">
+            <a:pPr algn="l"/>
+            <a:r>
+              <a:rPr sz="2000" b="1" i="0">
+                <a:solidFill>
+                  <a:srgbClr val="FFFFFF"/>
+                </a:solidFill>
+                <a:latin typeface="Calibri"/>
+              </a:rPr>
+              <a:t>IDE</a:t>
+            </a:r>
+          </a:p>
+        </p:txBody>
+      </p:sp>
+      <p:sp>
+        <p:nvSpPr>
+          <p:cNvPr id="8" name="Rounded Rectangle 7"/>
+          <p:cNvSpPr/>
+          <p:nvPr/>
+        </p:nvSpPr>
+        <p:spPr>
+          <a:xfrm>
+            <a:off x="548640" y="2377440"/>
+            <a:ext cx="5364327" cy="3794760"/>
+          </a:xfrm>
+          <a:prstGeom prst="roundRect">
+            <a:avLst>
+              <a:gd name="adj" fmla="val 4000"/>
+            </a:avLst>
+          </a:prstGeom>
+          <a:solidFill>
+            <a:srgbClr val="EAF3FF"/>
+          </a:solidFill>
+          <a:ln>
+            <a:noFill/>
+          </a:ln>
+          <a:effectLst/>
+        </p:spPr>
+        <p:style>
+          <a:lnRef idx="1">
+            <a:schemeClr val="accent1"/>
+          </a:lnRef>
+          <a:fillRef idx="3">
+            <a:schemeClr val="accent1"/>
+          </a:fillRef>
+          <a:effectRef idx="2">
+            <a:schemeClr val="accent1"/>
+          </a:effectRef>
+          <a:fontRef idx="minor">
+            <a:schemeClr val="lt1"/>
+          </a:fontRef>
+        </p:style>
+        <p:txBody>
+          <a:bodyPr rtlCol="0" anchor="ctr"/>
+          <a:lstStyle/>
+          <a:p/>
+        </p:txBody>
+      </p:sp>
+      <p:sp>
+        <p:nvSpPr>
+          <p:cNvPr id="9" name="TextBox 8"/>
+          <p:cNvSpPr txBox="1"/>
+          <p:nvPr/>
+        </p:nvSpPr>
+        <p:spPr>
+          <a:xfrm>
+            <a:off x="822959" y="2606040"/>
+            <a:ext cx="4815687" cy="3337560"/>
+          </a:xfrm>
+          <a:prstGeom prst="rect">
+            <a:avLst/>
+          </a:prstGeom>
+          <a:noFill/>
+        </p:spPr>
+        <p:txBody>
+          <a:bodyPr wrap="square" lIns="0" rIns="0" tIns="0" bIns="0">
+            <a:spAutoFit/>
+          </a:bodyPr>
+          <a:lstStyle/>
+          <a:p>
+            <a:pPr marL="274320" indent="-274320">
+              <a:spcAft>
+                <a:spcPts val="990"/>
+              </a:spcAft>
+              <a:buClr>
+                <a:srgbClr val="0645AD"/>
+              </a:buClr>
+              <a:buFont typeface="Arial"/>
+              <a:buChar char="•"/>
+            </a:pPr>
+            <a:r>
+              <a:rPr sz="2200" b="0">
                 <a:solidFill>
                   <a:srgbClr val="202122"/>
                 </a:solidFill>
                 <a:latin typeface="Calibri"/>
               </a:rPr>
-              <a:t>20 minutes</a:t>
-            </a:r>
-          </a:p>
-        </p:txBody>
-      </p:sp>
-      <p:sp>
-        <p:nvSpPr>
-          <p:cNvPr id="8" name="TextBox 7"/>
-          <p:cNvSpPr txBox="1"/>
-          <p:nvPr/>
-        </p:nvSpPr>
-        <p:spPr>
-          <a:xfrm>
-            <a:off x="2743200" y="1508760"/>
-            <a:ext cx="4754880" cy="457200"/>
-          </a:xfrm>
-          <a:prstGeom prst="rect">
-            <a:avLst/>
-          </a:prstGeom>
-          <a:noFill/>
-        </p:spPr>
-        <p:txBody>
-          <a:bodyPr wrap="square" anchor="ctr" lIns="0" rIns="0" tIns="0" bIns="0"/>
-          <a:lstStyle/>
-          <a:p>
-            <a:pPr algn="l"/>
-            <a:r>
-              <a:rPr sz="1400" b="0" i="1">
-                <a:solidFill>
-                  <a:srgbClr val="54595D"/>
-                </a:solidFill>
-                <a:latin typeface="Calibri"/>
-              </a:rPr>
-              <a:t>Pairs</a:t>
-            </a:r>
-          </a:p>
-        </p:txBody>
-      </p:sp>
-      <p:sp>
-        <p:nvSpPr>
-          <p:cNvPr id="9" name="Oval 8"/>
+              <a:t>Editor with syntax highlighting</a:t>
+            </a:r>
+          </a:p>
+          <a:p>
+            <a:pPr marL="274320" indent="-274320">
+              <a:spcAft>
+                <a:spcPts val="990"/>
+              </a:spcAft>
+              <a:buClr>
+                <a:srgbClr val="0645AD"/>
+              </a:buClr>
+              <a:buFont typeface="Arial"/>
+              <a:buChar char="•"/>
+            </a:pPr>
+            <a:r>
+              <a:rPr sz="2200" b="0">
+                <a:solidFill>
+                  <a:srgbClr val="202122"/>
+                </a:solidFill>
+                <a:latin typeface="Calibri"/>
+              </a:rPr>
+              <a:t>Debugging tools such as breakpoints</a:t>
+            </a:r>
+          </a:p>
+          <a:p>
+            <a:pPr marL="274320" indent="-274320">
+              <a:spcAft>
+                <a:spcPts val="990"/>
+              </a:spcAft>
+              <a:buClr>
+                <a:srgbClr val="0645AD"/>
+              </a:buClr>
+              <a:buFont typeface="Arial"/>
+              <a:buChar char="•"/>
+            </a:pPr>
+            <a:r>
+              <a:rPr sz="2200" b="0">
+                <a:solidFill>
+                  <a:srgbClr val="202122"/>
+                </a:solidFill>
+                <a:latin typeface="Calibri"/>
+              </a:rPr>
+              <a:t>Screen design tools</a:t>
+            </a:r>
+          </a:p>
+          <a:p>
+            <a:pPr marL="274320" indent="-274320">
+              <a:spcAft>
+                <a:spcPts val="990"/>
+              </a:spcAft>
+              <a:buClr>
+                <a:srgbClr val="0645AD"/>
+              </a:buClr>
+              <a:buFont typeface="Arial"/>
+              <a:buChar char="•"/>
+            </a:pPr>
+            <a:r>
+              <a:rPr sz="2200" b="0">
+                <a:solidFill>
+                  <a:srgbClr val="202122"/>
+                </a:solidFill>
+                <a:latin typeface="Calibri"/>
+              </a:rPr>
+              <a:t>Everything in one place</a:t>
+            </a:r>
+          </a:p>
+        </p:txBody>
+      </p:sp>
+      <p:sp>
+        <p:nvSpPr>
+          <p:cNvPr id="10" name="Rounded Rectangle 9"/>
           <p:cNvSpPr/>
           <p:nvPr/>
         </p:nvSpPr>
         <p:spPr>
           <a:xfrm>
-            <a:off x="548640" y="2482596"/>
-            <a:ext cx="384048" cy="384048"/>
-          </a:xfrm>
-          <a:prstGeom prst="ellipse">
-            <a:avLst/>
+            <a:off x="6278727" y="1600200"/>
+            <a:ext cx="5364327" cy="640080"/>
+          </a:xfrm>
+          <a:prstGeom prst="roundRect">
+            <a:avLst>
+              <a:gd name="adj" fmla="val 15000"/>
+            </a:avLst>
           </a:prstGeom>
           <a:solidFill>
             <a:srgbClr val="0645AD"/>
@@ -7443,327 +9669,58 @@
           </a:fontRef>
         </p:style>
         <p:txBody>
-          <a:bodyPr rtlCol="0" anchor="ctr" lIns="0" rIns="0" tIns="0" bIns="0"/>
-          <a:lstStyle/>
-          <a:p>
-            <a:pPr algn="ctr"/>
-            <a:r>
-              <a:rPr sz="1300" b="1">
+          <a:bodyPr rtlCol="0" anchor="ctr"/>
+          <a:lstStyle/>
+          <a:p/>
+        </p:txBody>
+      </p:sp>
+      <p:sp>
+        <p:nvSpPr>
+          <p:cNvPr id="11" name="TextBox 10"/>
+          <p:cNvSpPr txBox="1"/>
+          <p:nvPr/>
+        </p:nvSpPr>
+        <p:spPr>
+          <a:xfrm>
+            <a:off x="6507327" y="1600200"/>
+            <a:ext cx="4907127" cy="640080"/>
+          </a:xfrm>
+          <a:prstGeom prst="rect">
+            <a:avLst/>
+          </a:prstGeom>
+          <a:noFill/>
+        </p:spPr>
+        <p:txBody>
+          <a:bodyPr wrap="square" anchor="ctr" lIns="0" rIns="0" tIns="0" bIns="0"/>
+          <a:lstStyle/>
+          <a:p>
+            <a:pPr algn="l"/>
+            <a:r>
+              <a:rPr sz="2000" b="1" i="0">
                 <a:solidFill>
                   <a:srgbClr val="FFFFFF"/>
                 </a:solidFill>
                 <a:latin typeface="Calibri"/>
               </a:rPr>
-              <a:t>1</a:t>
-            </a:r>
-          </a:p>
-        </p:txBody>
-      </p:sp>
-      <p:sp>
-        <p:nvSpPr>
-          <p:cNvPr id="10" name="TextBox 9"/>
-          <p:cNvSpPr txBox="1"/>
-          <p:nvPr/>
-        </p:nvSpPr>
-        <p:spPr>
-          <a:xfrm>
-            <a:off x="1143000" y="2240280"/>
-            <a:ext cx="5943600" cy="868680"/>
-          </a:xfrm>
-          <a:prstGeom prst="rect">
-            <a:avLst/>
-          </a:prstGeom>
-          <a:noFill/>
-        </p:spPr>
-        <p:txBody>
-          <a:bodyPr wrap="square" anchor="ctr" lIns="0" rIns="0" tIns="0" bIns="0"/>
-          <a:lstStyle/>
-          <a:p>
-            <a:pPr algn="l"/>
-            <a:r>
-              <a:rPr sz="1700" b="0" i="0">
-                <a:solidFill>
-                  <a:srgbClr val="202122"/>
-                </a:solidFill>
-                <a:latin typeface="Calibri"/>
-              </a:rPr>
-              <a:t>Three projects: a mobile game, a data analysis script, and a system for a factory robot.</a:t>
-            </a:r>
-          </a:p>
-        </p:txBody>
-      </p:sp>
-      <p:sp>
-        <p:nvSpPr>
-          <p:cNvPr id="11" name="Oval 10"/>
+              <a:t>Translators</a:t>
+            </a:r>
+          </a:p>
+        </p:txBody>
+      </p:sp>
+      <p:sp>
+        <p:nvSpPr>
+          <p:cNvPr id="12" name="Rounded Rectangle 11"/>
           <p:cNvSpPr/>
           <p:nvPr/>
         </p:nvSpPr>
         <p:spPr>
           <a:xfrm>
-            <a:off x="548640" y="3461004"/>
-            <a:ext cx="384048" cy="384048"/>
-          </a:xfrm>
-          <a:prstGeom prst="ellipse">
-            <a:avLst/>
-          </a:prstGeom>
-          <a:solidFill>
-            <a:srgbClr val="0645AD"/>
-          </a:solidFill>
-          <a:ln>
-            <a:noFill/>
-          </a:ln>
-          <a:effectLst/>
-        </p:spPr>
-        <p:style>
-          <a:lnRef idx="1">
-            <a:schemeClr val="accent1"/>
-          </a:lnRef>
-          <a:fillRef idx="3">
-            <a:schemeClr val="accent1"/>
-          </a:fillRef>
-          <a:effectRef idx="2">
-            <a:schemeClr val="accent1"/>
-          </a:effectRef>
-          <a:fontRef idx="minor">
-            <a:schemeClr val="lt1"/>
-          </a:fontRef>
-        </p:style>
-        <p:txBody>
-          <a:bodyPr rtlCol="0" anchor="ctr" lIns="0" rIns="0" tIns="0" bIns="0"/>
-          <a:lstStyle/>
-          <a:p>
-            <a:pPr algn="ctr"/>
-            <a:r>
-              <a:rPr sz="1300" b="1">
-                <a:solidFill>
-                  <a:srgbClr val="FFFFFF"/>
-                </a:solidFill>
-                <a:latin typeface="Calibri"/>
-              </a:rPr>
-              <a:t>2</a:t>
-            </a:r>
-          </a:p>
-        </p:txBody>
-      </p:sp>
-      <p:sp>
-        <p:nvSpPr>
-          <p:cNvPr id="12" name="TextBox 11"/>
-          <p:cNvSpPr txBox="1"/>
-          <p:nvPr/>
-        </p:nvSpPr>
-        <p:spPr>
-          <a:xfrm>
-            <a:off x="1143000" y="3218688"/>
-            <a:ext cx="5943600" cy="868680"/>
-          </a:xfrm>
-          <a:prstGeom prst="rect">
-            <a:avLst/>
-          </a:prstGeom>
-          <a:noFill/>
-        </p:spPr>
-        <p:txBody>
-          <a:bodyPr wrap="square" anchor="ctr" lIns="0" rIns="0" tIns="0" bIns="0"/>
-          <a:lstStyle/>
-          <a:p>
-            <a:pPr algn="l"/>
-            <a:r>
-              <a:rPr sz="1700" b="0" i="0">
-                <a:solidFill>
-                  <a:srgbClr val="202122"/>
-                </a:solidFill>
-                <a:latin typeface="Calibri"/>
-              </a:rPr>
-              <a:t>Choose hardware, an OS type and a language approach for each.</a:t>
-            </a:r>
-          </a:p>
-        </p:txBody>
-      </p:sp>
-      <p:sp>
-        <p:nvSpPr>
-          <p:cNvPr id="13" name="Oval 12"/>
-          <p:cNvSpPr/>
-          <p:nvPr/>
-        </p:nvSpPr>
-        <p:spPr>
-          <a:xfrm>
-            <a:off x="548640" y="4439412"/>
-            <a:ext cx="384048" cy="384048"/>
-          </a:xfrm>
-          <a:prstGeom prst="ellipse">
-            <a:avLst/>
-          </a:prstGeom>
-          <a:solidFill>
-            <a:srgbClr val="0645AD"/>
-          </a:solidFill>
-          <a:ln>
-            <a:noFill/>
-          </a:ln>
-          <a:effectLst/>
-        </p:spPr>
-        <p:style>
-          <a:lnRef idx="1">
-            <a:schemeClr val="accent1"/>
-          </a:lnRef>
-          <a:fillRef idx="3">
-            <a:schemeClr val="accent1"/>
-          </a:fillRef>
-          <a:effectRef idx="2">
-            <a:schemeClr val="accent1"/>
-          </a:effectRef>
-          <a:fontRef idx="minor">
-            <a:schemeClr val="lt1"/>
-          </a:fontRef>
-        </p:style>
-        <p:txBody>
-          <a:bodyPr rtlCol="0" anchor="ctr" lIns="0" rIns="0" tIns="0" bIns="0"/>
-          <a:lstStyle/>
-          <a:p>
-            <a:pPr algn="ctr"/>
-            <a:r>
-              <a:rPr sz="1300" b="1">
-                <a:solidFill>
-                  <a:srgbClr val="FFFFFF"/>
-                </a:solidFill>
-                <a:latin typeface="Calibri"/>
-              </a:rPr>
-              <a:t>3</a:t>
-            </a:r>
-          </a:p>
-        </p:txBody>
-      </p:sp>
-      <p:sp>
-        <p:nvSpPr>
-          <p:cNvPr id="14" name="TextBox 13"/>
-          <p:cNvSpPr txBox="1"/>
-          <p:nvPr/>
-        </p:nvSpPr>
-        <p:spPr>
-          <a:xfrm>
-            <a:off x="1143000" y="4197096"/>
-            <a:ext cx="5943600" cy="868680"/>
-          </a:xfrm>
-          <a:prstGeom prst="rect">
-            <a:avLst/>
-          </a:prstGeom>
-          <a:noFill/>
-        </p:spPr>
-        <p:txBody>
-          <a:bodyPr wrap="square" anchor="ctr" lIns="0" rIns="0" tIns="0" bIns="0"/>
-          <a:lstStyle/>
-          <a:p>
-            <a:pPr algn="l"/>
-            <a:r>
-              <a:rPr sz="1700" b="0" i="0">
-                <a:solidFill>
-                  <a:srgbClr val="202122"/>
-                </a:solidFill>
-                <a:latin typeface="Calibri"/>
-              </a:rPr>
-              <a:t>Choose development tools.</a:t>
-            </a:r>
-          </a:p>
-        </p:txBody>
-      </p:sp>
-      <p:sp>
-        <p:nvSpPr>
-          <p:cNvPr id="15" name="Oval 14"/>
-          <p:cNvSpPr/>
-          <p:nvPr/>
-        </p:nvSpPr>
-        <p:spPr>
-          <a:xfrm>
-            <a:off x="548640" y="5417820"/>
-            <a:ext cx="384048" cy="384048"/>
-          </a:xfrm>
-          <a:prstGeom prst="ellipse">
-            <a:avLst/>
-          </a:prstGeom>
-          <a:solidFill>
-            <a:srgbClr val="0645AD"/>
-          </a:solidFill>
-          <a:ln>
-            <a:noFill/>
-          </a:ln>
-          <a:effectLst/>
-        </p:spPr>
-        <p:style>
-          <a:lnRef idx="1">
-            <a:schemeClr val="accent1"/>
-          </a:lnRef>
-          <a:fillRef idx="3">
-            <a:schemeClr val="accent1"/>
-          </a:fillRef>
-          <a:effectRef idx="2">
-            <a:schemeClr val="accent1"/>
-          </a:effectRef>
-          <a:fontRef idx="minor">
-            <a:schemeClr val="lt1"/>
-          </a:fontRef>
-        </p:style>
-        <p:txBody>
-          <a:bodyPr rtlCol="0" anchor="ctr" lIns="0" rIns="0" tIns="0" bIns="0"/>
-          <a:lstStyle/>
-          <a:p>
-            <a:pPr algn="ctr"/>
-            <a:r>
-              <a:rPr sz="1300" b="1">
-                <a:solidFill>
-                  <a:srgbClr val="FFFFFF"/>
-                </a:solidFill>
-                <a:latin typeface="Calibri"/>
-              </a:rPr>
-              <a:t>4</a:t>
-            </a:r>
-          </a:p>
-        </p:txBody>
-      </p:sp>
-      <p:sp>
-        <p:nvSpPr>
-          <p:cNvPr id="16" name="TextBox 15"/>
-          <p:cNvSpPr txBox="1"/>
-          <p:nvPr/>
-        </p:nvSpPr>
-        <p:spPr>
-          <a:xfrm>
-            <a:off x="1143000" y="5175504"/>
-            <a:ext cx="5943600" cy="868680"/>
-          </a:xfrm>
-          <a:prstGeom prst="rect">
-            <a:avLst/>
-          </a:prstGeom>
-          <a:noFill/>
-        </p:spPr>
-        <p:txBody>
-          <a:bodyPr wrap="square" anchor="ctr" lIns="0" rIns="0" tIns="0" bIns="0"/>
-          <a:lstStyle/>
-          <a:p>
-            <a:pPr algn="l"/>
-            <a:r>
-              <a:rPr sz="1700" b="0" i="0">
-                <a:solidFill>
-                  <a:srgbClr val="202122"/>
-                </a:solidFill>
-                <a:latin typeface="Calibri"/>
-              </a:rPr>
-              <a:t>Justify each choice.</a:t>
-            </a:r>
-          </a:p>
-        </p:txBody>
-      </p:sp>
-      <p:sp>
-        <p:nvSpPr>
-          <p:cNvPr id="17" name="Rounded Rectangle 16"/>
-          <p:cNvSpPr/>
-          <p:nvPr/>
-        </p:nvSpPr>
-        <p:spPr>
-          <a:xfrm>
-            <a:off x="7772400" y="1508760"/>
-            <a:ext cx="3867912" cy="4572000"/>
+            <a:off x="6278727" y="2377440"/>
+            <a:ext cx="5364327" cy="3794760"/>
           </a:xfrm>
           <a:prstGeom prst="roundRect">
             <a:avLst>
-              <a:gd name="adj" fmla="val 8000"/>
+              <a:gd name="adj" fmla="val 4000"/>
             </a:avLst>
           </a:prstGeom>
           <a:solidFill>
@@ -7796,47 +9753,14 @@
       </p:sp>
       <p:sp>
         <p:nvSpPr>
-          <p:cNvPr id="18" name="TextBox 17"/>
+          <p:cNvPr id="13" name="TextBox 12"/>
           <p:cNvSpPr txBox="1"/>
           <p:nvPr/>
         </p:nvSpPr>
         <p:spPr>
           <a:xfrm>
-            <a:off x="8046720" y="1737360"/>
-            <a:ext cx="3291840" cy="365760"/>
-          </a:xfrm>
-          <a:prstGeom prst="rect">
-            <a:avLst/>
-          </a:prstGeom>
-          <a:noFill/>
-        </p:spPr>
-        <p:txBody>
-          <a:bodyPr wrap="square" anchor="t" lIns="0" rIns="0" tIns="0" bIns="0"/>
-          <a:lstStyle/>
-          <a:p>
-            <a:pPr algn="l"/>
-            <a:r>
-              <a:rPr sz="1300" b="1" i="0">
-                <a:solidFill>
-                  <a:srgbClr val="0645AD"/>
-                </a:solidFill>
-                <a:latin typeface="Calibri"/>
-              </a:rPr>
-              <a:t>SUCCESS CRITERIA</a:t>
-            </a:r>
-          </a:p>
-        </p:txBody>
-      </p:sp>
-      <p:sp>
-        <p:nvSpPr>
-          <p:cNvPr id="19" name="TextBox 18"/>
-          <p:cNvSpPr txBox="1"/>
-          <p:nvPr/>
-        </p:nvSpPr>
-        <p:spPr>
-          <a:xfrm>
-            <a:off x="8046720" y="2240280"/>
-            <a:ext cx="3337560" cy="3657600"/>
+            <a:off x="6553047" y="2606040"/>
+            <a:ext cx="4815687" cy="3337560"/>
           </a:xfrm>
           <a:prstGeom prst="rect">
             <a:avLst/>
@@ -7851,7 +9775,7 @@
           <a:p>
             <a:pPr marL="274320" indent="-274320">
               <a:spcAft>
-                <a:spcPts val="810"/>
+                <a:spcPts val="990"/>
               </a:spcAft>
               <a:buClr>
                 <a:srgbClr val="0645AD"/>
@@ -7860,19 +9784,28 @@
               <a:buChar char="•"/>
             </a:pPr>
             <a:r>
-              <a:rPr sz="1800" b="0">
+              <a:rPr sz="2200" b="1">
                 <a:solidFill>
                   <a:srgbClr val="202122"/>
                 </a:solidFill>
                 <a:latin typeface="Calibri"/>
               </a:rPr>
-              <a:t>OS type matches the use</a:t>
+              <a:t>Compiler:</a:t>
+            </a:r>
+            <a:r>
+              <a:rPr sz="2200" b="0">
+                <a:solidFill>
+                  <a:srgbClr val="202122"/>
+                </a:solidFill>
+                <a:latin typeface="Calibri"/>
+              </a:rPr>
+              <a:t> translates the whole program before it runs; fast to run</a:t>
             </a:r>
           </a:p>
           <a:p>
             <a:pPr marL="274320" indent="-274320">
               <a:spcAft>
-                <a:spcPts val="810"/>
+                <a:spcPts val="990"/>
               </a:spcAft>
               <a:buClr>
                 <a:srgbClr val="0645AD"/>
@@ -7881,19 +9814,28 @@
               <a:buChar char="•"/>
             </a:pPr>
             <a:r>
-              <a:rPr sz="1800" b="0">
+              <a:rPr sz="2200" b="1">
                 <a:solidFill>
                   <a:srgbClr val="202122"/>
                 </a:solidFill>
                 <a:latin typeface="Calibri"/>
               </a:rPr>
-              <a:t>Compiled or interpreted choice justified</a:t>
+              <a:t>Interpreter:</a:t>
+            </a:r>
+            <a:r>
+              <a:rPr sz="2200" b="0">
+                <a:solidFill>
+                  <a:srgbClr val="202122"/>
+                </a:solidFill>
+                <a:latin typeface="Calibri"/>
+              </a:rPr>
+              <a:t> translates and runs line by line; easier to debug</a:t>
             </a:r>
           </a:p>
           <a:p>
             <a:pPr marL="274320" indent="-274320">
               <a:spcAft>
-                <a:spcPts val="810"/>
+                <a:spcPts val="990"/>
               </a:spcAft>
               <a:buClr>
                 <a:srgbClr val="0645AD"/>
@@ -7902,13 +9844,13 @@
               <a:buChar char="•"/>
             </a:pPr>
             <a:r>
-              <a:rPr sz="1800" b="0">
+              <a:rPr sz="2200" b="0">
                 <a:solidFill>
                   <a:srgbClr val="202122"/>
                 </a:solidFill>
                 <a:latin typeface="Calibri"/>
               </a:rPr>
-              <a:t>Hardware realistic</a:t>
+              <a:t>Python is usually interpreted</a:t>
             </a:r>
           </a:p>
         </p:txBody>
@@ -7927,7 +9869,7 @@
     <p:bg>
       <p:bgPr>
         <a:solidFill>
-          <a:srgbClr val="03306E"/>
+          <a:srgbClr val="FFFFFF"/>
         </a:solidFill>
         <a:effectLst/>
       </p:bgPr>
@@ -7963,7 +9905,7 @@
             <a:r>
               <a:rPr sz="1100" b="1" i="0">
                 <a:solidFill>
-                  <a:srgbClr val="A9C8F0"/>
+                  <a:srgbClr val="54595D"/>
                 </a:solidFill>
                 <a:latin typeface="Calibri"/>
               </a:rPr>
@@ -7996,24 +9938,90 @@
             <a:r>
               <a:rPr sz="3200" b="1" i="0">
                 <a:solidFill>
-                  <a:srgbClr val="FFFFFF"/>
+                  <a:srgbClr val="03306E"/>
                 </a:solidFill>
                 <a:latin typeface="Cambria"/>
               </a:rPr>
-              <a:t>Exit ticket</a:t>
-            </a:r>
-          </a:p>
-        </p:txBody>
-      </p:sp>
-      <p:sp>
-        <p:nvSpPr>
-          <p:cNvPr id="4" name="Oval 3"/>
+              <a:t>Quick check: Code development tools</a:t>
+            </a:r>
+          </a:p>
+        </p:txBody>
+      </p:sp>
+      <p:sp>
+        <p:nvSpPr>
+          <p:cNvPr id="4" name="TextBox 3"/>
+          <p:cNvSpPr txBox="1"/>
+          <p:nvPr/>
+        </p:nvSpPr>
+        <p:spPr>
+          <a:xfrm>
+            <a:off x="548640" y="6446520"/>
+            <a:ext cx="8229600" cy="274320"/>
+          </a:xfrm>
+          <a:prstGeom prst="rect">
+            <a:avLst/>
+          </a:prstGeom>
+          <a:noFill/>
+        </p:spPr>
+        <p:txBody>
+          <a:bodyPr wrap="square" anchor="t" lIns="0" rIns="0" tIns="0" bIns="0"/>
+          <a:lstStyle/>
+          <a:p>
+            <a:pPr algn="l"/>
+            <a:r>
+              <a:rPr sz="1000" b="0" i="0">
+                <a:solidFill>
+                  <a:srgbClr val="54595D"/>
+                </a:solidFill>
+                <a:latin typeface="Calibri"/>
+              </a:rPr>
+              <a:t>Digital Software Development T Level  ·  Hardware and Software</a:t>
+            </a:r>
+          </a:p>
+        </p:txBody>
+      </p:sp>
+      <p:sp>
+        <p:nvSpPr>
+          <p:cNvPr id="5" name="TextBox 4"/>
+          <p:cNvSpPr txBox="1"/>
+          <p:nvPr/>
+        </p:nvSpPr>
+        <p:spPr>
+          <a:xfrm>
+            <a:off x="10728655" y="6446520"/>
+            <a:ext cx="914400" cy="274320"/>
+          </a:xfrm>
+          <a:prstGeom prst="rect">
+            <a:avLst/>
+          </a:prstGeom>
+          <a:noFill/>
+        </p:spPr>
+        <p:txBody>
+          <a:bodyPr wrap="square" anchor="t" lIns="0" rIns="0" tIns="0" bIns="0"/>
+          <a:lstStyle/>
+          <a:p>
+            <a:pPr algn="r"/>
+            <a:r>
+              <a:rPr sz="1000" b="0" i="0">
+                <a:solidFill>
+                  <a:srgbClr val="54595D"/>
+                </a:solidFill>
+                <a:latin typeface="Calibri"/>
+              </a:rPr>
+              <a:t>9</a:t>
+            </a:r>
+          </a:p>
+        </p:txBody>
+      </p:sp>
+      <p:sp>
+        <p:nvSpPr>
+          <p:cNvPr id="6" name="Oval 5"/>
           <p:cNvSpPr/>
           <p:nvPr/>
         </p:nvSpPr>
         <p:spPr>
           <a:xfrm>
-            <a:off x="548640" y="1737360"/>
+            <a:off x="548640" y="1691640"/>
             <a:ext cx="502920" cy="502920"/>
           </a:xfrm>
           <a:prstGeom prst="ellipse">
@@ -8047,7 +10055,7 @@
           <a:p>
             <a:pPr algn="ctr"/>
             <a:r>
-              <a:rPr sz="1700" b="1">
+              <a:rPr sz="1600" b="1">
                 <a:solidFill>
                   <a:srgbClr val="202122"/>
                 </a:solidFill>
@@ -8060,14 +10068,14 @@
       </p:sp>
       <p:sp>
         <p:nvSpPr>
-          <p:cNvPr id="5" name="TextBox 4"/>
+          <p:cNvPr id="7" name="TextBox 6"/>
           <p:cNvSpPr txBox="1"/>
           <p:nvPr/>
         </p:nvSpPr>
         <p:spPr>
           <a:xfrm>
-            <a:off x="1325880" y="1645920"/>
-            <a:ext cx="6583680" cy="822960"/>
+            <a:off x="1371600" y="1645920"/>
+            <a:ext cx="10271455" cy="1188720"/>
           </a:xfrm>
           <a:prstGeom prst="rect">
             <a:avLst/>
@@ -8075,31 +10083,31 @@
           <a:noFill/>
         </p:spPr>
         <p:txBody>
-          <a:bodyPr wrap="square" anchor="ctr" lIns="0" rIns="0" tIns="0" bIns="0"/>
+          <a:bodyPr wrap="square" anchor="t" lIns="0" rIns="0" tIns="0" bIns="0"/>
           <a:lstStyle/>
           <a:p>
             <a:pPr algn="l"/>
             <a:r>
-              <a:rPr sz="2000" b="0" i="0">
-                <a:solidFill>
-                  <a:srgbClr val="FFFFFF"/>
-                </a:solidFill>
-                <a:latin typeface="Calibri"/>
-              </a:rPr>
-              <a:t>Why might a developer prefer an interpreter while testing?</a:t>
-            </a:r>
-          </a:p>
-        </p:txBody>
-      </p:sp>
-      <p:sp>
-        <p:nvSpPr>
-          <p:cNvPr id="6" name="Oval 5"/>
+              <a:rPr sz="2400" b="0" i="0">
+                <a:solidFill>
+                  <a:srgbClr val="202122"/>
+                </a:solidFill>
+                <a:latin typeface="Calibri"/>
+              </a:rPr>
+              <a:t>What is the difference between a compiler and an interpreter?</a:t>
+            </a:r>
+          </a:p>
+        </p:txBody>
+      </p:sp>
+      <p:sp>
+        <p:nvSpPr>
+          <p:cNvPr id="8" name="Oval 7"/>
           <p:cNvSpPr/>
           <p:nvPr/>
         </p:nvSpPr>
         <p:spPr>
           <a:xfrm>
-            <a:off x="548640" y="2697480"/>
+            <a:off x="548640" y="3108960"/>
             <a:ext cx="502920" cy="502920"/>
           </a:xfrm>
           <a:prstGeom prst="ellipse">
@@ -8133,7 +10141,7 @@
           <a:p>
             <a:pPr algn="ctr"/>
             <a:r>
-              <a:rPr sz="1700" b="1">
+              <a:rPr sz="1600" b="1">
                 <a:solidFill>
                   <a:srgbClr val="202122"/>
                 </a:solidFill>
@@ -8146,14 +10154,14 @@
       </p:sp>
       <p:sp>
         <p:nvSpPr>
-          <p:cNvPr id="7" name="TextBox 6"/>
+          <p:cNvPr id="9" name="TextBox 8"/>
           <p:cNvSpPr txBox="1"/>
           <p:nvPr/>
         </p:nvSpPr>
         <p:spPr>
           <a:xfrm>
-            <a:off x="1325880" y="2606040"/>
-            <a:ext cx="6583680" cy="822960"/>
+            <a:off x="1371600" y="3063240"/>
+            <a:ext cx="10271455" cy="1188720"/>
           </a:xfrm>
           <a:prstGeom prst="rect">
             <a:avLst/>
@@ -8161,31 +10169,31 @@
           <a:noFill/>
         </p:spPr>
         <p:txBody>
-          <a:bodyPr wrap="square" anchor="ctr" lIns="0" rIns="0" tIns="0" bIns="0"/>
+          <a:bodyPr wrap="square" anchor="t" lIns="0" rIns="0" tIns="0" bIns="0"/>
           <a:lstStyle/>
           <a:p>
             <a:pPr algn="l"/>
             <a:r>
-              <a:rPr sz="2000" b="0" i="0">
-                <a:solidFill>
-                  <a:srgbClr val="FFFFFF"/>
-                </a:solidFill>
-                <a:latin typeface="Calibri"/>
-              </a:rPr>
-              <a:t>What does a package manager do?</a:t>
-            </a:r>
-          </a:p>
-        </p:txBody>
-      </p:sp>
-      <p:sp>
-        <p:nvSpPr>
-          <p:cNvPr id="8" name="Oval 7"/>
+              <a:rPr sz="2400" b="0" i="0">
+                <a:solidFill>
+                  <a:srgbClr val="202122"/>
+                </a:solidFill>
+                <a:latin typeface="Calibri"/>
+              </a:rPr>
+              <a:t>Name two IDE features.</a:t>
+            </a:r>
+          </a:p>
+        </p:txBody>
+      </p:sp>
+      <p:sp>
+        <p:nvSpPr>
+          <p:cNvPr id="10" name="Oval 9"/>
           <p:cNvSpPr/>
           <p:nvPr/>
         </p:nvSpPr>
         <p:spPr>
           <a:xfrm>
-            <a:off x="548640" y="3657600"/>
+            <a:off x="548640" y="4526280"/>
             <a:ext cx="502920" cy="502920"/>
           </a:xfrm>
           <a:prstGeom prst="ellipse">
@@ -8219,7 +10227,7 @@
           <a:p>
             <a:pPr algn="ctr"/>
             <a:r>
-              <a:rPr sz="1700" b="1">
+              <a:rPr sz="1600" b="1">
                 <a:solidFill>
                   <a:srgbClr val="202122"/>
                 </a:solidFill>
@@ -8228,83 +10236,6 @@
               <a:t>3</a:t>
             </a:r>
           </a:p>
-        </p:txBody>
-      </p:sp>
-      <p:sp>
-        <p:nvSpPr>
-          <p:cNvPr id="9" name="TextBox 8"/>
-          <p:cNvSpPr txBox="1"/>
-          <p:nvPr/>
-        </p:nvSpPr>
-        <p:spPr>
-          <a:xfrm>
-            <a:off x="1325880" y="3566160"/>
-            <a:ext cx="6583680" cy="822960"/>
-          </a:xfrm>
-          <a:prstGeom prst="rect">
-            <a:avLst/>
-          </a:prstGeom>
-          <a:noFill/>
-        </p:spPr>
-        <p:txBody>
-          <a:bodyPr wrap="square" anchor="ctr" lIns="0" rIns="0" tIns="0" bIns="0"/>
-          <a:lstStyle/>
-          <a:p>
-            <a:pPr algn="l"/>
-            <a:r>
-              <a:rPr sz="2000" b="0" i="0">
-                <a:solidFill>
-                  <a:srgbClr val="FFFFFF"/>
-                </a:solidFill>
-                <a:latin typeface="Calibri"/>
-              </a:rPr>
-              <a:t>Name one embedded device you used today.</a:t>
-            </a:r>
-          </a:p>
-        </p:txBody>
-      </p:sp>
-      <p:sp>
-        <p:nvSpPr>
-          <p:cNvPr id="10" name="Rounded Rectangle 9"/>
-          <p:cNvSpPr/>
-          <p:nvPr/>
-        </p:nvSpPr>
-        <p:spPr>
-          <a:xfrm>
-            <a:off x="8229600" y="1645920"/>
-            <a:ext cx="3410712" cy="2926080"/>
-          </a:xfrm>
-          <a:prstGeom prst="roundRect">
-            <a:avLst>
-              <a:gd name="adj" fmla="val 8000"/>
-            </a:avLst>
-          </a:prstGeom>
-          <a:solidFill>
-            <a:srgbClr val="0645AD"/>
-          </a:solidFill>
-          <a:ln>
-            <a:noFill/>
-          </a:ln>
-          <a:effectLst/>
-        </p:spPr>
-        <p:style>
-          <a:lnRef idx="1">
-            <a:schemeClr val="accent1"/>
-          </a:lnRef>
-          <a:fillRef idx="3">
-            <a:schemeClr val="accent1"/>
-          </a:fillRef>
-          <a:effectRef idx="2">
-            <a:schemeClr val="accent1"/>
-          </a:effectRef>
-          <a:fontRef idx="minor">
-            <a:schemeClr val="lt1"/>
-          </a:fontRef>
-        </p:style>
-        <p:txBody>
-          <a:bodyPr rtlCol="0" anchor="ctr"/>
-          <a:lstStyle/>
-          <a:p/>
         </p:txBody>
       </p:sp>
       <p:sp>
@@ -8315,8 +10246,8 @@
         </p:nvSpPr>
         <p:spPr>
           <a:xfrm>
-            <a:off x="8503920" y="1874519"/>
-            <a:ext cx="2926080" cy="365760"/>
+            <a:off x="1371600" y="4480560"/>
+            <a:ext cx="10271455" cy="1188720"/>
           </a:xfrm>
           <a:prstGeom prst="rect">
             <a:avLst/>
@@ -8329,13 +10260,13 @@
           <a:p>
             <a:pPr algn="l"/>
             <a:r>
-              <a:rPr sz="1300" b="1" i="0">
-                <a:solidFill>
-                  <a:srgbClr val="A9C8F0"/>
-                </a:solidFill>
-                <a:latin typeface="Calibri"/>
-              </a:rPr>
-              <a:t>REVISE THIS TOPIC</a:t>
+              <a:rPr sz="2400" b="0" i="0">
+                <a:solidFill>
+                  <a:srgbClr val="202122"/>
+                </a:solidFill>
+                <a:latin typeface="Calibri"/>
+              </a:rPr>
+              <a:t>Is Python usually compiled or interpreted?</a:t>
             </a:r>
           </a:p>
         </p:txBody>
@@ -8348,8 +10279,8 @@
         </p:nvSpPr>
         <p:spPr>
           <a:xfrm>
-            <a:off x="8503920" y="2286000"/>
-            <a:ext cx="2926080" cy="548640"/>
+            <a:off x="548640" y="5852160"/>
+            <a:ext cx="11094415" cy="365760"/>
           </a:xfrm>
           <a:prstGeom prst="rect">
             <a:avLst/>
@@ -8362,79 +10293,13 @@
           <a:p>
             <a:pPr algn="l"/>
             <a:r>
-              <a:rPr sz="1400" b="0" i="0">
-                <a:solidFill>
-                  <a:srgbClr val="FFFFFF"/>
-                </a:solidFill>
-                <a:latin typeface="Calibri"/>
-              </a:rPr>
-              <a:t>Revision notes for this lesson are on the study wiki:</a:t>
-            </a:r>
-          </a:p>
-        </p:txBody>
-      </p:sp>
-      <p:sp>
-        <p:nvSpPr>
-          <p:cNvPr id="13" name="TextBox 12"/>
-          <p:cNvSpPr txBox="1"/>
-          <p:nvPr/>
-        </p:nvSpPr>
-        <p:spPr>
-          <a:xfrm>
-            <a:off x="8503920" y="2926080"/>
-            <a:ext cx="2926080" cy="1463040"/>
-          </a:xfrm>
-          <a:prstGeom prst="rect">
-            <a:avLst/>
-          </a:prstGeom>
-          <a:noFill/>
-        </p:spPr>
-        <p:txBody>
-          <a:bodyPr wrap="square" anchor="t" lIns="0" rIns="0" tIns="0" bIns="0"/>
-          <a:lstStyle/>
-          <a:p>
-            <a:pPr algn="l"/>
-            <a:r>
-              <a:rPr sz="2000" b="1" i="0">
-                <a:solidFill>
-                  <a:srgbClr val="FFFFFF"/>
-                </a:solidFill>
-                <a:latin typeface="Cambria"/>
-              </a:rPr>
-              <a:t>Core Paper 2: Business Context, Data, Digital Environments and Security</a:t>
-            </a:r>
-          </a:p>
-        </p:txBody>
-      </p:sp>
-      <p:sp>
-        <p:nvSpPr>
-          <p:cNvPr id="14" name="TextBox 13"/>
-          <p:cNvSpPr txBox="1"/>
-          <p:nvPr/>
-        </p:nvSpPr>
-        <p:spPr>
-          <a:xfrm>
-            <a:off x="548640" y="5669280"/>
-            <a:ext cx="11094415" cy="548640"/>
-          </a:xfrm>
-          <a:prstGeom prst="rect">
-            <a:avLst/>
-          </a:prstGeom>
-          <a:noFill/>
-        </p:spPr>
-        <p:txBody>
-          <a:bodyPr wrap="square" anchor="t" lIns="0" rIns="0" tIns="0" bIns="0"/>
-          <a:lstStyle/>
-          <a:p>
-            <a:pPr algn="l"/>
-            <a:r>
-              <a:rPr sz="1200" b="0" i="0">
-                <a:solidFill>
-                  <a:srgbClr val="A9C8F0"/>
-                </a:solidFill>
-                <a:latin typeface="Calibri"/>
-              </a:rPr>
-              <a:t>https://lana6478.github.io/T-level-Digital-Software-Development/#/01-core-component/02-core-paper-2.md</a:t>
+              <a:rPr sz="1300" b="0" i="1">
+                <a:solidFill>
+                  <a:srgbClr val="54595D"/>
+                </a:solidFill>
+                <a:latin typeface="Calibri"/>
+              </a:rPr>
+              <a:t>Answer on mini whiteboards or in your book. Answers are in the speaker notes.</a:t>
             </a:r>
           </a:p>
         </p:txBody>
